--- a/output/wordlabs-support-3day.pptx
+++ b/output/wordlabs-support-3day.pptx
@@ -4240,7 +4240,7 @@
                 <a:ea typeface="Calibri" pitchFamily="34" charset="-122"/>
                 <a:cs typeface="Calibri" pitchFamily="34" charset="-120"/>
               </a:rPr>
-              <a:t>"hold up, carry from below"</a:t>
+              <a:t>"hold up, bear, carry"</a:t>
             </a:r>
             <a:endParaRPr lang="en-US" sz="2200" dirty="0"/>
           </a:p>
@@ -5288,7 +5288,7 @@
                 <a:ea typeface="Calibri" pitchFamily="34" charset="-122"/>
                 <a:cs typeface="Calibri" pitchFamily="34" charset="-120"/>
               </a:rPr>
-              <a:t>Word Labs  •  wordlabs.app  •  Root: 'support' = hold up, carry from below</a:t>
+              <a:t>Word Labs  •  wordlabs.app  •  Root: 'support' = hold up, bear, carry</a:t>
             </a:r>
             <a:endParaRPr lang="en-US" sz="800" dirty="0"/>
           </a:p>
@@ -5622,7 +5622,7 @@
                 <a:ea typeface="Trebuchet MS" pitchFamily="34" charset="-122"/>
                 <a:cs typeface="Trebuchet MS" pitchFamily="34" charset="-120"/>
               </a:rPr>
-              <a:t>0</a:t>
+              <a:t>1</a:t>
             </a:r>
             <a:pPr algn="ctr" indent="0" marL="0">
               <a:buNone/>
@@ -5928,7 +5928,7 @@
                 <a:ea typeface="Calibri" pitchFamily="34" charset="-122"/>
                 <a:cs typeface="Calibri" pitchFamily="34" charset="-120"/>
               </a:rPr>
-              <a:t>Word Labs  •  wordlabs.app  •  Root: 'support' = hold up, carry from below</a:t>
+              <a:t>Word Labs  •  wordlabs.app  •  Root: 'support' = hold up, bear, carry</a:t>
             </a:r>
             <a:endParaRPr lang="en-US" sz="800" dirty="0"/>
           </a:p>
@@ -6040,7 +6040,7 @@
                 <a:ea typeface="Calibri" pitchFamily="34" charset="-122"/>
                 <a:cs typeface="Calibri" pitchFamily="34" charset="-120"/>
               </a:rPr>
-              <a:t>Our school's </a:t>
+              <a:t>The coach was very </a:t>
             </a:r>
             <a:pPr algn="l" indent="0" marL="0">
               <a:buNone/>
@@ -6057,7 +6057,7 @@
                 <a:ea typeface="Calibri" pitchFamily="34" charset="-122"/>
                 <a:cs typeface="Calibri" pitchFamily="34" charset="-120"/>
               </a:rPr>
-              <a:t>supporters</a:t>
+              <a:t>supportive</a:t>
             </a:r>
             <a:pPr algn="l" indent="0" marL="0">
               <a:buNone/>
@@ -6071,7 +6071,7 @@
                 <a:ea typeface="Calibri" pitchFamily="34" charset="-122"/>
                 <a:cs typeface="Calibri" pitchFamily="34" charset="-120"/>
               </a:rPr>
-              <a:t> were incredibly </a:t>
+              <a:t>, and her encouragement helped every </a:t>
             </a:r>
             <a:pPr algn="l" indent="0" marL="0">
               <a:buNone/>
@@ -6088,7 +6088,7 @@
                 <a:ea typeface="Calibri" pitchFamily="34" charset="-122"/>
                 <a:cs typeface="Calibri" pitchFamily="34" charset="-120"/>
               </a:rPr>
-              <a:t>supportive</a:t>
+              <a:t>supporter</a:t>
             </a:r>
             <a:pPr algn="l" indent="0" marL="0">
               <a:buNone/>
@@ -6102,7 +6102,7 @@
                 <a:ea typeface="Calibri" pitchFamily="34" charset="-122"/>
                 <a:cs typeface="Calibri" pitchFamily="34" charset="-120"/>
               </a:rPr>
-              <a:t> during the fundraising week.</a:t>
+              <a:t> in the crowd feel proud.</a:t>
             </a:r>
             <a:endParaRPr lang="en-US" sz="1800" dirty="0"/>
           </a:p>
@@ -6257,7 +6257,7 @@
                 <a:ea typeface="Trebuchet MS" pitchFamily="34" charset="-122"/>
                 <a:cs typeface="Trebuchet MS" pitchFamily="34" charset="-120"/>
               </a:rPr>
-              <a:t>supporters</a:t>
+              <a:t>supportive</a:t>
             </a:r>
             <a:endParaRPr lang="en-US" sz="1400" dirty="0"/>
           </a:p>
@@ -6385,7 +6385,7 @@
                 <a:ea typeface="Trebuchet MS" pitchFamily="34" charset="-122"/>
                 <a:cs typeface="Trebuchet MS" pitchFamily="34" charset="-120"/>
               </a:rPr>
-              <a:t>supportive</a:t>
+              <a:t>supporter</a:t>
             </a:r>
             <a:endParaRPr lang="en-US" sz="1400" dirty="0"/>
           </a:p>
@@ -6716,7 +6716,7 @@
                 <a:ea typeface="Calibri" pitchFamily="34" charset="-122"/>
                 <a:cs typeface="Calibri" pitchFamily="34" charset="-120"/>
               </a:rPr>
-              <a:t>Word Labs  •  wordlabs.app  •  Root: 'support' = hold up, carry from below</a:t>
+              <a:t>Word Labs  •  wordlabs.app  •  Root: 'support' = hold up, bear, carry</a:t>
             </a:r>
             <a:endParaRPr lang="en-US" sz="800" dirty="0"/>
           </a:p>
@@ -6855,7 +6855,7 @@
                 <a:ea typeface="Trebuchet MS" pitchFamily="34" charset="-122"/>
                 <a:cs typeface="Trebuchet MS" pitchFamily="34" charset="-120"/>
               </a:rPr>
-              <a:t>supporters</a:t>
+              <a:t>supportive</a:t>
             </a:r>
             <a:endParaRPr lang="en-US" sz="2800" dirty="0"/>
           </a:p>
@@ -7543,7 +7543,7 @@
                 <a:ea typeface="Calibri" pitchFamily="34" charset="-122"/>
                 <a:cs typeface="Calibri" pitchFamily="34" charset="-120"/>
               </a:rPr>
-              <a:t>Word Labs  •  wordlabs.app  •  Root: 'support' = hold up, carry from below</a:t>
+              <a:t>Word Labs  •  wordlabs.app  •  Root: 'support' = hold up, bear, carry</a:t>
             </a:r>
             <a:endParaRPr lang="en-US" sz="800" dirty="0"/>
           </a:p>
@@ -7682,7 +7682,7 @@
                 <a:ea typeface="Trebuchet MS" pitchFamily="34" charset="-122"/>
                 <a:cs typeface="Trebuchet MS" pitchFamily="34" charset="-120"/>
               </a:rPr>
-              <a:t>supporters</a:t>
+              <a:t>supportive</a:t>
             </a:r>
             <a:endParaRPr lang="en-US" sz="2800" dirty="0"/>
           </a:p>
@@ -7762,7 +7762,7 @@
         </p:nvSpPr>
         <p:spPr>
           <a:xfrm>
-            <a:off x="2221992" y="2258568"/>
+            <a:off x="2938272" y="2258568"/>
             <a:ext cx="1828800" cy="292608"/>
           </a:xfrm>
           <a:prstGeom prst="rect">
@@ -7796,7 +7796,7 @@
         </p:nvSpPr>
         <p:spPr>
           <a:xfrm>
-            <a:off x="2221992" y="2258568"/>
+            <a:off x="2938272" y="2258568"/>
             <a:ext cx="1828800" cy="292608"/>
           </a:xfrm>
           <a:prstGeom prst="rect">
@@ -7835,7 +7835,7 @@
         </p:nvSpPr>
         <p:spPr>
           <a:xfrm>
-            <a:off x="2221992" y="2569464"/>
+            <a:off x="2938272" y="2569464"/>
             <a:ext cx="1828800" cy="201168"/>
           </a:xfrm>
           <a:prstGeom prst="rect">
@@ -7860,7 +7860,7 @@
                 <a:ea typeface="Calibri" pitchFamily="34" charset="-122"/>
                 <a:cs typeface="Calibri" pitchFamily="34" charset="-120"/>
               </a:rPr>
-              <a:t>hold up, back someone</a:t>
+              <a:t>hold up, help</a:t>
             </a:r>
             <a:endParaRPr lang="en-US" sz="850" dirty="0"/>
           </a:p>
@@ -7874,7 +7874,7 @@
         </p:nvSpPr>
         <p:spPr>
           <a:xfrm>
-            <a:off x="4370832" y="2258568"/>
+            <a:off x="5803392" y="2258568"/>
             <a:ext cx="1828800" cy="292608"/>
           </a:xfrm>
           <a:prstGeom prst="rect">
@@ -7908,7 +7908,7 @@
         </p:nvSpPr>
         <p:spPr>
           <a:xfrm>
-            <a:off x="4370832" y="2258568"/>
+            <a:off x="5803392" y="2258568"/>
             <a:ext cx="1828800" cy="292608"/>
           </a:xfrm>
           <a:prstGeom prst="rect">
@@ -7933,7 +7933,7 @@
                 <a:ea typeface="Trebuchet MS" pitchFamily="34" charset="-122"/>
                 <a:cs typeface="Trebuchet MS" pitchFamily="34" charset="-120"/>
               </a:rPr>
-              <a:t>er</a:t>
+              <a:t>ive</a:t>
             </a:r>
             <a:endParaRPr lang="en-US" sz="1300" dirty="0"/>
           </a:p>
@@ -7947,7 +7947,7 @@
         </p:nvSpPr>
         <p:spPr>
           <a:xfrm>
-            <a:off x="4370832" y="2569464"/>
+            <a:off x="5803392" y="2569464"/>
             <a:ext cx="1828800" cy="201168"/>
           </a:xfrm>
           <a:prstGeom prst="rect">
@@ -7972,7 +7972,7 @@
                 <a:ea typeface="Calibri" pitchFamily="34" charset="-122"/>
                 <a:cs typeface="Calibri" pitchFamily="34" charset="-120"/>
               </a:rPr>
-              <a:t>a person who does</a:t>
+              <a:t>having the quality of</a:t>
             </a:r>
             <a:endParaRPr lang="en-US" sz="850" dirty="0"/>
           </a:p>
@@ -7986,30 +7986,23 @@
         </p:nvSpPr>
         <p:spPr>
           <a:xfrm>
-            <a:off x="6519672" y="2258568"/>
-            <a:ext cx="1828800" cy="292608"/>
+            <a:off x="365760" y="3273552"/>
+            <a:ext cx="1371600" cy="658368"/>
           </a:xfrm>
           <a:prstGeom prst="rect">
             <a:avLst>
-              <a:gd name="adj" fmla="val 25000"/>
+              <a:gd name="adj" fmla="val 8333"/>
             </a:avLst>
           </a:prstGeom>
           <a:solidFill>
-            <a:srgbClr val="FCE7F3"/>
-          </a:solidFill>
-          <a:ln w="19050">
-            <a:solidFill>
-              <a:srgbClr val="DB2777"/>
-            </a:solidFill>
-            <a:prstDash val="solid"/>
-          </a:ln>
-          <a:effectLst>
-            <a:outerShdw sx="100000" sy="100000" kx="0" ky="0" algn="bl" rotWithShape="0" blurRad="101600" dist="38100" dir="8100000">
-              <a:srgbClr val="000000">
-                <a:alpha val="12000"/>
-              </a:srgbClr>
-            </a:outerShdw>
-          </a:effectLst>
+            <a:srgbClr val="E2E8F0"/>
+          </a:solidFill>
+          <a:ln w="12700">
+            <a:solidFill>
+              <a:srgbClr val="E2E8F0"/>
+            </a:solidFill>
+            <a:prstDash val="solid"/>
+          </a:ln>
         </p:spPr>
       </p:sp>
       <p:sp>
@@ -8020,90 +8013,117 @@
         </p:nvSpPr>
         <p:spPr>
           <a:xfrm>
-            <a:off x="6519672" y="2258568"/>
-            <a:ext cx="1828800" cy="292608"/>
-          </a:xfrm>
-          <a:prstGeom prst="rect">
-            <a:avLst/>
-          </a:prstGeom>
-          <a:noFill/>
-          <a:ln/>
-        </p:spPr>
-        <p:txBody>
-          <a:bodyPr wrap="square" lIns="0" tIns="0" rIns="0" bIns="0" rtlCol="0" anchor="ctr"/>
-          <a:lstStyle/>
-          <a:p>
-            <a:pPr algn="ctr" indent="0" marL="0">
-              <a:buNone/>
-            </a:pPr>
-            <a:r>
-              <a:rPr lang="en-US" sz="1300" b="1" dirty="0">
-                <a:solidFill>
-                  <a:srgbClr val="9D174D"/>
+            <a:off x="365760" y="3273552"/>
+            <a:ext cx="1371600" cy="658368"/>
+          </a:xfrm>
+          <a:prstGeom prst="rect">
+            <a:avLst/>
+          </a:prstGeom>
+          <a:noFill/>
+          <a:ln/>
+        </p:spPr>
+        <p:txBody>
+          <a:bodyPr wrap="square" lIns="0" tIns="0" rIns="0" bIns="0" rtlCol="0" anchor="ctr"/>
+          <a:lstStyle/>
+          <a:p>
+            <a:pPr algn="ctr" indent="0" marL="0">
+              <a:buNone/>
+            </a:pPr>
+            <a:r>
+              <a:rPr lang="en-US" sz="1100" b="1" dirty="0">
+                <a:solidFill>
+                  <a:srgbClr val="475569"/>
                 </a:solidFill>
                 <a:latin typeface="Trebuchet MS" pitchFamily="34" charset="0"/>
                 <a:ea typeface="Trebuchet MS" pitchFamily="34" charset="-122"/>
                 <a:cs typeface="Trebuchet MS" pitchFamily="34" charset="-120"/>
               </a:rPr>
-              <a:t>s</a:t>
-            </a:r>
-            <a:endParaRPr lang="en-US" sz="1300" dirty="0"/>
-          </a:p>
-        </p:txBody>
-      </p:sp>
-      <p:sp>
-        <p:nvSpPr>
-          <p:cNvPr id="24" name="Text 22"/>
-          <p:cNvSpPr/>
-          <p:nvPr/>
-        </p:nvSpPr>
-        <p:spPr>
-          <a:xfrm>
-            <a:off x="6519672" y="2569464"/>
-            <a:ext cx="1828800" cy="201168"/>
-          </a:xfrm>
-          <a:prstGeom prst="rect">
-            <a:avLst/>
-          </a:prstGeom>
-          <a:noFill/>
-          <a:ln/>
-        </p:spPr>
-        <p:txBody>
-          <a:bodyPr wrap="square" lIns="0" tIns="0" rIns="0" bIns="0" rtlCol="0" anchor="t"/>
-          <a:lstStyle/>
-          <a:p>
-            <a:pPr algn="ctr" indent="0" marL="0">
-              <a:buNone/>
-            </a:pPr>
-            <a:r>
-              <a:rPr lang="en-US" sz="850" dirty="0">
-                <a:solidFill>
-                  <a:srgbClr val="475569"/>
+              <a:t>Syllables</a:t>
+            </a:r>
+            <a:endParaRPr lang="en-US" sz="1100" dirty="0"/>
+          </a:p>
+        </p:txBody>
+      </p:sp>
+      <p:sp>
+        <p:nvSpPr>
+          <p:cNvPr id="24" name="Shape 22"/>
+          <p:cNvSpPr/>
+          <p:nvPr/>
+        </p:nvSpPr>
+        <p:spPr>
+          <a:xfrm>
+            <a:off x="1874520" y="3273552"/>
+            <a:ext cx="6903720" cy="658368"/>
+          </a:xfrm>
+          <a:prstGeom prst="rect">
+            <a:avLst>
+              <a:gd name="adj" fmla="val 8333"/>
+            </a:avLst>
+          </a:prstGeom>
+          <a:solidFill>
+            <a:srgbClr val="F8FAFC"/>
+          </a:solidFill>
+          <a:ln w="12700">
+            <a:solidFill>
+              <a:srgbClr val="E2E8F0"/>
+            </a:solidFill>
+            <a:prstDash val="dash"/>
+          </a:ln>
+        </p:spPr>
+      </p:sp>
+      <p:sp>
+        <p:nvSpPr>
+          <p:cNvPr id="25" name="Text 23"/>
+          <p:cNvSpPr/>
+          <p:nvPr/>
+        </p:nvSpPr>
+        <p:spPr>
+          <a:xfrm>
+            <a:off x="1874520" y="3273552"/>
+            <a:ext cx="6903720" cy="658368"/>
+          </a:xfrm>
+          <a:prstGeom prst="rect">
+            <a:avLst/>
+          </a:prstGeom>
+          <a:noFill/>
+          <a:ln/>
+        </p:spPr>
+        <p:txBody>
+          <a:bodyPr wrap="square" rtlCol="0" anchor="ctr"/>
+          <a:lstStyle/>
+          <a:p>
+            <a:pPr algn="ctr" indent="0" marL="0">
+              <a:buNone/>
+            </a:pPr>
+            <a:r>
+              <a:rPr lang="en-US" sz="1100" i="1" dirty="0">
+                <a:solidFill>
+                  <a:srgbClr val="CBD5E1"/>
                 </a:solidFill>
                 <a:latin typeface="Calibri" pitchFamily="34" charset="0"/>
                 <a:ea typeface="Calibri" pitchFamily="34" charset="-122"/>
                 <a:cs typeface="Calibri" pitchFamily="34" charset="-120"/>
               </a:rPr>
-              <a:t>more than one</a:t>
-            </a:r>
-            <a:endParaRPr lang="en-US" sz="850" dirty="0"/>
-          </a:p>
-        </p:txBody>
-      </p:sp>
-      <p:sp>
-        <p:nvSpPr>
-          <p:cNvPr id="25" name="Shape 23"/>
-          <p:cNvSpPr/>
-          <p:nvPr/>
-        </p:nvSpPr>
-        <p:spPr>
-          <a:xfrm>
-            <a:off x="365760" y="3273552"/>
-            <a:ext cx="1371600" cy="658368"/>
+              <a:t>Write here...</a:t>
+            </a:r>
+            <a:endParaRPr lang="en-US" sz="1100" dirty="0"/>
+          </a:p>
+        </p:txBody>
+      </p:sp>
+      <p:sp>
+        <p:nvSpPr>
+          <p:cNvPr id="26" name="Shape 24"/>
+          <p:cNvSpPr/>
+          <p:nvPr/>
+        </p:nvSpPr>
+        <p:spPr>
+          <a:xfrm>
+            <a:off x="365760" y="4096512"/>
+            <a:ext cx="1371600" cy="804672"/>
           </a:xfrm>
           <a:prstGeom prst="rect">
             <a:avLst>
-              <a:gd name="adj" fmla="val 8333"/>
+              <a:gd name="adj" fmla="val 6818"/>
             </a:avLst>
           </a:prstGeom>
           <a:solidFill>
@@ -8119,14 +8139,14 @@
       </p:sp>
       <p:sp>
         <p:nvSpPr>
-          <p:cNvPr id="26" name="Text 24"/>
-          <p:cNvSpPr/>
-          <p:nvPr/>
-        </p:nvSpPr>
-        <p:spPr>
-          <a:xfrm>
-            <a:off x="365760" y="3273552"/>
-            <a:ext cx="1371600" cy="658368"/>
+          <p:cNvPr id="27" name="Text 25"/>
+          <p:cNvSpPr/>
+          <p:nvPr/>
+        </p:nvSpPr>
+        <p:spPr>
+          <a:xfrm>
+            <a:off x="365760" y="4096512"/>
+            <a:ext cx="1371600" cy="804672"/>
           </a:xfrm>
           <a:prstGeom prst="rect">
             <a:avLst/>
@@ -8150,7 +8170,7 @@
                 <a:ea typeface="Trebuchet MS" pitchFamily="34" charset="-122"/>
                 <a:cs typeface="Trebuchet MS" pitchFamily="34" charset="-120"/>
               </a:rPr>
-              <a:t>Syllables</a:t>
+              <a:t>Phonemes</a:t>
             </a:r>
             <a:endParaRPr lang="en-US" sz="1100" dirty="0"/>
           </a:p>
@@ -8158,80 +8178,14 @@
       </p:sp>
       <p:sp>
         <p:nvSpPr>
-          <p:cNvPr id="27" name="Shape 25"/>
-          <p:cNvSpPr/>
-          <p:nvPr/>
-        </p:nvSpPr>
-        <p:spPr>
-          <a:xfrm>
-            <a:off x="1874520" y="3273552"/>
-            <a:ext cx="6903720" cy="658368"/>
-          </a:xfrm>
-          <a:prstGeom prst="rect">
-            <a:avLst>
-              <a:gd name="adj" fmla="val 8333"/>
-            </a:avLst>
-          </a:prstGeom>
-          <a:solidFill>
-            <a:srgbClr val="F8FAFC"/>
-          </a:solidFill>
-          <a:ln w="12700">
-            <a:solidFill>
-              <a:srgbClr val="E2E8F0"/>
-            </a:solidFill>
-            <a:prstDash val="dash"/>
-          </a:ln>
-        </p:spPr>
-      </p:sp>
-      <p:sp>
-        <p:nvSpPr>
-          <p:cNvPr id="28" name="Text 26"/>
-          <p:cNvSpPr/>
-          <p:nvPr/>
-        </p:nvSpPr>
-        <p:spPr>
-          <a:xfrm>
-            <a:off x="1874520" y="3273552"/>
-            <a:ext cx="6903720" cy="658368"/>
-          </a:xfrm>
-          <a:prstGeom prst="rect">
-            <a:avLst/>
-          </a:prstGeom>
-          <a:noFill/>
-          <a:ln/>
-        </p:spPr>
-        <p:txBody>
-          <a:bodyPr wrap="square" rtlCol="0" anchor="ctr"/>
-          <a:lstStyle/>
-          <a:p>
-            <a:pPr algn="ctr" indent="0" marL="0">
-              <a:buNone/>
-            </a:pPr>
-            <a:r>
-              <a:rPr lang="en-US" sz="1100" i="1" dirty="0">
-                <a:solidFill>
-                  <a:srgbClr val="CBD5E1"/>
-                </a:solidFill>
-                <a:latin typeface="Calibri" pitchFamily="34" charset="0"/>
-                <a:ea typeface="Calibri" pitchFamily="34" charset="-122"/>
-                <a:cs typeface="Calibri" pitchFamily="34" charset="-120"/>
-              </a:rPr>
-              <a:t>Write here...</a:t>
-            </a:r>
-            <a:endParaRPr lang="en-US" sz="1100" dirty="0"/>
-          </a:p>
-        </p:txBody>
-      </p:sp>
-      <p:sp>
-        <p:nvSpPr>
-          <p:cNvPr id="29" name="Shape 27"/>
-          <p:cNvSpPr/>
-          <p:nvPr/>
-        </p:nvSpPr>
-        <p:spPr>
-          <a:xfrm>
-            <a:off x="365760" y="4096512"/>
-            <a:ext cx="1371600" cy="804672"/>
+          <p:cNvPr id="28" name="Shape 26"/>
+          <p:cNvSpPr/>
+          <p:nvPr/>
+        </p:nvSpPr>
+        <p:spPr>
+          <a:xfrm>
+            <a:off x="1874520" y="4096512"/>
+            <a:ext cx="6903720" cy="804672"/>
           </a:xfrm>
           <a:prstGeom prst="rect">
             <a:avLst>
@@ -8239,85 +8193,19 @@
             </a:avLst>
           </a:prstGeom>
           <a:solidFill>
-            <a:srgbClr val="E2E8F0"/>
+            <a:srgbClr val="F8FAFC"/>
           </a:solidFill>
           <a:ln w="12700">
             <a:solidFill>
               <a:srgbClr val="E2E8F0"/>
             </a:solidFill>
-            <a:prstDash val="solid"/>
-          </a:ln>
-        </p:spPr>
-      </p:sp>
-      <p:sp>
-        <p:nvSpPr>
-          <p:cNvPr id="30" name="Text 28"/>
-          <p:cNvSpPr/>
-          <p:nvPr/>
-        </p:nvSpPr>
-        <p:spPr>
-          <a:xfrm>
-            <a:off x="365760" y="4096512"/>
-            <a:ext cx="1371600" cy="804672"/>
-          </a:xfrm>
-          <a:prstGeom prst="rect">
-            <a:avLst/>
-          </a:prstGeom>
-          <a:noFill/>
-          <a:ln/>
-        </p:spPr>
-        <p:txBody>
-          <a:bodyPr wrap="square" lIns="0" tIns="0" rIns="0" bIns="0" rtlCol="0" anchor="ctr"/>
-          <a:lstStyle/>
-          <a:p>
-            <a:pPr algn="ctr" indent="0" marL="0">
-              <a:buNone/>
-            </a:pPr>
-            <a:r>
-              <a:rPr lang="en-US" sz="1100" b="1" dirty="0">
-                <a:solidFill>
-                  <a:srgbClr val="475569"/>
-                </a:solidFill>
-                <a:latin typeface="Trebuchet MS" pitchFamily="34" charset="0"/>
-                <a:ea typeface="Trebuchet MS" pitchFamily="34" charset="-122"/>
-                <a:cs typeface="Trebuchet MS" pitchFamily="34" charset="-120"/>
-              </a:rPr>
-              <a:t>Phonemes</a:t>
-            </a:r>
-            <a:endParaRPr lang="en-US" sz="1100" dirty="0"/>
-          </a:p>
-        </p:txBody>
-      </p:sp>
-      <p:sp>
-        <p:nvSpPr>
-          <p:cNvPr id="31" name="Shape 29"/>
-          <p:cNvSpPr/>
-          <p:nvPr/>
-        </p:nvSpPr>
-        <p:spPr>
-          <a:xfrm>
-            <a:off x="1874520" y="4096512"/>
-            <a:ext cx="6903720" cy="804672"/>
-          </a:xfrm>
-          <a:prstGeom prst="rect">
-            <a:avLst>
-              <a:gd name="adj" fmla="val 6818"/>
-            </a:avLst>
-          </a:prstGeom>
-          <a:solidFill>
-            <a:srgbClr val="F8FAFC"/>
-          </a:solidFill>
-          <a:ln w="12700">
-            <a:solidFill>
-              <a:srgbClr val="E2E8F0"/>
-            </a:solidFill>
             <a:prstDash val="dash"/>
           </a:ln>
         </p:spPr>
       </p:sp>
       <p:sp>
         <p:nvSpPr>
-          <p:cNvPr id="32" name="Text 30"/>
+          <p:cNvPr id="29" name="Text 27"/>
           <p:cNvSpPr/>
           <p:nvPr/>
         </p:nvSpPr>
@@ -8640,7 +8528,7 @@
                 <a:ea typeface="Calibri" pitchFamily="34" charset="-122"/>
                 <a:cs typeface="Calibri" pitchFamily="34" charset="-120"/>
               </a:rPr>
-              <a:t>Word Labs  •  wordlabs.app  •  Root: 'support' = hold up, carry from below</a:t>
+              <a:t>Word Labs  •  wordlabs.app  •  Root: 'support' = hold up, bear, carry</a:t>
             </a:r>
             <a:endParaRPr lang="en-US" sz="800" dirty="0"/>
           </a:p>
@@ -8779,7 +8667,7 @@
                 <a:ea typeface="Trebuchet MS" pitchFamily="34" charset="-122"/>
                 <a:cs typeface="Trebuchet MS" pitchFamily="34" charset="-120"/>
               </a:rPr>
-              <a:t>supporters</a:t>
+              <a:t>supportive</a:t>
             </a:r>
             <a:endParaRPr lang="en-US" sz="2800" dirty="0"/>
           </a:p>
@@ -8859,7 +8747,7 @@
         </p:nvSpPr>
         <p:spPr>
           <a:xfrm>
-            <a:off x="2221992" y="2258568"/>
+            <a:off x="2938272" y="2258568"/>
             <a:ext cx="1828800" cy="292608"/>
           </a:xfrm>
           <a:prstGeom prst="rect">
@@ -8893,7 +8781,7 @@
         </p:nvSpPr>
         <p:spPr>
           <a:xfrm>
-            <a:off x="2221992" y="2258568"/>
+            <a:off x="2938272" y="2258568"/>
             <a:ext cx="1828800" cy="292608"/>
           </a:xfrm>
           <a:prstGeom prst="rect">
@@ -8932,7 +8820,7 @@
         </p:nvSpPr>
         <p:spPr>
           <a:xfrm>
-            <a:off x="2221992" y="2569464"/>
+            <a:off x="2938272" y="2569464"/>
             <a:ext cx="1828800" cy="201168"/>
           </a:xfrm>
           <a:prstGeom prst="rect">
@@ -8957,7 +8845,7 @@
                 <a:ea typeface="Calibri" pitchFamily="34" charset="-122"/>
                 <a:cs typeface="Calibri" pitchFamily="34" charset="-120"/>
               </a:rPr>
-              <a:t>hold up, back someone</a:t>
+              <a:t>hold up, help</a:t>
             </a:r>
             <a:endParaRPr lang="en-US" sz="850" dirty="0"/>
           </a:p>
@@ -8971,7 +8859,7 @@
         </p:nvSpPr>
         <p:spPr>
           <a:xfrm>
-            <a:off x="4370832" y="2258568"/>
+            <a:off x="5803392" y="2258568"/>
             <a:ext cx="1828800" cy="292608"/>
           </a:xfrm>
           <a:prstGeom prst="rect">
@@ -9005,7 +8893,7 @@
         </p:nvSpPr>
         <p:spPr>
           <a:xfrm>
-            <a:off x="4370832" y="2258568"/>
+            <a:off x="5803392" y="2258568"/>
             <a:ext cx="1828800" cy="292608"/>
           </a:xfrm>
           <a:prstGeom prst="rect">
@@ -9030,7 +8918,7 @@
                 <a:ea typeface="Trebuchet MS" pitchFamily="34" charset="-122"/>
                 <a:cs typeface="Trebuchet MS" pitchFamily="34" charset="-120"/>
               </a:rPr>
-              <a:t>er</a:t>
+              <a:t>ive</a:t>
             </a:r>
             <a:endParaRPr lang="en-US" sz="1300" dirty="0"/>
           </a:p>
@@ -9044,7 +8932,7 @@
         </p:nvSpPr>
         <p:spPr>
           <a:xfrm>
-            <a:off x="4370832" y="2569464"/>
+            <a:off x="5803392" y="2569464"/>
             <a:ext cx="1828800" cy="201168"/>
           </a:xfrm>
           <a:prstGeom prst="rect">
@@ -9069,7 +8957,7 @@
                 <a:ea typeface="Calibri" pitchFamily="34" charset="-122"/>
                 <a:cs typeface="Calibri" pitchFamily="34" charset="-120"/>
               </a:rPr>
-              <a:t>a person who does</a:t>
+              <a:t>having the quality of</a:t>
             </a:r>
             <a:endParaRPr lang="en-US" sz="850" dirty="0"/>
           </a:p>
@@ -9083,30 +8971,23 @@
         </p:nvSpPr>
         <p:spPr>
           <a:xfrm>
-            <a:off x="6519672" y="2258568"/>
-            <a:ext cx="1828800" cy="292608"/>
+            <a:off x="365760" y="3273552"/>
+            <a:ext cx="1371600" cy="658368"/>
           </a:xfrm>
           <a:prstGeom prst="rect">
             <a:avLst>
-              <a:gd name="adj" fmla="val 25000"/>
+              <a:gd name="adj" fmla="val 8333"/>
             </a:avLst>
           </a:prstGeom>
           <a:solidFill>
-            <a:srgbClr val="FCE7F3"/>
-          </a:solidFill>
-          <a:ln w="19050">
-            <a:solidFill>
-              <a:srgbClr val="DB2777"/>
-            </a:solidFill>
-            <a:prstDash val="solid"/>
-          </a:ln>
-          <a:effectLst>
-            <a:outerShdw sx="100000" sy="100000" kx="0" ky="0" algn="bl" rotWithShape="0" blurRad="101600" dist="38100" dir="8100000">
-              <a:srgbClr val="000000">
-                <a:alpha val="12000"/>
-              </a:srgbClr>
-            </a:outerShdw>
-          </a:effectLst>
+            <a:srgbClr val="E2E8F0"/>
+          </a:solidFill>
+          <a:ln w="12700">
+            <a:solidFill>
+              <a:srgbClr val="E2E8F0"/>
+            </a:solidFill>
+            <a:prstDash val="solid"/>
+          </a:ln>
         </p:spPr>
       </p:sp>
       <p:sp>
@@ -9117,86 +8998,47 @@
         </p:nvSpPr>
         <p:spPr>
           <a:xfrm>
-            <a:off x="6519672" y="2258568"/>
-            <a:ext cx="1828800" cy="292608"/>
-          </a:xfrm>
-          <a:prstGeom prst="rect">
-            <a:avLst/>
-          </a:prstGeom>
-          <a:noFill/>
-          <a:ln/>
-        </p:spPr>
-        <p:txBody>
-          <a:bodyPr wrap="square" lIns="0" tIns="0" rIns="0" bIns="0" rtlCol="0" anchor="ctr"/>
-          <a:lstStyle/>
-          <a:p>
-            <a:pPr algn="ctr" indent="0" marL="0">
-              <a:buNone/>
-            </a:pPr>
-            <a:r>
-              <a:rPr lang="en-US" sz="1300" b="1" dirty="0">
-                <a:solidFill>
-                  <a:srgbClr val="9D174D"/>
+            <a:off x="365760" y="3273552"/>
+            <a:ext cx="1371600" cy="658368"/>
+          </a:xfrm>
+          <a:prstGeom prst="rect">
+            <a:avLst/>
+          </a:prstGeom>
+          <a:noFill/>
+          <a:ln/>
+        </p:spPr>
+        <p:txBody>
+          <a:bodyPr wrap="square" lIns="0" tIns="0" rIns="0" bIns="0" rtlCol="0" anchor="ctr"/>
+          <a:lstStyle/>
+          <a:p>
+            <a:pPr algn="ctr" indent="0" marL="0">
+              <a:buNone/>
+            </a:pPr>
+            <a:r>
+              <a:rPr lang="en-US" sz="1100" b="1" dirty="0">
+                <a:solidFill>
+                  <a:srgbClr val="475569"/>
                 </a:solidFill>
                 <a:latin typeface="Trebuchet MS" pitchFamily="34" charset="0"/>
                 <a:ea typeface="Trebuchet MS" pitchFamily="34" charset="-122"/>
                 <a:cs typeface="Trebuchet MS" pitchFamily="34" charset="-120"/>
               </a:rPr>
-              <a:t>s</a:t>
-            </a:r>
-            <a:endParaRPr lang="en-US" sz="1300" dirty="0"/>
-          </a:p>
-        </p:txBody>
-      </p:sp>
-      <p:sp>
-        <p:nvSpPr>
-          <p:cNvPr id="24" name="Text 22"/>
-          <p:cNvSpPr/>
-          <p:nvPr/>
-        </p:nvSpPr>
-        <p:spPr>
-          <a:xfrm>
-            <a:off x="6519672" y="2569464"/>
-            <a:ext cx="1828800" cy="201168"/>
-          </a:xfrm>
-          <a:prstGeom prst="rect">
-            <a:avLst/>
-          </a:prstGeom>
-          <a:noFill/>
-          <a:ln/>
-        </p:spPr>
-        <p:txBody>
-          <a:bodyPr wrap="square" lIns="0" tIns="0" rIns="0" bIns="0" rtlCol="0" anchor="t"/>
-          <a:lstStyle/>
-          <a:p>
-            <a:pPr algn="ctr" indent="0" marL="0">
-              <a:buNone/>
-            </a:pPr>
-            <a:r>
-              <a:rPr lang="en-US" sz="850" dirty="0">
-                <a:solidFill>
-                  <a:srgbClr val="475569"/>
-                </a:solidFill>
-                <a:latin typeface="Calibri" pitchFamily="34" charset="0"/>
-                <a:ea typeface="Calibri" pitchFamily="34" charset="-122"/>
-                <a:cs typeface="Calibri" pitchFamily="34" charset="-120"/>
-              </a:rPr>
-              <a:t>more than one</a:t>
-            </a:r>
-            <a:endParaRPr lang="en-US" sz="850" dirty="0"/>
-          </a:p>
-        </p:txBody>
-      </p:sp>
-      <p:sp>
-        <p:nvSpPr>
-          <p:cNvPr id="25" name="Shape 23"/>
-          <p:cNvSpPr/>
-          <p:nvPr/>
-        </p:nvSpPr>
-        <p:spPr>
-          <a:xfrm>
-            <a:off x="365760" y="3273552"/>
-            <a:ext cx="1371600" cy="658368"/>
+              <a:t>Syllables</a:t>
+            </a:r>
+            <a:endParaRPr lang="en-US" sz="1100" dirty="0"/>
+          </a:p>
+        </p:txBody>
+      </p:sp>
+      <p:sp>
+        <p:nvSpPr>
+          <p:cNvPr id="24" name="Shape 22"/>
+          <p:cNvSpPr/>
+          <p:nvPr/>
+        </p:nvSpPr>
+        <p:spPr>
+          <a:xfrm>
+            <a:off x="1874520" y="3273552"/>
+            <a:ext cx="6903720" cy="658368"/>
           </a:xfrm>
           <a:prstGeom prst="rect">
             <a:avLst>
@@ -9204,11 +9046,38 @@
             </a:avLst>
           </a:prstGeom>
           <a:solidFill>
-            <a:srgbClr val="E2E8F0"/>
-          </a:solidFill>
-          <a:ln w="12700">
-            <a:solidFill>
-              <a:srgbClr val="E2E8F0"/>
+            <a:srgbClr val="CCFBF1"/>
+          </a:solidFill>
+          <a:ln w="12700">
+            <a:solidFill>
+              <a:srgbClr val="0D9488"/>
+            </a:solidFill>
+            <a:prstDash val="solid"/>
+          </a:ln>
+        </p:spPr>
+      </p:sp>
+      <p:sp>
+        <p:nvSpPr>
+          <p:cNvPr id="25" name="Shape 23"/>
+          <p:cNvSpPr/>
+          <p:nvPr/>
+        </p:nvSpPr>
+        <p:spPr>
+          <a:xfrm>
+            <a:off x="2313432" y="3364992"/>
+            <a:ext cx="1645920" cy="475488"/>
+          </a:xfrm>
+          <a:prstGeom prst="rect">
+            <a:avLst>
+              <a:gd name="adj" fmla="val 9615"/>
+            </a:avLst>
+          </a:prstGeom>
+          <a:solidFill>
+            <a:srgbClr val="FFFFFF"/>
+          </a:solidFill>
+          <a:ln w="12700">
+            <a:solidFill>
+              <a:srgbClr val="0D9488"/>
             </a:solidFill>
             <a:prstDash val="solid"/>
           </a:ln>
@@ -9222,63 +9091,75 @@
         </p:nvSpPr>
         <p:spPr>
           <a:xfrm>
-            <a:off x="365760" y="3273552"/>
-            <a:ext cx="1371600" cy="658368"/>
-          </a:xfrm>
-          <a:prstGeom prst="rect">
-            <a:avLst/>
-          </a:prstGeom>
-          <a:noFill/>
-          <a:ln/>
-        </p:spPr>
-        <p:txBody>
-          <a:bodyPr wrap="square" lIns="0" tIns="0" rIns="0" bIns="0" rtlCol="0" anchor="ctr"/>
-          <a:lstStyle/>
-          <a:p>
-            <a:pPr algn="ctr" indent="0" marL="0">
-              <a:buNone/>
-            </a:pPr>
-            <a:r>
-              <a:rPr lang="en-US" sz="1100" b="1" dirty="0">
-                <a:solidFill>
-                  <a:srgbClr val="475569"/>
+            <a:off x="2313432" y="3364992"/>
+            <a:ext cx="1645920" cy="475488"/>
+          </a:xfrm>
+          <a:prstGeom prst="rect">
+            <a:avLst/>
+          </a:prstGeom>
+          <a:noFill/>
+          <a:ln/>
+        </p:spPr>
+        <p:txBody>
+          <a:bodyPr wrap="square" lIns="0" tIns="0" rIns="0" bIns="0" rtlCol="0" anchor="ctr"/>
+          <a:lstStyle/>
+          <a:p>
+            <a:pPr algn="ctr" indent="0" marL="0">
+              <a:buNone/>
+            </a:pPr>
+            <a:r>
+              <a:rPr lang="en-US" sz="1400" b="1" dirty="0">
+                <a:solidFill>
+                  <a:srgbClr val="0D9488"/>
                 </a:solidFill>
                 <a:latin typeface="Trebuchet MS" pitchFamily="34" charset="0"/>
                 <a:ea typeface="Trebuchet MS" pitchFamily="34" charset="-122"/>
                 <a:cs typeface="Trebuchet MS" pitchFamily="34" charset="-120"/>
               </a:rPr>
-              <a:t>Syllables</a:t>
-            </a:r>
-            <a:endParaRPr lang="en-US" sz="1100" dirty="0"/>
-          </a:p>
-        </p:txBody>
-      </p:sp>
-      <p:sp>
-        <p:nvSpPr>
-          <p:cNvPr id="27" name="Shape 25"/>
-          <p:cNvSpPr/>
-          <p:nvPr/>
-        </p:nvSpPr>
-        <p:spPr>
-          <a:xfrm>
-            <a:off x="1874520" y="3273552"/>
-            <a:ext cx="6903720" cy="658368"/>
-          </a:xfrm>
-          <a:prstGeom prst="rect">
-            <a:avLst>
-              <a:gd name="adj" fmla="val 8333"/>
-            </a:avLst>
-          </a:prstGeom>
-          <a:solidFill>
-            <a:srgbClr val="CCFBF1"/>
-          </a:solidFill>
-          <a:ln w="12700">
-            <a:solidFill>
-              <a:srgbClr val="0D9488"/>
-            </a:solidFill>
-            <a:prstDash val="solid"/>
-          </a:ln>
-        </p:spPr>
+              <a:t>sup</a:t>
+            </a:r>
+            <a:endParaRPr lang="en-US" sz="1400" dirty="0"/>
+          </a:p>
+        </p:txBody>
+      </p:sp>
+      <p:sp>
+        <p:nvSpPr>
+          <p:cNvPr id="27" name="Text 25"/>
+          <p:cNvSpPr/>
+          <p:nvPr/>
+        </p:nvSpPr>
+        <p:spPr>
+          <a:xfrm>
+            <a:off x="3959352" y="3364992"/>
+            <a:ext cx="411480" cy="475488"/>
+          </a:xfrm>
+          <a:prstGeom prst="rect">
+            <a:avLst/>
+          </a:prstGeom>
+          <a:noFill/>
+          <a:ln/>
+        </p:spPr>
+        <p:txBody>
+          <a:bodyPr wrap="square" lIns="0" tIns="0" rIns="0" bIns="0" rtlCol="0" anchor="ctr"/>
+          <a:lstStyle/>
+          <a:p>
+            <a:pPr algn="ctr" indent="0" marL="0">
+              <a:buNone/>
+            </a:pPr>
+            <a:r>
+              <a:rPr lang="en-US" sz="1600" b="1" dirty="0">
+                <a:solidFill>
+                  <a:srgbClr val="0D9488"/>
+                </a:solidFill>
+                <a:latin typeface="Trebuchet MS" pitchFamily="34" charset="0"/>
+                <a:ea typeface="Trebuchet MS" pitchFamily="34" charset="-122"/>
+                <a:cs typeface="Trebuchet MS" pitchFamily="34" charset="-120"/>
+              </a:rPr>
+              <a:t>·</a:t>
+            </a:r>
+            <a:endParaRPr lang="en-US" sz="1600" dirty="0"/>
+          </a:p>
+        </p:txBody>
       </p:sp>
       <p:sp>
         <p:nvSpPr>
@@ -9288,7 +9169,7 @@
         </p:nvSpPr>
         <p:spPr>
           <a:xfrm>
-            <a:off x="2313432" y="3364992"/>
+            <a:off x="4370832" y="3364992"/>
             <a:ext cx="1645920" cy="475488"/>
           </a:xfrm>
           <a:prstGeom prst="rect">
@@ -9315,7 +9196,7 @@
         </p:nvSpPr>
         <p:spPr>
           <a:xfrm>
-            <a:off x="2313432" y="3364992"/>
+            <a:off x="4370832" y="3364992"/>
             <a:ext cx="1645920" cy="475488"/>
           </a:xfrm>
           <a:prstGeom prst="rect">
@@ -9340,7 +9221,7 @@
                 <a:ea typeface="Trebuchet MS" pitchFamily="34" charset="-122"/>
                 <a:cs typeface="Trebuchet MS" pitchFamily="34" charset="-120"/>
               </a:rPr>
-              <a:t>sup</a:t>
+              <a:t>port</a:t>
             </a:r>
             <a:endParaRPr lang="en-US" sz="1400" dirty="0"/>
           </a:p>
@@ -9354,7 +9235,7 @@
         </p:nvSpPr>
         <p:spPr>
           <a:xfrm>
-            <a:off x="3959352" y="3364992"/>
+            <a:off x="6016752" y="3364992"/>
             <a:ext cx="411480" cy="475488"/>
           </a:xfrm>
           <a:prstGeom prst="rect">
@@ -9393,7 +9274,7 @@
         </p:nvSpPr>
         <p:spPr>
           <a:xfrm>
-            <a:off x="4370832" y="3364992"/>
+            <a:off x="6428232" y="3364992"/>
             <a:ext cx="1645920" cy="475488"/>
           </a:xfrm>
           <a:prstGeom prst="rect">
@@ -9420,7 +9301,7 @@
         </p:nvSpPr>
         <p:spPr>
           <a:xfrm>
-            <a:off x="4370832" y="3364992"/>
+            <a:off x="6428232" y="3364992"/>
             <a:ext cx="1645920" cy="475488"/>
           </a:xfrm>
           <a:prstGeom prst="rect">
@@ -9445,7 +9326,7 @@
                 <a:ea typeface="Trebuchet MS" pitchFamily="34" charset="-122"/>
                 <a:cs typeface="Trebuchet MS" pitchFamily="34" charset="-120"/>
               </a:rPr>
-              <a:t>port</a:t>
+              <a:t>ive</a:t>
             </a:r>
             <a:endParaRPr lang="en-US" sz="1400" dirty="0"/>
           </a:p>
@@ -9453,119 +9334,80 @@
       </p:sp>
       <p:sp>
         <p:nvSpPr>
-          <p:cNvPr id="33" name="Text 31"/>
-          <p:cNvSpPr/>
-          <p:nvPr/>
-        </p:nvSpPr>
-        <p:spPr>
-          <a:xfrm>
-            <a:off x="6016752" y="3364992"/>
-            <a:ext cx="411480" cy="475488"/>
-          </a:xfrm>
-          <a:prstGeom prst="rect">
-            <a:avLst/>
-          </a:prstGeom>
-          <a:noFill/>
-          <a:ln/>
-        </p:spPr>
-        <p:txBody>
-          <a:bodyPr wrap="square" lIns="0" tIns="0" rIns="0" bIns="0" rtlCol="0" anchor="ctr"/>
-          <a:lstStyle/>
-          <a:p>
-            <a:pPr algn="ctr" indent="0" marL="0">
-              <a:buNone/>
-            </a:pPr>
-            <a:r>
-              <a:rPr lang="en-US" sz="1600" b="1" dirty="0">
-                <a:solidFill>
-                  <a:srgbClr val="0D9488"/>
+          <p:cNvPr id="33" name="Shape 31"/>
+          <p:cNvSpPr/>
+          <p:nvPr/>
+        </p:nvSpPr>
+        <p:spPr>
+          <a:xfrm>
+            <a:off x="365760" y="4096512"/>
+            <a:ext cx="1371600" cy="804672"/>
+          </a:xfrm>
+          <a:prstGeom prst="rect">
+            <a:avLst>
+              <a:gd name="adj" fmla="val 6818"/>
+            </a:avLst>
+          </a:prstGeom>
+          <a:solidFill>
+            <a:srgbClr val="E2E8F0"/>
+          </a:solidFill>
+          <a:ln w="12700">
+            <a:solidFill>
+              <a:srgbClr val="E2E8F0"/>
+            </a:solidFill>
+            <a:prstDash val="solid"/>
+          </a:ln>
+        </p:spPr>
+      </p:sp>
+      <p:sp>
+        <p:nvSpPr>
+          <p:cNvPr id="34" name="Text 32"/>
+          <p:cNvSpPr/>
+          <p:nvPr/>
+        </p:nvSpPr>
+        <p:spPr>
+          <a:xfrm>
+            <a:off x="365760" y="4096512"/>
+            <a:ext cx="1371600" cy="804672"/>
+          </a:xfrm>
+          <a:prstGeom prst="rect">
+            <a:avLst/>
+          </a:prstGeom>
+          <a:noFill/>
+          <a:ln/>
+        </p:spPr>
+        <p:txBody>
+          <a:bodyPr wrap="square" lIns="0" tIns="0" rIns="0" bIns="0" rtlCol="0" anchor="ctr"/>
+          <a:lstStyle/>
+          <a:p>
+            <a:pPr algn="ctr" indent="0" marL="0">
+              <a:buNone/>
+            </a:pPr>
+            <a:r>
+              <a:rPr lang="en-US" sz="1100" b="1" dirty="0">
+                <a:solidFill>
+                  <a:srgbClr val="475569"/>
                 </a:solidFill>
                 <a:latin typeface="Trebuchet MS" pitchFamily="34" charset="0"/>
                 <a:ea typeface="Trebuchet MS" pitchFamily="34" charset="-122"/>
                 <a:cs typeface="Trebuchet MS" pitchFamily="34" charset="-120"/>
               </a:rPr>
-              <a:t>·</a:t>
-            </a:r>
-            <a:endParaRPr lang="en-US" sz="1600" dirty="0"/>
-          </a:p>
-        </p:txBody>
-      </p:sp>
-      <p:sp>
-        <p:nvSpPr>
-          <p:cNvPr id="34" name="Shape 32"/>
-          <p:cNvSpPr/>
-          <p:nvPr/>
-        </p:nvSpPr>
-        <p:spPr>
-          <a:xfrm>
-            <a:off x="6428232" y="3364992"/>
-            <a:ext cx="1645920" cy="475488"/>
-          </a:xfrm>
-          <a:prstGeom prst="rect">
-            <a:avLst>
-              <a:gd name="adj" fmla="val 9615"/>
-            </a:avLst>
-          </a:prstGeom>
-          <a:solidFill>
-            <a:srgbClr val="FFFFFF"/>
-          </a:solidFill>
-          <a:ln w="12700">
-            <a:solidFill>
-              <a:srgbClr val="0D9488"/>
-            </a:solidFill>
-            <a:prstDash val="solid"/>
-          </a:ln>
-        </p:spPr>
-      </p:sp>
-      <p:sp>
-        <p:nvSpPr>
-          <p:cNvPr id="35" name="Text 33"/>
-          <p:cNvSpPr/>
-          <p:nvPr/>
-        </p:nvSpPr>
-        <p:spPr>
-          <a:xfrm>
-            <a:off x="6428232" y="3364992"/>
-            <a:ext cx="1645920" cy="475488"/>
-          </a:xfrm>
-          <a:prstGeom prst="rect">
-            <a:avLst/>
-          </a:prstGeom>
-          <a:noFill/>
-          <a:ln/>
-        </p:spPr>
-        <p:txBody>
-          <a:bodyPr wrap="square" lIns="0" tIns="0" rIns="0" bIns="0" rtlCol="0" anchor="ctr"/>
-          <a:lstStyle/>
-          <a:p>
-            <a:pPr algn="ctr" indent="0" marL="0">
-              <a:buNone/>
-            </a:pPr>
-            <a:r>
-              <a:rPr lang="en-US" sz="1400" b="1" dirty="0">
-                <a:solidFill>
-                  <a:srgbClr val="0D9488"/>
-                </a:solidFill>
-                <a:latin typeface="Trebuchet MS" pitchFamily="34" charset="0"/>
-                <a:ea typeface="Trebuchet MS" pitchFamily="34" charset="-122"/>
-                <a:cs typeface="Trebuchet MS" pitchFamily="34" charset="-120"/>
-              </a:rPr>
-              <a:t>ers</a:t>
-            </a:r>
-            <a:endParaRPr lang="en-US" sz="1400" dirty="0"/>
-          </a:p>
-        </p:txBody>
-      </p:sp>
-      <p:sp>
-        <p:nvSpPr>
-          <p:cNvPr id="36" name="Shape 34"/>
-          <p:cNvSpPr/>
-          <p:nvPr/>
-        </p:nvSpPr>
-        <p:spPr>
-          <a:xfrm>
-            <a:off x="365760" y="4096512"/>
-            <a:ext cx="1371600" cy="804672"/>
+              <a:t>Phonemes</a:t>
+            </a:r>
+            <a:endParaRPr lang="en-US" sz="1100" dirty="0"/>
+          </a:p>
+        </p:txBody>
+      </p:sp>
+      <p:sp>
+        <p:nvSpPr>
+          <p:cNvPr id="35" name="Shape 33"/>
+          <p:cNvSpPr/>
+          <p:nvPr/>
+        </p:nvSpPr>
+        <p:spPr>
+          <a:xfrm>
+            <a:off x="1874520" y="4096512"/>
+            <a:ext cx="6903720" cy="804672"/>
           </a:xfrm>
           <a:prstGeom prst="rect">
             <a:avLst>
@@ -9573,85 +9415,19 @@
             </a:avLst>
           </a:prstGeom>
           <a:solidFill>
-            <a:srgbClr val="E2E8F0"/>
+            <a:srgbClr val="F8FAFC"/>
           </a:solidFill>
           <a:ln w="12700">
             <a:solidFill>
               <a:srgbClr val="E2E8F0"/>
             </a:solidFill>
-            <a:prstDash val="solid"/>
-          </a:ln>
-        </p:spPr>
-      </p:sp>
-      <p:sp>
-        <p:nvSpPr>
-          <p:cNvPr id="37" name="Text 35"/>
-          <p:cNvSpPr/>
-          <p:nvPr/>
-        </p:nvSpPr>
-        <p:spPr>
-          <a:xfrm>
-            <a:off x="365760" y="4096512"/>
-            <a:ext cx="1371600" cy="804672"/>
-          </a:xfrm>
-          <a:prstGeom prst="rect">
-            <a:avLst/>
-          </a:prstGeom>
-          <a:noFill/>
-          <a:ln/>
-        </p:spPr>
-        <p:txBody>
-          <a:bodyPr wrap="square" lIns="0" tIns="0" rIns="0" bIns="0" rtlCol="0" anchor="ctr"/>
-          <a:lstStyle/>
-          <a:p>
-            <a:pPr algn="ctr" indent="0" marL="0">
-              <a:buNone/>
-            </a:pPr>
-            <a:r>
-              <a:rPr lang="en-US" sz="1100" b="1" dirty="0">
-                <a:solidFill>
-                  <a:srgbClr val="475569"/>
-                </a:solidFill>
-                <a:latin typeface="Trebuchet MS" pitchFamily="34" charset="0"/>
-                <a:ea typeface="Trebuchet MS" pitchFamily="34" charset="-122"/>
-                <a:cs typeface="Trebuchet MS" pitchFamily="34" charset="-120"/>
-              </a:rPr>
-              <a:t>Phonemes</a:t>
-            </a:r>
-            <a:endParaRPr lang="en-US" sz="1100" dirty="0"/>
-          </a:p>
-        </p:txBody>
-      </p:sp>
-      <p:sp>
-        <p:nvSpPr>
-          <p:cNvPr id="38" name="Shape 36"/>
-          <p:cNvSpPr/>
-          <p:nvPr/>
-        </p:nvSpPr>
-        <p:spPr>
-          <a:xfrm>
-            <a:off x="1874520" y="4096512"/>
-            <a:ext cx="6903720" cy="804672"/>
-          </a:xfrm>
-          <a:prstGeom prst="rect">
-            <a:avLst>
-              <a:gd name="adj" fmla="val 6818"/>
-            </a:avLst>
-          </a:prstGeom>
-          <a:solidFill>
-            <a:srgbClr val="F8FAFC"/>
-          </a:solidFill>
-          <a:ln w="12700">
-            <a:solidFill>
-              <a:srgbClr val="E2E8F0"/>
-            </a:solidFill>
             <a:prstDash val="dash"/>
           </a:ln>
         </p:spPr>
       </p:sp>
       <p:sp>
         <p:nvSpPr>
-          <p:cNvPr id="39" name="Text 37"/>
+          <p:cNvPr id="36" name="Text 34"/>
           <p:cNvSpPr/>
           <p:nvPr/>
         </p:nvSpPr>
@@ -9974,7 +9750,7 @@
                 <a:ea typeface="Calibri" pitchFamily="34" charset="-122"/>
                 <a:cs typeface="Calibri" pitchFamily="34" charset="-120"/>
               </a:rPr>
-              <a:t>Word Labs  •  wordlabs.app  •  Root: 'support' = hold up, carry from below</a:t>
+              <a:t>Word Labs  •  wordlabs.app  •  Root: 'support' = hold up, bear, carry</a:t>
             </a:r>
             <a:endParaRPr lang="en-US" sz="800" dirty="0"/>
           </a:p>
@@ -10113,7 +9889,7 @@
                 <a:ea typeface="Trebuchet MS" pitchFamily="34" charset="-122"/>
                 <a:cs typeface="Trebuchet MS" pitchFamily="34" charset="-120"/>
               </a:rPr>
-              <a:t>supporters</a:t>
+              <a:t>supportive</a:t>
             </a:r>
             <a:endParaRPr lang="en-US" sz="2800" dirty="0"/>
           </a:p>
@@ -10193,7 +9969,7 @@
         </p:nvSpPr>
         <p:spPr>
           <a:xfrm>
-            <a:off x="2221992" y="2258568"/>
+            <a:off x="2938272" y="2258568"/>
             <a:ext cx="1828800" cy="292608"/>
           </a:xfrm>
           <a:prstGeom prst="rect">
@@ -10227,7 +10003,7 @@
         </p:nvSpPr>
         <p:spPr>
           <a:xfrm>
-            <a:off x="2221992" y="2258568"/>
+            <a:off x="2938272" y="2258568"/>
             <a:ext cx="1828800" cy="292608"/>
           </a:xfrm>
           <a:prstGeom prst="rect">
@@ -10266,7 +10042,7 @@
         </p:nvSpPr>
         <p:spPr>
           <a:xfrm>
-            <a:off x="2221992" y="2569464"/>
+            <a:off x="2938272" y="2569464"/>
             <a:ext cx="1828800" cy="201168"/>
           </a:xfrm>
           <a:prstGeom prst="rect">
@@ -10291,7 +10067,7 @@
                 <a:ea typeface="Calibri" pitchFamily="34" charset="-122"/>
                 <a:cs typeface="Calibri" pitchFamily="34" charset="-120"/>
               </a:rPr>
-              <a:t>hold up, back someone</a:t>
+              <a:t>hold up, help</a:t>
             </a:r>
             <a:endParaRPr lang="en-US" sz="850" dirty="0"/>
           </a:p>
@@ -10305,7 +10081,7 @@
         </p:nvSpPr>
         <p:spPr>
           <a:xfrm>
-            <a:off x="4370832" y="2258568"/>
+            <a:off x="5803392" y="2258568"/>
             <a:ext cx="1828800" cy="292608"/>
           </a:xfrm>
           <a:prstGeom prst="rect">
@@ -10339,7 +10115,7 @@
         </p:nvSpPr>
         <p:spPr>
           <a:xfrm>
-            <a:off x="4370832" y="2258568"/>
+            <a:off x="5803392" y="2258568"/>
             <a:ext cx="1828800" cy="292608"/>
           </a:xfrm>
           <a:prstGeom prst="rect">
@@ -10364,7 +10140,7 @@
                 <a:ea typeface="Trebuchet MS" pitchFamily="34" charset="-122"/>
                 <a:cs typeface="Trebuchet MS" pitchFamily="34" charset="-120"/>
               </a:rPr>
-              <a:t>er</a:t>
+              <a:t>ive</a:t>
             </a:r>
             <a:endParaRPr lang="en-US" sz="1300" dirty="0"/>
           </a:p>
@@ -10378,7 +10154,7 @@
         </p:nvSpPr>
         <p:spPr>
           <a:xfrm>
-            <a:off x="4370832" y="2569464"/>
+            <a:off x="5803392" y="2569464"/>
             <a:ext cx="1828800" cy="201168"/>
           </a:xfrm>
           <a:prstGeom prst="rect">
@@ -10403,7 +10179,7 @@
                 <a:ea typeface="Calibri" pitchFamily="34" charset="-122"/>
                 <a:cs typeface="Calibri" pitchFamily="34" charset="-120"/>
               </a:rPr>
-              <a:t>a person who does</a:t>
+              <a:t>having the quality of</a:t>
             </a:r>
             <a:endParaRPr lang="en-US" sz="850" dirty="0"/>
           </a:p>
@@ -10417,30 +10193,23 @@
         </p:nvSpPr>
         <p:spPr>
           <a:xfrm>
-            <a:off x="6519672" y="2258568"/>
-            <a:ext cx="1828800" cy="292608"/>
+            <a:off x="365760" y="3273552"/>
+            <a:ext cx="1371600" cy="658368"/>
           </a:xfrm>
           <a:prstGeom prst="rect">
             <a:avLst>
-              <a:gd name="adj" fmla="val 25000"/>
+              <a:gd name="adj" fmla="val 8333"/>
             </a:avLst>
           </a:prstGeom>
           <a:solidFill>
-            <a:srgbClr val="FCE7F3"/>
-          </a:solidFill>
-          <a:ln w="19050">
-            <a:solidFill>
-              <a:srgbClr val="DB2777"/>
-            </a:solidFill>
-            <a:prstDash val="solid"/>
-          </a:ln>
-          <a:effectLst>
-            <a:outerShdw sx="100000" sy="100000" kx="0" ky="0" algn="bl" rotWithShape="0" blurRad="101600" dist="38100" dir="8100000">
-              <a:srgbClr val="000000">
-                <a:alpha val="12000"/>
-              </a:srgbClr>
-            </a:outerShdw>
-          </a:effectLst>
+            <a:srgbClr val="E2E8F0"/>
+          </a:solidFill>
+          <a:ln w="12700">
+            <a:solidFill>
+              <a:srgbClr val="E2E8F0"/>
+            </a:solidFill>
+            <a:prstDash val="solid"/>
+          </a:ln>
         </p:spPr>
       </p:sp>
       <p:sp>
@@ -10451,86 +10220,47 @@
         </p:nvSpPr>
         <p:spPr>
           <a:xfrm>
-            <a:off x="6519672" y="2258568"/>
-            <a:ext cx="1828800" cy="292608"/>
-          </a:xfrm>
-          <a:prstGeom prst="rect">
-            <a:avLst/>
-          </a:prstGeom>
-          <a:noFill/>
-          <a:ln/>
-        </p:spPr>
-        <p:txBody>
-          <a:bodyPr wrap="square" lIns="0" tIns="0" rIns="0" bIns="0" rtlCol="0" anchor="ctr"/>
-          <a:lstStyle/>
-          <a:p>
-            <a:pPr algn="ctr" indent="0" marL="0">
-              <a:buNone/>
-            </a:pPr>
-            <a:r>
-              <a:rPr lang="en-US" sz="1300" b="1" dirty="0">
-                <a:solidFill>
-                  <a:srgbClr val="9D174D"/>
+            <a:off x="365760" y="3273552"/>
+            <a:ext cx="1371600" cy="658368"/>
+          </a:xfrm>
+          <a:prstGeom prst="rect">
+            <a:avLst/>
+          </a:prstGeom>
+          <a:noFill/>
+          <a:ln/>
+        </p:spPr>
+        <p:txBody>
+          <a:bodyPr wrap="square" lIns="0" tIns="0" rIns="0" bIns="0" rtlCol="0" anchor="ctr"/>
+          <a:lstStyle/>
+          <a:p>
+            <a:pPr algn="ctr" indent="0" marL="0">
+              <a:buNone/>
+            </a:pPr>
+            <a:r>
+              <a:rPr lang="en-US" sz="1100" b="1" dirty="0">
+                <a:solidFill>
+                  <a:srgbClr val="475569"/>
                 </a:solidFill>
                 <a:latin typeface="Trebuchet MS" pitchFamily="34" charset="0"/>
                 <a:ea typeface="Trebuchet MS" pitchFamily="34" charset="-122"/>
                 <a:cs typeface="Trebuchet MS" pitchFamily="34" charset="-120"/>
               </a:rPr>
-              <a:t>s</a:t>
-            </a:r>
-            <a:endParaRPr lang="en-US" sz="1300" dirty="0"/>
-          </a:p>
-        </p:txBody>
-      </p:sp>
-      <p:sp>
-        <p:nvSpPr>
-          <p:cNvPr id="24" name="Text 22"/>
-          <p:cNvSpPr/>
-          <p:nvPr/>
-        </p:nvSpPr>
-        <p:spPr>
-          <a:xfrm>
-            <a:off x="6519672" y="2569464"/>
-            <a:ext cx="1828800" cy="201168"/>
-          </a:xfrm>
-          <a:prstGeom prst="rect">
-            <a:avLst/>
-          </a:prstGeom>
-          <a:noFill/>
-          <a:ln/>
-        </p:spPr>
-        <p:txBody>
-          <a:bodyPr wrap="square" lIns="0" tIns="0" rIns="0" bIns="0" rtlCol="0" anchor="t"/>
-          <a:lstStyle/>
-          <a:p>
-            <a:pPr algn="ctr" indent="0" marL="0">
-              <a:buNone/>
-            </a:pPr>
-            <a:r>
-              <a:rPr lang="en-US" sz="850" dirty="0">
-                <a:solidFill>
-                  <a:srgbClr val="475569"/>
-                </a:solidFill>
-                <a:latin typeface="Calibri" pitchFamily="34" charset="0"/>
-                <a:ea typeface="Calibri" pitchFamily="34" charset="-122"/>
-                <a:cs typeface="Calibri" pitchFamily="34" charset="-120"/>
-              </a:rPr>
-              <a:t>more than one</a:t>
-            </a:r>
-            <a:endParaRPr lang="en-US" sz="850" dirty="0"/>
-          </a:p>
-        </p:txBody>
-      </p:sp>
-      <p:sp>
-        <p:nvSpPr>
-          <p:cNvPr id="25" name="Shape 23"/>
-          <p:cNvSpPr/>
-          <p:nvPr/>
-        </p:nvSpPr>
-        <p:spPr>
-          <a:xfrm>
-            <a:off x="365760" y="3273552"/>
-            <a:ext cx="1371600" cy="658368"/>
+              <a:t>Syllables</a:t>
+            </a:r>
+            <a:endParaRPr lang="en-US" sz="1100" dirty="0"/>
+          </a:p>
+        </p:txBody>
+      </p:sp>
+      <p:sp>
+        <p:nvSpPr>
+          <p:cNvPr id="24" name="Shape 22"/>
+          <p:cNvSpPr/>
+          <p:nvPr/>
+        </p:nvSpPr>
+        <p:spPr>
+          <a:xfrm>
+            <a:off x="1874520" y="3273552"/>
+            <a:ext cx="6903720" cy="658368"/>
           </a:xfrm>
           <a:prstGeom prst="rect">
             <a:avLst>
@@ -10538,11 +10268,38 @@
             </a:avLst>
           </a:prstGeom>
           <a:solidFill>
-            <a:srgbClr val="E2E8F0"/>
-          </a:solidFill>
-          <a:ln w="12700">
-            <a:solidFill>
-              <a:srgbClr val="E2E8F0"/>
+            <a:srgbClr val="CCFBF1"/>
+          </a:solidFill>
+          <a:ln w="12700">
+            <a:solidFill>
+              <a:srgbClr val="0D9488"/>
+            </a:solidFill>
+            <a:prstDash val="solid"/>
+          </a:ln>
+        </p:spPr>
+      </p:sp>
+      <p:sp>
+        <p:nvSpPr>
+          <p:cNvPr id="25" name="Shape 23"/>
+          <p:cNvSpPr/>
+          <p:nvPr/>
+        </p:nvSpPr>
+        <p:spPr>
+          <a:xfrm>
+            <a:off x="2313432" y="3364992"/>
+            <a:ext cx="1645920" cy="475488"/>
+          </a:xfrm>
+          <a:prstGeom prst="rect">
+            <a:avLst>
+              <a:gd name="adj" fmla="val 9615"/>
+            </a:avLst>
+          </a:prstGeom>
+          <a:solidFill>
+            <a:srgbClr val="FFFFFF"/>
+          </a:solidFill>
+          <a:ln w="12700">
+            <a:solidFill>
+              <a:srgbClr val="0D9488"/>
             </a:solidFill>
             <a:prstDash val="solid"/>
           </a:ln>
@@ -10556,32 +10313,308 @@
         </p:nvSpPr>
         <p:spPr>
           <a:xfrm>
-            <a:off x="365760" y="3273552"/>
-            <a:ext cx="1371600" cy="658368"/>
-          </a:xfrm>
-          <a:prstGeom prst="rect">
-            <a:avLst/>
-          </a:prstGeom>
-          <a:noFill/>
-          <a:ln/>
-        </p:spPr>
-        <p:txBody>
-          <a:bodyPr wrap="square" lIns="0" tIns="0" rIns="0" bIns="0" rtlCol="0" anchor="ctr"/>
-          <a:lstStyle/>
-          <a:p>
-            <a:pPr algn="ctr" indent="0" marL="0">
-              <a:buNone/>
-            </a:pPr>
-            <a:r>
-              <a:rPr lang="en-US" sz="1100" b="1" dirty="0">
-                <a:solidFill>
-                  <a:srgbClr val="475569"/>
+            <a:off x="2313432" y="3364992"/>
+            <a:ext cx="1645920" cy="475488"/>
+          </a:xfrm>
+          <a:prstGeom prst="rect">
+            <a:avLst/>
+          </a:prstGeom>
+          <a:noFill/>
+          <a:ln/>
+        </p:spPr>
+        <p:txBody>
+          <a:bodyPr wrap="square" lIns="0" tIns="0" rIns="0" bIns="0" rtlCol="0" anchor="ctr"/>
+          <a:lstStyle/>
+          <a:p>
+            <a:pPr algn="ctr" indent="0" marL="0">
+              <a:buNone/>
+            </a:pPr>
+            <a:r>
+              <a:rPr lang="en-US" sz="1400" b="1" dirty="0">
+                <a:solidFill>
+                  <a:srgbClr val="0D9488"/>
                 </a:solidFill>
                 <a:latin typeface="Trebuchet MS" pitchFamily="34" charset="0"/>
                 <a:ea typeface="Trebuchet MS" pitchFamily="34" charset="-122"/>
                 <a:cs typeface="Trebuchet MS" pitchFamily="34" charset="-120"/>
               </a:rPr>
-              <a:t>Syllables</a:t>
+              <a:t>sup</a:t>
+            </a:r>
+            <a:endParaRPr lang="en-US" sz="1400" dirty="0"/>
+          </a:p>
+        </p:txBody>
+      </p:sp>
+      <p:sp>
+        <p:nvSpPr>
+          <p:cNvPr id="27" name="Text 25"/>
+          <p:cNvSpPr/>
+          <p:nvPr/>
+        </p:nvSpPr>
+        <p:spPr>
+          <a:xfrm>
+            <a:off x="3959352" y="3364992"/>
+            <a:ext cx="411480" cy="475488"/>
+          </a:xfrm>
+          <a:prstGeom prst="rect">
+            <a:avLst/>
+          </a:prstGeom>
+          <a:noFill/>
+          <a:ln/>
+        </p:spPr>
+        <p:txBody>
+          <a:bodyPr wrap="square" lIns="0" tIns="0" rIns="0" bIns="0" rtlCol="0" anchor="ctr"/>
+          <a:lstStyle/>
+          <a:p>
+            <a:pPr algn="ctr" indent="0" marL="0">
+              <a:buNone/>
+            </a:pPr>
+            <a:r>
+              <a:rPr lang="en-US" sz="1600" b="1" dirty="0">
+                <a:solidFill>
+                  <a:srgbClr val="0D9488"/>
+                </a:solidFill>
+                <a:latin typeface="Trebuchet MS" pitchFamily="34" charset="0"/>
+                <a:ea typeface="Trebuchet MS" pitchFamily="34" charset="-122"/>
+                <a:cs typeface="Trebuchet MS" pitchFamily="34" charset="-120"/>
+              </a:rPr>
+              <a:t>·</a:t>
+            </a:r>
+            <a:endParaRPr lang="en-US" sz="1600" dirty="0"/>
+          </a:p>
+        </p:txBody>
+      </p:sp>
+      <p:sp>
+        <p:nvSpPr>
+          <p:cNvPr id="28" name="Shape 26"/>
+          <p:cNvSpPr/>
+          <p:nvPr/>
+        </p:nvSpPr>
+        <p:spPr>
+          <a:xfrm>
+            <a:off x="4370832" y="3364992"/>
+            <a:ext cx="1645920" cy="475488"/>
+          </a:xfrm>
+          <a:prstGeom prst="rect">
+            <a:avLst>
+              <a:gd name="adj" fmla="val 9615"/>
+            </a:avLst>
+          </a:prstGeom>
+          <a:solidFill>
+            <a:srgbClr val="FFFFFF"/>
+          </a:solidFill>
+          <a:ln w="12700">
+            <a:solidFill>
+              <a:srgbClr val="0D9488"/>
+            </a:solidFill>
+            <a:prstDash val="solid"/>
+          </a:ln>
+        </p:spPr>
+      </p:sp>
+      <p:sp>
+        <p:nvSpPr>
+          <p:cNvPr id="29" name="Text 27"/>
+          <p:cNvSpPr/>
+          <p:nvPr/>
+        </p:nvSpPr>
+        <p:spPr>
+          <a:xfrm>
+            <a:off x="4370832" y="3364992"/>
+            <a:ext cx="1645920" cy="475488"/>
+          </a:xfrm>
+          <a:prstGeom prst="rect">
+            <a:avLst/>
+          </a:prstGeom>
+          <a:noFill/>
+          <a:ln/>
+        </p:spPr>
+        <p:txBody>
+          <a:bodyPr wrap="square" lIns="0" tIns="0" rIns="0" bIns="0" rtlCol="0" anchor="ctr"/>
+          <a:lstStyle/>
+          <a:p>
+            <a:pPr algn="ctr" indent="0" marL="0">
+              <a:buNone/>
+            </a:pPr>
+            <a:r>
+              <a:rPr lang="en-US" sz="1400" b="1" dirty="0">
+                <a:solidFill>
+                  <a:srgbClr val="0D9488"/>
+                </a:solidFill>
+                <a:latin typeface="Trebuchet MS" pitchFamily="34" charset="0"/>
+                <a:ea typeface="Trebuchet MS" pitchFamily="34" charset="-122"/>
+                <a:cs typeface="Trebuchet MS" pitchFamily="34" charset="-120"/>
+              </a:rPr>
+              <a:t>port</a:t>
+            </a:r>
+            <a:endParaRPr lang="en-US" sz="1400" dirty="0"/>
+          </a:p>
+        </p:txBody>
+      </p:sp>
+      <p:sp>
+        <p:nvSpPr>
+          <p:cNvPr id="30" name="Text 28"/>
+          <p:cNvSpPr/>
+          <p:nvPr/>
+        </p:nvSpPr>
+        <p:spPr>
+          <a:xfrm>
+            <a:off x="6016752" y="3364992"/>
+            <a:ext cx="411480" cy="475488"/>
+          </a:xfrm>
+          <a:prstGeom prst="rect">
+            <a:avLst/>
+          </a:prstGeom>
+          <a:noFill/>
+          <a:ln/>
+        </p:spPr>
+        <p:txBody>
+          <a:bodyPr wrap="square" lIns="0" tIns="0" rIns="0" bIns="0" rtlCol="0" anchor="ctr"/>
+          <a:lstStyle/>
+          <a:p>
+            <a:pPr algn="ctr" indent="0" marL="0">
+              <a:buNone/>
+            </a:pPr>
+            <a:r>
+              <a:rPr lang="en-US" sz="1600" b="1" dirty="0">
+                <a:solidFill>
+                  <a:srgbClr val="0D9488"/>
+                </a:solidFill>
+                <a:latin typeface="Trebuchet MS" pitchFamily="34" charset="0"/>
+                <a:ea typeface="Trebuchet MS" pitchFamily="34" charset="-122"/>
+                <a:cs typeface="Trebuchet MS" pitchFamily="34" charset="-120"/>
+              </a:rPr>
+              <a:t>·</a:t>
+            </a:r>
+            <a:endParaRPr lang="en-US" sz="1600" dirty="0"/>
+          </a:p>
+        </p:txBody>
+      </p:sp>
+      <p:sp>
+        <p:nvSpPr>
+          <p:cNvPr id="31" name="Shape 29"/>
+          <p:cNvSpPr/>
+          <p:nvPr/>
+        </p:nvSpPr>
+        <p:spPr>
+          <a:xfrm>
+            <a:off x="6428232" y="3364992"/>
+            <a:ext cx="1645920" cy="475488"/>
+          </a:xfrm>
+          <a:prstGeom prst="rect">
+            <a:avLst>
+              <a:gd name="adj" fmla="val 9615"/>
+            </a:avLst>
+          </a:prstGeom>
+          <a:solidFill>
+            <a:srgbClr val="FFFFFF"/>
+          </a:solidFill>
+          <a:ln w="12700">
+            <a:solidFill>
+              <a:srgbClr val="0D9488"/>
+            </a:solidFill>
+            <a:prstDash val="solid"/>
+          </a:ln>
+        </p:spPr>
+      </p:sp>
+      <p:sp>
+        <p:nvSpPr>
+          <p:cNvPr id="32" name="Text 30"/>
+          <p:cNvSpPr/>
+          <p:nvPr/>
+        </p:nvSpPr>
+        <p:spPr>
+          <a:xfrm>
+            <a:off x="6428232" y="3364992"/>
+            <a:ext cx="1645920" cy="475488"/>
+          </a:xfrm>
+          <a:prstGeom prst="rect">
+            <a:avLst/>
+          </a:prstGeom>
+          <a:noFill/>
+          <a:ln/>
+        </p:spPr>
+        <p:txBody>
+          <a:bodyPr wrap="square" lIns="0" tIns="0" rIns="0" bIns="0" rtlCol="0" anchor="ctr"/>
+          <a:lstStyle/>
+          <a:p>
+            <a:pPr algn="ctr" indent="0" marL="0">
+              <a:buNone/>
+            </a:pPr>
+            <a:r>
+              <a:rPr lang="en-US" sz="1400" b="1" dirty="0">
+                <a:solidFill>
+                  <a:srgbClr val="0D9488"/>
+                </a:solidFill>
+                <a:latin typeface="Trebuchet MS" pitchFamily="34" charset="0"/>
+                <a:ea typeface="Trebuchet MS" pitchFamily="34" charset="-122"/>
+                <a:cs typeface="Trebuchet MS" pitchFamily="34" charset="-120"/>
+              </a:rPr>
+              <a:t>ive</a:t>
+            </a:r>
+            <a:endParaRPr lang="en-US" sz="1400" dirty="0"/>
+          </a:p>
+        </p:txBody>
+      </p:sp>
+      <p:sp>
+        <p:nvSpPr>
+          <p:cNvPr id="33" name="Shape 31"/>
+          <p:cNvSpPr/>
+          <p:nvPr/>
+        </p:nvSpPr>
+        <p:spPr>
+          <a:xfrm>
+            <a:off x="365760" y="4096512"/>
+            <a:ext cx="1371600" cy="804672"/>
+          </a:xfrm>
+          <a:prstGeom prst="rect">
+            <a:avLst>
+              <a:gd name="adj" fmla="val 6818"/>
+            </a:avLst>
+          </a:prstGeom>
+          <a:solidFill>
+            <a:srgbClr val="E2E8F0"/>
+          </a:solidFill>
+          <a:ln w="12700">
+            <a:solidFill>
+              <a:srgbClr val="E2E8F0"/>
+            </a:solidFill>
+            <a:prstDash val="solid"/>
+          </a:ln>
+        </p:spPr>
+      </p:sp>
+      <p:sp>
+        <p:nvSpPr>
+          <p:cNvPr id="34" name="Text 32"/>
+          <p:cNvSpPr/>
+          <p:nvPr/>
+        </p:nvSpPr>
+        <p:spPr>
+          <a:xfrm>
+            <a:off x="365760" y="4096512"/>
+            <a:ext cx="1371600" cy="804672"/>
+          </a:xfrm>
+          <a:prstGeom prst="rect">
+            <a:avLst/>
+          </a:prstGeom>
+          <a:noFill/>
+          <a:ln/>
+        </p:spPr>
+        <p:txBody>
+          <a:bodyPr wrap="square" lIns="0" tIns="0" rIns="0" bIns="0" rtlCol="0" anchor="ctr"/>
+          <a:lstStyle/>
+          <a:p>
+            <a:pPr algn="ctr" indent="0" marL="0">
+              <a:buNone/>
+            </a:pPr>
+            <a:r>
+              <a:rPr lang="en-US" sz="1100" b="1" dirty="0">
+                <a:solidFill>
+                  <a:srgbClr val="475569"/>
+                </a:solidFill>
+                <a:latin typeface="Trebuchet MS" pitchFamily="34" charset="0"/>
+                <a:ea typeface="Trebuchet MS" pitchFamily="34" charset="-122"/>
+                <a:cs typeface="Trebuchet MS" pitchFamily="34" charset="-120"/>
+              </a:rPr>
+              <a:t>Phonemes</a:t>
             </a:r>
             <a:endParaRPr lang="en-US" sz="1100" dirty="0"/>
           </a:p>
@@ -10589,13 +10622,13 @@
       </p:sp>
       <p:sp>
         <p:nvSpPr>
-          <p:cNvPr id="27" name="Shape 25"/>
-          <p:cNvSpPr/>
-          <p:nvPr/>
-        </p:nvSpPr>
-        <p:spPr>
-          <a:xfrm>
-            <a:off x="1874520" y="3273552"/>
+          <p:cNvPr id="35" name="Shape 33"/>
+          <p:cNvSpPr/>
+          <p:nvPr/>
+        </p:nvSpPr>
+        <p:spPr>
+          <a:xfrm>
+            <a:off x="1874520" y="4096512"/>
             <a:ext cx="6903720" cy="658368"/>
           </a:xfrm>
           <a:prstGeom prst="rect">
@@ -10604,30 +10637,30 @@
             </a:avLst>
           </a:prstGeom>
           <a:solidFill>
-            <a:srgbClr val="CCFBF1"/>
-          </a:solidFill>
-          <a:ln w="12700">
-            <a:solidFill>
-              <a:srgbClr val="0D9488"/>
-            </a:solidFill>
-            <a:prstDash val="solid"/>
-          </a:ln>
-        </p:spPr>
-      </p:sp>
-      <p:sp>
-        <p:nvSpPr>
-          <p:cNvPr id="28" name="Shape 26"/>
-          <p:cNvSpPr/>
-          <p:nvPr/>
-        </p:nvSpPr>
-        <p:spPr>
-          <a:xfrm>
-            <a:off x="2313432" y="3364992"/>
-            <a:ext cx="1645920" cy="475488"/>
+            <a:srgbClr val="FCE7F3"/>
+          </a:solidFill>
+          <a:ln w="12700">
+            <a:solidFill>
+              <a:srgbClr val="DB2777"/>
+            </a:solidFill>
+            <a:prstDash val="solid"/>
+          </a:ln>
+        </p:spPr>
+      </p:sp>
+      <p:sp>
+        <p:nvSpPr>
+          <p:cNvPr id="36" name="Shape 34"/>
+          <p:cNvSpPr/>
+          <p:nvPr/>
+        </p:nvSpPr>
+        <p:spPr>
+          <a:xfrm>
+            <a:off x="2023872" y="4169664"/>
+            <a:ext cx="685800" cy="475488"/>
           </a:xfrm>
           <a:prstGeom prst="rect">
             <a:avLst>
-              <a:gd name="adj" fmla="val 9615"/>
+              <a:gd name="adj" fmla="val 7692"/>
             </a:avLst>
           </a:prstGeom>
           <a:solidFill>
@@ -10635,104 +10668,131 @@
           </a:solidFill>
           <a:ln w="12700">
             <a:solidFill>
-              <a:srgbClr val="0D9488"/>
-            </a:solidFill>
-            <a:prstDash val="solid"/>
-          </a:ln>
-        </p:spPr>
-      </p:sp>
-      <p:sp>
-        <p:nvSpPr>
-          <p:cNvPr id="29" name="Text 27"/>
-          <p:cNvSpPr/>
-          <p:nvPr/>
-        </p:nvSpPr>
-        <p:spPr>
-          <a:xfrm>
-            <a:off x="2313432" y="3364992"/>
-            <a:ext cx="1645920" cy="475488"/>
-          </a:xfrm>
-          <a:prstGeom prst="rect">
-            <a:avLst/>
-          </a:prstGeom>
-          <a:noFill/>
-          <a:ln/>
-        </p:spPr>
-        <p:txBody>
-          <a:bodyPr wrap="square" lIns="0" tIns="0" rIns="0" bIns="0" rtlCol="0" anchor="ctr"/>
-          <a:lstStyle/>
-          <a:p>
-            <a:pPr algn="ctr" indent="0" marL="0">
-              <a:buNone/>
-            </a:pPr>
-            <a:r>
-              <a:rPr lang="en-US" sz="1400" b="1" dirty="0">
-                <a:solidFill>
-                  <a:srgbClr val="0D9488"/>
+              <a:srgbClr val="DB2777"/>
+            </a:solidFill>
+            <a:prstDash val="solid"/>
+          </a:ln>
+        </p:spPr>
+      </p:sp>
+      <p:sp>
+        <p:nvSpPr>
+          <p:cNvPr id="37" name="Text 35"/>
+          <p:cNvSpPr/>
+          <p:nvPr/>
+        </p:nvSpPr>
+        <p:spPr>
+          <a:xfrm>
+            <a:off x="2023872" y="4169664"/>
+            <a:ext cx="685800" cy="475488"/>
+          </a:xfrm>
+          <a:prstGeom prst="rect">
+            <a:avLst/>
+          </a:prstGeom>
+          <a:noFill/>
+          <a:ln/>
+        </p:spPr>
+        <p:txBody>
+          <a:bodyPr wrap="square" lIns="0" tIns="0" rIns="0" bIns="0" rtlCol="0" anchor="ctr"/>
+          <a:lstStyle/>
+          <a:p>
+            <a:pPr algn="ctr" indent="0" marL="0">
+              <a:buNone/>
+            </a:pPr>
+            <a:r>
+              <a:rPr lang="en-US" sz="900" b="1" dirty="0">
+                <a:solidFill>
+                  <a:srgbClr val="9D174D"/>
                 </a:solidFill>
                 <a:latin typeface="Trebuchet MS" pitchFamily="34" charset="0"/>
                 <a:ea typeface="Trebuchet MS" pitchFamily="34" charset="-122"/>
                 <a:cs typeface="Trebuchet MS" pitchFamily="34" charset="-120"/>
               </a:rPr>
-              <a:t>sup</a:t>
-            </a:r>
-            <a:endParaRPr lang="en-US" sz="1400" dirty="0"/>
-          </a:p>
-        </p:txBody>
-      </p:sp>
-      <p:sp>
-        <p:nvSpPr>
-          <p:cNvPr id="30" name="Text 28"/>
-          <p:cNvSpPr/>
-          <p:nvPr/>
-        </p:nvSpPr>
-        <p:spPr>
-          <a:xfrm>
-            <a:off x="3959352" y="3364992"/>
-            <a:ext cx="411480" cy="475488"/>
-          </a:xfrm>
-          <a:prstGeom prst="rect">
-            <a:avLst/>
-          </a:prstGeom>
-          <a:noFill/>
-          <a:ln/>
-        </p:spPr>
-        <p:txBody>
-          <a:bodyPr wrap="square" lIns="0" tIns="0" rIns="0" bIns="0" rtlCol="0" anchor="ctr"/>
-          <a:lstStyle/>
-          <a:p>
-            <a:pPr algn="ctr" indent="0" marL="0">
-              <a:buNone/>
-            </a:pPr>
-            <a:r>
-              <a:rPr lang="en-US" sz="1600" b="1" dirty="0">
-                <a:solidFill>
-                  <a:srgbClr val="0D9488"/>
+              <a:t>s</a:t>
+            </a:r>
+            <a:endParaRPr lang="en-US" sz="900" dirty="0"/>
+          </a:p>
+        </p:txBody>
+      </p:sp>
+      <p:sp>
+        <p:nvSpPr>
+          <p:cNvPr id="38" name="Shape 36"/>
+          <p:cNvSpPr/>
+          <p:nvPr/>
+        </p:nvSpPr>
+        <p:spPr>
+          <a:xfrm>
+            <a:off x="2831592" y="4169664"/>
+            <a:ext cx="685800" cy="475488"/>
+          </a:xfrm>
+          <a:prstGeom prst="rect">
+            <a:avLst>
+              <a:gd name="adj" fmla="val 7692"/>
+            </a:avLst>
+          </a:prstGeom>
+          <a:solidFill>
+            <a:srgbClr val="FFFFFF"/>
+          </a:solidFill>
+          <a:ln w="12700">
+            <a:solidFill>
+              <a:srgbClr val="DB2777"/>
+            </a:solidFill>
+            <a:prstDash val="solid"/>
+          </a:ln>
+        </p:spPr>
+      </p:sp>
+      <p:sp>
+        <p:nvSpPr>
+          <p:cNvPr id="39" name="Text 37"/>
+          <p:cNvSpPr/>
+          <p:nvPr/>
+        </p:nvSpPr>
+        <p:spPr>
+          <a:xfrm>
+            <a:off x="2831592" y="4169664"/>
+            <a:ext cx="685800" cy="475488"/>
+          </a:xfrm>
+          <a:prstGeom prst="rect">
+            <a:avLst/>
+          </a:prstGeom>
+          <a:noFill/>
+          <a:ln/>
+        </p:spPr>
+        <p:txBody>
+          <a:bodyPr wrap="square" lIns="0" tIns="0" rIns="0" bIns="0" rtlCol="0" anchor="ctr"/>
+          <a:lstStyle/>
+          <a:p>
+            <a:pPr algn="ctr" indent="0" marL="0">
+              <a:buNone/>
+            </a:pPr>
+            <a:r>
+              <a:rPr lang="en-US" sz="900" b="1" dirty="0">
+                <a:solidFill>
+                  <a:srgbClr val="9D174D"/>
                 </a:solidFill>
                 <a:latin typeface="Trebuchet MS" pitchFamily="34" charset="0"/>
                 <a:ea typeface="Trebuchet MS" pitchFamily="34" charset="-122"/>
                 <a:cs typeface="Trebuchet MS" pitchFamily="34" charset="-120"/>
               </a:rPr>
-              <a:t>·</a:t>
-            </a:r>
-            <a:endParaRPr lang="en-US" sz="1600" dirty="0"/>
-          </a:p>
-        </p:txBody>
-      </p:sp>
-      <p:sp>
-        <p:nvSpPr>
-          <p:cNvPr id="31" name="Shape 29"/>
-          <p:cNvSpPr/>
-          <p:nvPr/>
-        </p:nvSpPr>
-        <p:spPr>
-          <a:xfrm>
-            <a:off x="4370832" y="3364992"/>
-            <a:ext cx="1645920" cy="475488"/>
+              <a:t>u</a:t>
+            </a:r>
+            <a:endParaRPr lang="en-US" sz="900" dirty="0"/>
+          </a:p>
+        </p:txBody>
+      </p:sp>
+      <p:sp>
+        <p:nvSpPr>
+          <p:cNvPr id="40" name="Shape 38"/>
+          <p:cNvSpPr/>
+          <p:nvPr/>
+        </p:nvSpPr>
+        <p:spPr>
+          <a:xfrm>
+            <a:off x="3639312" y="4169664"/>
+            <a:ext cx="685800" cy="475488"/>
           </a:xfrm>
           <a:prstGeom prst="rect">
             <a:avLst>
-              <a:gd name="adj" fmla="val 9615"/>
+              <a:gd name="adj" fmla="val 7692"/>
             </a:avLst>
           </a:prstGeom>
           <a:solidFill>
@@ -10740,104 +10800,131 @@
           </a:solidFill>
           <a:ln w="12700">
             <a:solidFill>
-              <a:srgbClr val="0D9488"/>
-            </a:solidFill>
-            <a:prstDash val="solid"/>
-          </a:ln>
-        </p:spPr>
-      </p:sp>
-      <p:sp>
-        <p:nvSpPr>
-          <p:cNvPr id="32" name="Text 30"/>
-          <p:cNvSpPr/>
-          <p:nvPr/>
-        </p:nvSpPr>
-        <p:spPr>
-          <a:xfrm>
-            <a:off x="4370832" y="3364992"/>
-            <a:ext cx="1645920" cy="475488"/>
-          </a:xfrm>
-          <a:prstGeom prst="rect">
-            <a:avLst/>
-          </a:prstGeom>
-          <a:noFill/>
-          <a:ln/>
-        </p:spPr>
-        <p:txBody>
-          <a:bodyPr wrap="square" lIns="0" tIns="0" rIns="0" bIns="0" rtlCol="0" anchor="ctr"/>
-          <a:lstStyle/>
-          <a:p>
-            <a:pPr algn="ctr" indent="0" marL="0">
-              <a:buNone/>
-            </a:pPr>
-            <a:r>
-              <a:rPr lang="en-US" sz="1400" b="1" dirty="0">
-                <a:solidFill>
-                  <a:srgbClr val="0D9488"/>
+              <a:srgbClr val="DB2777"/>
+            </a:solidFill>
+            <a:prstDash val="solid"/>
+          </a:ln>
+        </p:spPr>
+      </p:sp>
+      <p:sp>
+        <p:nvSpPr>
+          <p:cNvPr id="41" name="Text 39"/>
+          <p:cNvSpPr/>
+          <p:nvPr/>
+        </p:nvSpPr>
+        <p:spPr>
+          <a:xfrm>
+            <a:off x="3639312" y="4169664"/>
+            <a:ext cx="685800" cy="475488"/>
+          </a:xfrm>
+          <a:prstGeom prst="rect">
+            <a:avLst/>
+          </a:prstGeom>
+          <a:noFill/>
+          <a:ln/>
+        </p:spPr>
+        <p:txBody>
+          <a:bodyPr wrap="square" lIns="0" tIns="0" rIns="0" bIns="0" rtlCol="0" anchor="ctr"/>
+          <a:lstStyle/>
+          <a:p>
+            <a:pPr algn="ctr" indent="0" marL="0">
+              <a:buNone/>
+            </a:pPr>
+            <a:r>
+              <a:rPr lang="en-US" sz="900" b="1" dirty="0">
+                <a:solidFill>
+                  <a:srgbClr val="9D174D"/>
                 </a:solidFill>
                 <a:latin typeface="Trebuchet MS" pitchFamily="34" charset="0"/>
                 <a:ea typeface="Trebuchet MS" pitchFamily="34" charset="-122"/>
                 <a:cs typeface="Trebuchet MS" pitchFamily="34" charset="-120"/>
               </a:rPr>
-              <a:t>port</a:t>
-            </a:r>
-            <a:endParaRPr lang="en-US" sz="1400" dirty="0"/>
-          </a:p>
-        </p:txBody>
-      </p:sp>
-      <p:sp>
-        <p:nvSpPr>
-          <p:cNvPr id="33" name="Text 31"/>
-          <p:cNvSpPr/>
-          <p:nvPr/>
-        </p:nvSpPr>
-        <p:spPr>
-          <a:xfrm>
-            <a:off x="6016752" y="3364992"/>
-            <a:ext cx="411480" cy="475488"/>
-          </a:xfrm>
-          <a:prstGeom prst="rect">
-            <a:avLst/>
-          </a:prstGeom>
-          <a:noFill/>
-          <a:ln/>
-        </p:spPr>
-        <p:txBody>
-          <a:bodyPr wrap="square" lIns="0" tIns="0" rIns="0" bIns="0" rtlCol="0" anchor="ctr"/>
-          <a:lstStyle/>
-          <a:p>
-            <a:pPr algn="ctr" indent="0" marL="0">
-              <a:buNone/>
-            </a:pPr>
-            <a:r>
-              <a:rPr lang="en-US" sz="1600" b="1" dirty="0">
-                <a:solidFill>
-                  <a:srgbClr val="0D9488"/>
+              <a:t>pp</a:t>
+            </a:r>
+            <a:endParaRPr lang="en-US" sz="900" dirty="0"/>
+          </a:p>
+        </p:txBody>
+      </p:sp>
+      <p:sp>
+        <p:nvSpPr>
+          <p:cNvPr id="42" name="Shape 40"/>
+          <p:cNvSpPr/>
+          <p:nvPr/>
+        </p:nvSpPr>
+        <p:spPr>
+          <a:xfrm>
+            <a:off x="4447032" y="4169664"/>
+            <a:ext cx="685800" cy="475488"/>
+          </a:xfrm>
+          <a:prstGeom prst="rect">
+            <a:avLst>
+              <a:gd name="adj" fmla="val 7692"/>
+            </a:avLst>
+          </a:prstGeom>
+          <a:solidFill>
+            <a:srgbClr val="FFFFFF"/>
+          </a:solidFill>
+          <a:ln w="12700">
+            <a:solidFill>
+              <a:srgbClr val="DB2777"/>
+            </a:solidFill>
+            <a:prstDash val="solid"/>
+          </a:ln>
+        </p:spPr>
+      </p:sp>
+      <p:sp>
+        <p:nvSpPr>
+          <p:cNvPr id="43" name="Text 41"/>
+          <p:cNvSpPr/>
+          <p:nvPr/>
+        </p:nvSpPr>
+        <p:spPr>
+          <a:xfrm>
+            <a:off x="4447032" y="4169664"/>
+            <a:ext cx="685800" cy="475488"/>
+          </a:xfrm>
+          <a:prstGeom prst="rect">
+            <a:avLst/>
+          </a:prstGeom>
+          <a:noFill/>
+          <a:ln/>
+        </p:spPr>
+        <p:txBody>
+          <a:bodyPr wrap="square" lIns="0" tIns="0" rIns="0" bIns="0" rtlCol="0" anchor="ctr"/>
+          <a:lstStyle/>
+          <a:p>
+            <a:pPr algn="ctr" indent="0" marL="0">
+              <a:buNone/>
+            </a:pPr>
+            <a:r>
+              <a:rPr lang="en-US" sz="900" b="1" dirty="0">
+                <a:solidFill>
+                  <a:srgbClr val="9D174D"/>
                 </a:solidFill>
                 <a:latin typeface="Trebuchet MS" pitchFamily="34" charset="0"/>
                 <a:ea typeface="Trebuchet MS" pitchFamily="34" charset="-122"/>
                 <a:cs typeface="Trebuchet MS" pitchFamily="34" charset="-120"/>
               </a:rPr>
-              <a:t>·</a:t>
-            </a:r>
-            <a:endParaRPr lang="en-US" sz="1600" dirty="0"/>
-          </a:p>
-        </p:txBody>
-      </p:sp>
-      <p:sp>
-        <p:nvSpPr>
-          <p:cNvPr id="34" name="Shape 32"/>
-          <p:cNvSpPr/>
-          <p:nvPr/>
-        </p:nvSpPr>
-        <p:spPr>
-          <a:xfrm>
-            <a:off x="6428232" y="3364992"/>
-            <a:ext cx="1645920" cy="475488"/>
+              <a:t>or</a:t>
+            </a:r>
+            <a:endParaRPr lang="en-US" sz="900" dirty="0"/>
+          </a:p>
+        </p:txBody>
+      </p:sp>
+      <p:sp>
+        <p:nvSpPr>
+          <p:cNvPr id="44" name="Shape 42"/>
+          <p:cNvSpPr/>
+          <p:nvPr/>
+        </p:nvSpPr>
+        <p:spPr>
+          <a:xfrm>
+            <a:off x="5254752" y="4169664"/>
+            <a:ext cx="685800" cy="475488"/>
           </a:xfrm>
           <a:prstGeom prst="rect">
             <a:avLst>
-              <a:gd name="adj" fmla="val 9615"/>
+              <a:gd name="adj" fmla="val 7692"/>
             </a:avLst>
           </a:prstGeom>
           <a:solidFill>
@@ -10845,153 +10932,126 @@
           </a:solidFill>
           <a:ln w="12700">
             <a:solidFill>
-              <a:srgbClr val="0D9488"/>
-            </a:solidFill>
-            <a:prstDash val="solid"/>
-          </a:ln>
-        </p:spPr>
-      </p:sp>
-      <p:sp>
-        <p:nvSpPr>
-          <p:cNvPr id="35" name="Text 33"/>
-          <p:cNvSpPr/>
-          <p:nvPr/>
-        </p:nvSpPr>
-        <p:spPr>
-          <a:xfrm>
-            <a:off x="6428232" y="3364992"/>
-            <a:ext cx="1645920" cy="475488"/>
-          </a:xfrm>
-          <a:prstGeom prst="rect">
-            <a:avLst/>
-          </a:prstGeom>
-          <a:noFill/>
-          <a:ln/>
-        </p:spPr>
-        <p:txBody>
-          <a:bodyPr wrap="square" lIns="0" tIns="0" rIns="0" bIns="0" rtlCol="0" anchor="ctr"/>
-          <a:lstStyle/>
-          <a:p>
-            <a:pPr algn="ctr" indent="0" marL="0">
-              <a:buNone/>
-            </a:pPr>
-            <a:r>
-              <a:rPr lang="en-US" sz="1400" b="1" dirty="0">
-                <a:solidFill>
-                  <a:srgbClr val="0D9488"/>
+              <a:srgbClr val="DB2777"/>
+            </a:solidFill>
+            <a:prstDash val="solid"/>
+          </a:ln>
+        </p:spPr>
+      </p:sp>
+      <p:sp>
+        <p:nvSpPr>
+          <p:cNvPr id="45" name="Text 43"/>
+          <p:cNvSpPr/>
+          <p:nvPr/>
+        </p:nvSpPr>
+        <p:spPr>
+          <a:xfrm>
+            <a:off x="5254752" y="4169664"/>
+            <a:ext cx="685800" cy="475488"/>
+          </a:xfrm>
+          <a:prstGeom prst="rect">
+            <a:avLst/>
+          </a:prstGeom>
+          <a:noFill/>
+          <a:ln/>
+        </p:spPr>
+        <p:txBody>
+          <a:bodyPr wrap="square" lIns="0" tIns="0" rIns="0" bIns="0" rtlCol="0" anchor="ctr"/>
+          <a:lstStyle/>
+          <a:p>
+            <a:pPr algn="ctr" indent="0" marL="0">
+              <a:buNone/>
+            </a:pPr>
+            <a:r>
+              <a:rPr lang="en-US" sz="900" b="1" dirty="0">
+                <a:solidFill>
+                  <a:srgbClr val="9D174D"/>
                 </a:solidFill>
                 <a:latin typeface="Trebuchet MS" pitchFamily="34" charset="0"/>
                 <a:ea typeface="Trebuchet MS" pitchFamily="34" charset="-122"/>
                 <a:cs typeface="Trebuchet MS" pitchFamily="34" charset="-120"/>
               </a:rPr>
-              <a:t>ers</a:t>
-            </a:r>
-            <a:endParaRPr lang="en-US" sz="1400" dirty="0"/>
-          </a:p>
-        </p:txBody>
-      </p:sp>
-      <p:sp>
-        <p:nvSpPr>
-          <p:cNvPr id="36" name="Shape 34"/>
-          <p:cNvSpPr/>
-          <p:nvPr/>
-        </p:nvSpPr>
-        <p:spPr>
-          <a:xfrm>
-            <a:off x="365760" y="4096512"/>
-            <a:ext cx="1371600" cy="804672"/>
+              <a:t>t</a:t>
+            </a:r>
+            <a:endParaRPr lang="en-US" sz="900" dirty="0"/>
+          </a:p>
+        </p:txBody>
+      </p:sp>
+      <p:sp>
+        <p:nvSpPr>
+          <p:cNvPr id="46" name="Shape 44"/>
+          <p:cNvSpPr/>
+          <p:nvPr/>
+        </p:nvSpPr>
+        <p:spPr>
+          <a:xfrm>
+            <a:off x="6062472" y="4169664"/>
+            <a:ext cx="685800" cy="475488"/>
           </a:xfrm>
           <a:prstGeom prst="rect">
             <a:avLst>
-              <a:gd name="adj" fmla="val 6818"/>
+              <a:gd name="adj" fmla="val 7692"/>
             </a:avLst>
           </a:prstGeom>
           <a:solidFill>
-            <a:srgbClr val="E2E8F0"/>
-          </a:solidFill>
-          <a:ln w="12700">
-            <a:solidFill>
-              <a:srgbClr val="E2E8F0"/>
-            </a:solidFill>
-            <a:prstDash val="solid"/>
-          </a:ln>
-        </p:spPr>
-      </p:sp>
-      <p:sp>
-        <p:nvSpPr>
-          <p:cNvPr id="37" name="Text 35"/>
-          <p:cNvSpPr/>
-          <p:nvPr/>
-        </p:nvSpPr>
-        <p:spPr>
-          <a:xfrm>
-            <a:off x="365760" y="4096512"/>
-            <a:ext cx="1371600" cy="804672"/>
-          </a:xfrm>
-          <a:prstGeom prst="rect">
-            <a:avLst/>
-          </a:prstGeom>
-          <a:noFill/>
-          <a:ln/>
-        </p:spPr>
-        <p:txBody>
-          <a:bodyPr wrap="square" lIns="0" tIns="0" rIns="0" bIns="0" rtlCol="0" anchor="ctr"/>
-          <a:lstStyle/>
-          <a:p>
-            <a:pPr algn="ctr" indent="0" marL="0">
-              <a:buNone/>
-            </a:pPr>
-            <a:r>
-              <a:rPr lang="en-US" sz="1100" b="1" dirty="0">
-                <a:solidFill>
-                  <a:srgbClr val="475569"/>
+            <a:srgbClr val="FFFFFF"/>
+          </a:solidFill>
+          <a:ln w="12700">
+            <a:solidFill>
+              <a:srgbClr val="DB2777"/>
+            </a:solidFill>
+            <a:prstDash val="solid"/>
+          </a:ln>
+        </p:spPr>
+      </p:sp>
+      <p:sp>
+        <p:nvSpPr>
+          <p:cNvPr id="47" name="Text 45"/>
+          <p:cNvSpPr/>
+          <p:nvPr/>
+        </p:nvSpPr>
+        <p:spPr>
+          <a:xfrm>
+            <a:off x="6062472" y="4169664"/>
+            <a:ext cx="685800" cy="475488"/>
+          </a:xfrm>
+          <a:prstGeom prst="rect">
+            <a:avLst/>
+          </a:prstGeom>
+          <a:noFill/>
+          <a:ln/>
+        </p:spPr>
+        <p:txBody>
+          <a:bodyPr wrap="square" lIns="0" tIns="0" rIns="0" bIns="0" rtlCol="0" anchor="ctr"/>
+          <a:lstStyle/>
+          <a:p>
+            <a:pPr algn="ctr" indent="0" marL="0">
+              <a:buNone/>
+            </a:pPr>
+            <a:r>
+              <a:rPr lang="en-US" sz="900" b="1" dirty="0">
+                <a:solidFill>
+                  <a:srgbClr val="9D174D"/>
                 </a:solidFill>
                 <a:latin typeface="Trebuchet MS" pitchFamily="34" charset="0"/>
                 <a:ea typeface="Trebuchet MS" pitchFamily="34" charset="-122"/>
                 <a:cs typeface="Trebuchet MS" pitchFamily="34" charset="-120"/>
               </a:rPr>
-              <a:t>Phonemes</a:t>
-            </a:r>
-            <a:endParaRPr lang="en-US" sz="1100" dirty="0"/>
-          </a:p>
-        </p:txBody>
-      </p:sp>
-      <p:sp>
-        <p:nvSpPr>
-          <p:cNvPr id="38" name="Shape 36"/>
-          <p:cNvSpPr/>
-          <p:nvPr/>
-        </p:nvSpPr>
-        <p:spPr>
-          <a:xfrm>
-            <a:off x="1874520" y="4096512"/>
-            <a:ext cx="6903720" cy="658368"/>
-          </a:xfrm>
-          <a:prstGeom prst="rect">
-            <a:avLst>
-              <a:gd name="adj" fmla="val 8333"/>
-            </a:avLst>
-          </a:prstGeom>
-          <a:solidFill>
-            <a:srgbClr val="FCE7F3"/>
-          </a:solidFill>
-          <a:ln w="12700">
-            <a:solidFill>
-              <a:srgbClr val="DB2777"/>
-            </a:solidFill>
-            <a:prstDash val="solid"/>
-          </a:ln>
-        </p:spPr>
-      </p:sp>
-      <p:sp>
-        <p:nvSpPr>
-          <p:cNvPr id="39" name="Shape 37"/>
-          <p:cNvSpPr/>
-          <p:nvPr/>
-        </p:nvSpPr>
-        <p:spPr>
-          <a:xfrm>
-            <a:off x="2124837" y="4169664"/>
+              <a:t>i</a:t>
+            </a:r>
+            <a:endParaRPr lang="en-US" sz="900" dirty="0"/>
+          </a:p>
+        </p:txBody>
+      </p:sp>
+      <p:sp>
+        <p:nvSpPr>
+          <p:cNvPr id="48" name="Shape 46"/>
+          <p:cNvSpPr/>
+          <p:nvPr/>
+        </p:nvSpPr>
+        <p:spPr>
+          <a:xfrm>
+            <a:off x="6870192" y="4169664"/>
             <a:ext cx="685800" cy="475488"/>
           </a:xfrm>
           <a:prstGeom prst="rect">
@@ -11012,13 +11072,13 @@
       </p:sp>
       <p:sp>
         <p:nvSpPr>
-          <p:cNvPr id="40" name="Text 38"/>
-          <p:cNvSpPr/>
-          <p:nvPr/>
-        </p:nvSpPr>
-        <p:spPr>
-          <a:xfrm>
-            <a:off x="2124837" y="4169664"/>
+          <p:cNvPr id="49" name="Text 47"/>
+          <p:cNvSpPr/>
+          <p:nvPr/>
+        </p:nvSpPr>
+        <p:spPr>
+          <a:xfrm>
+            <a:off x="6870192" y="4169664"/>
             <a:ext cx="685800" cy="475488"/>
           </a:xfrm>
           <a:prstGeom prst="rect">
@@ -11043,7 +11103,7 @@
                 <a:ea typeface="Trebuchet MS" pitchFamily="34" charset="-122"/>
                 <a:cs typeface="Trebuchet MS" pitchFamily="34" charset="-120"/>
               </a:rPr>
-              <a:t>s</a:t>
+              <a:t>v</a:t>
             </a:r>
             <a:endParaRPr lang="en-US" sz="900" dirty="0"/>
           </a:p>
@@ -11051,13 +11111,13 @@
       </p:sp>
       <p:sp>
         <p:nvSpPr>
-          <p:cNvPr id="41" name="Shape 39"/>
-          <p:cNvSpPr/>
-          <p:nvPr/>
-        </p:nvSpPr>
-        <p:spPr>
-          <a:xfrm>
-            <a:off x="3033522" y="4169664"/>
+          <p:cNvPr id="50" name="Shape 48"/>
+          <p:cNvSpPr/>
+          <p:nvPr/>
+        </p:nvSpPr>
+        <p:spPr>
+          <a:xfrm>
+            <a:off x="7677912" y="4169664"/>
             <a:ext cx="685800" cy="475488"/>
           </a:xfrm>
           <a:prstGeom prst="rect">
@@ -11078,13 +11138,13 @@
       </p:sp>
       <p:sp>
         <p:nvSpPr>
-          <p:cNvPr id="42" name="Text 40"/>
-          <p:cNvSpPr/>
-          <p:nvPr/>
-        </p:nvSpPr>
-        <p:spPr>
-          <a:xfrm>
-            <a:off x="3033522" y="4169664"/>
+          <p:cNvPr id="51" name="Text 49"/>
+          <p:cNvSpPr/>
+          <p:nvPr/>
+        </p:nvSpPr>
+        <p:spPr>
+          <a:xfrm>
+            <a:off x="7677912" y="4169664"/>
             <a:ext cx="685800" cy="475488"/>
           </a:xfrm>
           <a:prstGeom prst="rect">
@@ -11109,337 +11169,7 @@
                 <a:ea typeface="Trebuchet MS" pitchFamily="34" charset="-122"/>
                 <a:cs typeface="Trebuchet MS" pitchFamily="34" charset="-120"/>
               </a:rPr>
-              <a:t>u</a:t>
-            </a:r>
-            <a:endParaRPr lang="en-US" sz="900" dirty="0"/>
-          </a:p>
-        </p:txBody>
-      </p:sp>
-      <p:sp>
-        <p:nvSpPr>
-          <p:cNvPr id="43" name="Shape 41"/>
-          <p:cNvSpPr/>
-          <p:nvPr/>
-        </p:nvSpPr>
-        <p:spPr>
-          <a:xfrm>
-            <a:off x="3942207" y="4169664"/>
-            <a:ext cx="685800" cy="475488"/>
-          </a:xfrm>
-          <a:prstGeom prst="rect">
-            <a:avLst>
-              <a:gd name="adj" fmla="val 7692"/>
-            </a:avLst>
-          </a:prstGeom>
-          <a:solidFill>
-            <a:srgbClr val="FFFFFF"/>
-          </a:solidFill>
-          <a:ln w="12700">
-            <a:solidFill>
-              <a:srgbClr val="DB2777"/>
-            </a:solidFill>
-            <a:prstDash val="solid"/>
-          </a:ln>
-        </p:spPr>
-      </p:sp>
-      <p:sp>
-        <p:nvSpPr>
-          <p:cNvPr id="44" name="Text 42"/>
-          <p:cNvSpPr/>
-          <p:nvPr/>
-        </p:nvSpPr>
-        <p:spPr>
-          <a:xfrm>
-            <a:off x="3942207" y="4169664"/>
-            <a:ext cx="685800" cy="475488"/>
-          </a:xfrm>
-          <a:prstGeom prst="rect">
-            <a:avLst/>
-          </a:prstGeom>
-          <a:noFill/>
-          <a:ln/>
-        </p:spPr>
-        <p:txBody>
-          <a:bodyPr wrap="square" lIns="0" tIns="0" rIns="0" bIns="0" rtlCol="0" anchor="ctr"/>
-          <a:lstStyle/>
-          <a:p>
-            <a:pPr algn="ctr" indent="0" marL="0">
-              <a:buNone/>
-            </a:pPr>
-            <a:r>
-              <a:rPr lang="en-US" sz="900" b="1" dirty="0">
-                <a:solidFill>
-                  <a:srgbClr val="9D174D"/>
-                </a:solidFill>
-                <a:latin typeface="Trebuchet MS" pitchFamily="34" charset="0"/>
-                <a:ea typeface="Trebuchet MS" pitchFamily="34" charset="-122"/>
-                <a:cs typeface="Trebuchet MS" pitchFamily="34" charset="-120"/>
-              </a:rPr>
-              <a:t>pp</a:t>
-            </a:r>
-            <a:endParaRPr lang="en-US" sz="900" dirty="0"/>
-          </a:p>
-        </p:txBody>
-      </p:sp>
-      <p:sp>
-        <p:nvSpPr>
-          <p:cNvPr id="45" name="Shape 43"/>
-          <p:cNvSpPr/>
-          <p:nvPr/>
-        </p:nvSpPr>
-        <p:spPr>
-          <a:xfrm>
-            <a:off x="4850892" y="4169664"/>
-            <a:ext cx="685800" cy="475488"/>
-          </a:xfrm>
-          <a:prstGeom prst="rect">
-            <a:avLst>
-              <a:gd name="adj" fmla="val 7692"/>
-            </a:avLst>
-          </a:prstGeom>
-          <a:solidFill>
-            <a:srgbClr val="FFFFFF"/>
-          </a:solidFill>
-          <a:ln w="12700">
-            <a:solidFill>
-              <a:srgbClr val="DB2777"/>
-            </a:solidFill>
-            <a:prstDash val="solid"/>
-          </a:ln>
-        </p:spPr>
-      </p:sp>
-      <p:sp>
-        <p:nvSpPr>
-          <p:cNvPr id="46" name="Text 44"/>
-          <p:cNvSpPr/>
-          <p:nvPr/>
-        </p:nvSpPr>
-        <p:spPr>
-          <a:xfrm>
-            <a:off x="4850892" y="4169664"/>
-            <a:ext cx="685800" cy="475488"/>
-          </a:xfrm>
-          <a:prstGeom prst="rect">
-            <a:avLst/>
-          </a:prstGeom>
-          <a:noFill/>
-          <a:ln/>
-        </p:spPr>
-        <p:txBody>
-          <a:bodyPr wrap="square" lIns="0" tIns="0" rIns="0" bIns="0" rtlCol="0" anchor="ctr"/>
-          <a:lstStyle/>
-          <a:p>
-            <a:pPr algn="ctr" indent="0" marL="0">
-              <a:buNone/>
-            </a:pPr>
-            <a:r>
-              <a:rPr lang="en-US" sz="900" b="1" dirty="0">
-                <a:solidFill>
-                  <a:srgbClr val="9D174D"/>
-                </a:solidFill>
-                <a:latin typeface="Trebuchet MS" pitchFamily="34" charset="0"/>
-                <a:ea typeface="Trebuchet MS" pitchFamily="34" charset="-122"/>
-                <a:cs typeface="Trebuchet MS" pitchFamily="34" charset="-120"/>
-              </a:rPr>
-              <a:t>or</a:t>
-            </a:r>
-            <a:endParaRPr lang="en-US" sz="900" dirty="0"/>
-          </a:p>
-        </p:txBody>
-      </p:sp>
-      <p:sp>
-        <p:nvSpPr>
-          <p:cNvPr id="47" name="Shape 45"/>
-          <p:cNvSpPr/>
-          <p:nvPr/>
-        </p:nvSpPr>
-        <p:spPr>
-          <a:xfrm>
-            <a:off x="5759577" y="4169664"/>
-            <a:ext cx="685800" cy="475488"/>
-          </a:xfrm>
-          <a:prstGeom prst="rect">
-            <a:avLst>
-              <a:gd name="adj" fmla="val 7692"/>
-            </a:avLst>
-          </a:prstGeom>
-          <a:solidFill>
-            <a:srgbClr val="FFFFFF"/>
-          </a:solidFill>
-          <a:ln w="12700">
-            <a:solidFill>
-              <a:srgbClr val="DB2777"/>
-            </a:solidFill>
-            <a:prstDash val="solid"/>
-          </a:ln>
-        </p:spPr>
-      </p:sp>
-      <p:sp>
-        <p:nvSpPr>
-          <p:cNvPr id="48" name="Text 46"/>
-          <p:cNvSpPr/>
-          <p:nvPr/>
-        </p:nvSpPr>
-        <p:spPr>
-          <a:xfrm>
-            <a:off x="5759577" y="4169664"/>
-            <a:ext cx="685800" cy="475488"/>
-          </a:xfrm>
-          <a:prstGeom prst="rect">
-            <a:avLst/>
-          </a:prstGeom>
-          <a:noFill/>
-          <a:ln/>
-        </p:spPr>
-        <p:txBody>
-          <a:bodyPr wrap="square" lIns="0" tIns="0" rIns="0" bIns="0" rtlCol="0" anchor="ctr"/>
-          <a:lstStyle/>
-          <a:p>
-            <a:pPr algn="ctr" indent="0" marL="0">
-              <a:buNone/>
-            </a:pPr>
-            <a:r>
-              <a:rPr lang="en-US" sz="900" b="1" dirty="0">
-                <a:solidFill>
-                  <a:srgbClr val="9D174D"/>
-                </a:solidFill>
-                <a:latin typeface="Trebuchet MS" pitchFamily="34" charset="0"/>
-                <a:ea typeface="Trebuchet MS" pitchFamily="34" charset="-122"/>
-                <a:cs typeface="Trebuchet MS" pitchFamily="34" charset="-120"/>
-              </a:rPr>
-              <a:t>t</a:t>
-            </a:r>
-            <a:endParaRPr lang="en-US" sz="900" dirty="0"/>
-          </a:p>
-        </p:txBody>
-      </p:sp>
-      <p:sp>
-        <p:nvSpPr>
-          <p:cNvPr id="49" name="Shape 47"/>
-          <p:cNvSpPr/>
-          <p:nvPr/>
-        </p:nvSpPr>
-        <p:spPr>
-          <a:xfrm>
-            <a:off x="6668262" y="4169664"/>
-            <a:ext cx="685800" cy="475488"/>
-          </a:xfrm>
-          <a:prstGeom prst="rect">
-            <a:avLst>
-              <a:gd name="adj" fmla="val 7692"/>
-            </a:avLst>
-          </a:prstGeom>
-          <a:solidFill>
-            <a:srgbClr val="FFFFFF"/>
-          </a:solidFill>
-          <a:ln w="12700">
-            <a:solidFill>
-              <a:srgbClr val="DB2777"/>
-            </a:solidFill>
-            <a:prstDash val="solid"/>
-          </a:ln>
-        </p:spPr>
-      </p:sp>
-      <p:sp>
-        <p:nvSpPr>
-          <p:cNvPr id="50" name="Text 48"/>
-          <p:cNvSpPr/>
-          <p:nvPr/>
-        </p:nvSpPr>
-        <p:spPr>
-          <a:xfrm>
-            <a:off x="6668262" y="4169664"/>
-            <a:ext cx="685800" cy="475488"/>
-          </a:xfrm>
-          <a:prstGeom prst="rect">
-            <a:avLst/>
-          </a:prstGeom>
-          <a:noFill/>
-          <a:ln/>
-        </p:spPr>
-        <p:txBody>
-          <a:bodyPr wrap="square" lIns="0" tIns="0" rIns="0" bIns="0" rtlCol="0" anchor="ctr"/>
-          <a:lstStyle/>
-          <a:p>
-            <a:pPr algn="ctr" indent="0" marL="0">
-              <a:buNone/>
-            </a:pPr>
-            <a:r>
-              <a:rPr lang="en-US" sz="900" b="1" dirty="0">
-                <a:solidFill>
-                  <a:srgbClr val="9D174D"/>
-                </a:solidFill>
-                <a:latin typeface="Trebuchet MS" pitchFamily="34" charset="0"/>
-                <a:ea typeface="Trebuchet MS" pitchFamily="34" charset="-122"/>
-                <a:cs typeface="Trebuchet MS" pitchFamily="34" charset="-120"/>
-              </a:rPr>
-              <a:t>er</a:t>
-            </a:r>
-            <a:endParaRPr lang="en-US" sz="900" dirty="0"/>
-          </a:p>
-        </p:txBody>
-      </p:sp>
-      <p:sp>
-        <p:nvSpPr>
-          <p:cNvPr id="51" name="Shape 49"/>
-          <p:cNvSpPr/>
-          <p:nvPr/>
-        </p:nvSpPr>
-        <p:spPr>
-          <a:xfrm>
-            <a:off x="7576947" y="4169664"/>
-            <a:ext cx="685800" cy="475488"/>
-          </a:xfrm>
-          <a:prstGeom prst="rect">
-            <a:avLst>
-              <a:gd name="adj" fmla="val 7692"/>
-            </a:avLst>
-          </a:prstGeom>
-          <a:solidFill>
-            <a:srgbClr val="FFFFFF"/>
-          </a:solidFill>
-          <a:ln w="12700">
-            <a:solidFill>
-              <a:srgbClr val="DB2777"/>
-            </a:solidFill>
-            <a:prstDash val="solid"/>
-          </a:ln>
-        </p:spPr>
-      </p:sp>
-      <p:sp>
-        <p:nvSpPr>
-          <p:cNvPr id="52" name="Text 50"/>
-          <p:cNvSpPr/>
-          <p:nvPr/>
-        </p:nvSpPr>
-        <p:spPr>
-          <a:xfrm>
-            <a:off x="7576947" y="4169664"/>
-            <a:ext cx="685800" cy="475488"/>
-          </a:xfrm>
-          <a:prstGeom prst="rect">
-            <a:avLst/>
-          </a:prstGeom>
-          <a:noFill/>
-          <a:ln/>
-        </p:spPr>
-        <p:txBody>
-          <a:bodyPr wrap="square" lIns="0" tIns="0" rIns="0" bIns="0" rtlCol="0" anchor="ctr"/>
-          <a:lstStyle/>
-          <a:p>
-            <a:pPr algn="ctr" indent="0" marL="0">
-              <a:buNone/>
-            </a:pPr>
-            <a:r>
-              <a:rPr lang="en-US" sz="900" b="1" dirty="0">
-                <a:solidFill>
-                  <a:srgbClr val="9D174D"/>
-                </a:solidFill>
-                <a:latin typeface="Trebuchet MS" pitchFamily="34" charset="0"/>
-                <a:ea typeface="Trebuchet MS" pitchFamily="34" charset="-122"/>
-                <a:cs typeface="Trebuchet MS" pitchFamily="34" charset="-120"/>
-              </a:rPr>
-              <a:t>s</a:t>
+              <a:t>e</a:t>
             </a:r>
             <a:endParaRPr lang="en-US" sz="900" dirty="0"/>
           </a:p>
@@ -11731,7 +11461,7 @@
                 <a:ea typeface="Calibri" pitchFamily="34" charset="-122"/>
                 <a:cs typeface="Calibri" pitchFamily="34" charset="-120"/>
               </a:rPr>
-              <a:t>Word Labs  •  wordlabs.app  •  Root: 'support' = hold up, carry from below</a:t>
+              <a:t>Word Labs  •  wordlabs.app  •  Root: 'support' = hold up, bear, carry</a:t>
             </a:r>
             <a:endParaRPr lang="en-US" sz="800" dirty="0"/>
           </a:p>
@@ -11870,7 +11600,7 @@
                 <a:ea typeface="Trebuchet MS" pitchFamily="34" charset="-122"/>
                 <a:cs typeface="Trebuchet MS" pitchFamily="34" charset="-120"/>
               </a:rPr>
-              <a:t>supportive</a:t>
+              <a:t>supporter</a:t>
             </a:r>
             <a:endParaRPr lang="en-US" sz="2800" dirty="0"/>
           </a:p>
@@ -12558,7 +12288,7 @@
                 <a:ea typeface="Calibri" pitchFamily="34" charset="-122"/>
                 <a:cs typeface="Calibri" pitchFamily="34" charset="-120"/>
               </a:rPr>
-              <a:t>Word Labs  •  wordlabs.app  •  Root: 'support' = hold up, carry from below</a:t>
+              <a:t>Word Labs  •  wordlabs.app  •  Root: 'support' = hold up, bear, carry</a:t>
             </a:r>
             <a:endParaRPr lang="en-US" sz="800" dirty="0"/>
           </a:p>
@@ -12697,7 +12427,7 @@
                 <a:ea typeface="Trebuchet MS" pitchFamily="34" charset="-122"/>
                 <a:cs typeface="Trebuchet MS" pitchFamily="34" charset="-120"/>
               </a:rPr>
-              <a:t>supportive</a:t>
+              <a:t>supporter</a:t>
             </a:r>
             <a:endParaRPr lang="en-US" sz="2800" dirty="0"/>
           </a:p>
@@ -12875,7 +12605,7 @@
                 <a:ea typeface="Calibri" pitchFamily="34" charset="-122"/>
                 <a:cs typeface="Calibri" pitchFamily="34" charset="-120"/>
               </a:rPr>
-              <a:t>hold up, back someone</a:t>
+              <a:t>hold up, help</a:t>
             </a:r>
             <a:endParaRPr lang="en-US" sz="850" dirty="0"/>
           </a:p>
@@ -12948,7 +12678,7 @@
                 <a:ea typeface="Trebuchet MS" pitchFamily="34" charset="-122"/>
                 <a:cs typeface="Trebuchet MS" pitchFamily="34" charset="-120"/>
               </a:rPr>
-              <a:t>ive</a:t>
+              <a:t>er</a:t>
             </a:r>
             <a:endParaRPr lang="en-US" sz="1300" dirty="0"/>
           </a:p>
@@ -12987,7 +12717,7 @@
                 <a:ea typeface="Calibri" pitchFamily="34" charset="-122"/>
                 <a:cs typeface="Calibri" pitchFamily="34" charset="-120"/>
               </a:rPr>
-              <a:t>having the quality of</a:t>
+              <a:t>one who does</a:t>
             </a:r>
             <a:endParaRPr lang="en-US" sz="850" dirty="0"/>
           </a:p>
@@ -13543,7 +13273,7 @@
                 <a:ea typeface="Calibri" pitchFamily="34" charset="-122"/>
                 <a:cs typeface="Calibri" pitchFamily="34" charset="-120"/>
               </a:rPr>
-              <a:t>Word Labs  •  wordlabs.app  •  Root: 'support' = hold up, carry from below</a:t>
+              <a:t>Word Labs  •  wordlabs.app  •  Root: 'support' = hold up, bear, carry</a:t>
             </a:r>
             <a:endParaRPr lang="en-US" sz="800" dirty="0"/>
           </a:p>
@@ -13682,7 +13412,7 @@
                 <a:ea typeface="Trebuchet MS" pitchFamily="34" charset="-122"/>
                 <a:cs typeface="Trebuchet MS" pitchFamily="34" charset="-120"/>
               </a:rPr>
-              <a:t>supportive</a:t>
+              <a:t>supporter</a:t>
             </a:r>
             <a:endParaRPr lang="en-US" sz="2800" dirty="0"/>
           </a:p>
@@ -13860,7 +13590,7 @@
                 <a:ea typeface="Calibri" pitchFamily="34" charset="-122"/>
                 <a:cs typeface="Calibri" pitchFamily="34" charset="-120"/>
               </a:rPr>
-              <a:t>hold up, back someone</a:t>
+              <a:t>hold up, help</a:t>
             </a:r>
             <a:endParaRPr lang="en-US" sz="850" dirty="0"/>
           </a:p>
@@ -13933,7 +13663,7 @@
                 <a:ea typeface="Trebuchet MS" pitchFamily="34" charset="-122"/>
                 <a:cs typeface="Trebuchet MS" pitchFamily="34" charset="-120"/>
               </a:rPr>
-              <a:t>ive</a:t>
+              <a:t>er</a:t>
             </a:r>
             <a:endParaRPr lang="en-US" sz="1300" dirty="0"/>
           </a:p>
@@ -13972,7 +13702,7 @@
                 <a:ea typeface="Calibri" pitchFamily="34" charset="-122"/>
                 <a:cs typeface="Calibri" pitchFamily="34" charset="-120"/>
               </a:rPr>
-              <a:t>having the quality of</a:t>
+              <a:t>one who does</a:t>
             </a:r>
             <a:endParaRPr lang="en-US" sz="850" dirty="0"/>
           </a:p>
@@ -14341,7 +14071,7 @@
                 <a:ea typeface="Trebuchet MS" pitchFamily="34" charset="-122"/>
                 <a:cs typeface="Trebuchet MS" pitchFamily="34" charset="-120"/>
               </a:rPr>
-              <a:t>ive</a:t>
+              <a:t>er</a:t>
             </a:r>
             <a:endParaRPr lang="en-US" sz="1400" dirty="0"/>
           </a:p>
@@ -14674,7 +14404,7 @@
                 <a:ea typeface="Calibri" pitchFamily="34" charset="-122"/>
                 <a:cs typeface="Calibri" pitchFamily="34" charset="-120"/>
               </a:rPr>
-              <a:t>Root 'support' — hold up, carry from below</a:t>
+              <a:t>Root 'support' — hold up, bear, carry</a:t>
             </a:r>
             <a:endParaRPr lang="en-US" sz="1600" dirty="0"/>
           </a:p>
@@ -15030,7 +14760,7 @@
                 <a:ea typeface="Calibri" pitchFamily="34" charset="-122"/>
                 <a:cs typeface="Calibri" pitchFamily="34" charset="-120"/>
               </a:rPr>
-              <a:t>Word Labs  •  wordlabs.app  •  Root: 'support' = hold up, carry from below</a:t>
+              <a:t>Word Labs  •  wordlabs.app  •  Root: 'support' = hold up, bear, carry</a:t>
             </a:r>
             <a:endParaRPr lang="en-US" sz="800" dirty="0"/>
           </a:p>
@@ -15169,7 +14899,7 @@
                 <a:ea typeface="Trebuchet MS" pitchFamily="34" charset="-122"/>
                 <a:cs typeface="Trebuchet MS" pitchFamily="34" charset="-120"/>
               </a:rPr>
-              <a:t>supportive</a:t>
+              <a:t>supporter</a:t>
             </a:r>
             <a:endParaRPr lang="en-US" sz="2800" dirty="0"/>
           </a:p>
@@ -15347,7 +15077,7 @@
                 <a:ea typeface="Calibri" pitchFamily="34" charset="-122"/>
                 <a:cs typeface="Calibri" pitchFamily="34" charset="-120"/>
               </a:rPr>
-              <a:t>hold up, back someone</a:t>
+              <a:t>hold up, help</a:t>
             </a:r>
             <a:endParaRPr lang="en-US" sz="850" dirty="0"/>
           </a:p>
@@ -15420,7 +15150,7 @@
                 <a:ea typeface="Trebuchet MS" pitchFamily="34" charset="-122"/>
                 <a:cs typeface="Trebuchet MS" pitchFamily="34" charset="-120"/>
               </a:rPr>
-              <a:t>ive</a:t>
+              <a:t>er</a:t>
             </a:r>
             <a:endParaRPr lang="en-US" sz="1300" dirty="0"/>
           </a:p>
@@ -15459,7 +15189,7 @@
                 <a:ea typeface="Calibri" pitchFamily="34" charset="-122"/>
                 <a:cs typeface="Calibri" pitchFamily="34" charset="-120"/>
               </a:rPr>
-              <a:t>having the quality of</a:t>
+              <a:t>one who does</a:t>
             </a:r>
             <a:endParaRPr lang="en-US" sz="850" dirty="0"/>
           </a:p>
@@ -15828,7 +15558,7 @@
                 <a:ea typeface="Trebuchet MS" pitchFamily="34" charset="-122"/>
                 <a:cs typeface="Trebuchet MS" pitchFamily="34" charset="-120"/>
               </a:rPr>
-              <a:t>ive</a:t>
+              <a:t>er</a:t>
             </a:r>
             <a:endParaRPr lang="en-US" sz="1400" dirty="0"/>
           </a:p>
@@ -15909,11 +15639,11 @@
         <p:spPr>
           <a:xfrm>
             <a:off x="1874520" y="4096512"/>
-            <a:ext cx="6903720" cy="804672"/>
+            <a:ext cx="6903720" cy="658368"/>
           </a:xfrm>
           <a:prstGeom prst="rect">
             <a:avLst>
-              <a:gd name="adj" fmla="val 6818"/>
+              <a:gd name="adj" fmla="val 8333"/>
             </a:avLst>
           </a:prstGeom>
           <a:solidFill>
@@ -15935,12 +15665,12 @@
         </p:nvSpPr>
         <p:spPr>
           <a:xfrm>
-            <a:off x="2124837" y="4169664"/>
-            <a:ext cx="685800" cy="384048"/>
+            <a:off x="2254649" y="4169664"/>
+            <a:ext cx="685800" cy="475488"/>
           </a:xfrm>
           <a:prstGeom prst="rect">
             <a:avLst>
-              <a:gd name="adj" fmla="val 9524"/>
+              <a:gd name="adj" fmla="val 7692"/>
             </a:avLst>
           </a:prstGeom>
           <a:solidFill>
@@ -15962,8 +15692,8 @@
         </p:nvSpPr>
         <p:spPr>
           <a:xfrm>
-            <a:off x="2124837" y="4169664"/>
-            <a:ext cx="685800" cy="384048"/>
+            <a:off x="2254649" y="4169664"/>
+            <a:ext cx="685800" cy="475488"/>
           </a:xfrm>
           <a:prstGeom prst="rect">
             <a:avLst/>
@@ -16001,12 +15731,12 @@
         </p:nvSpPr>
         <p:spPr>
           <a:xfrm>
-            <a:off x="3033522" y="4169664"/>
-            <a:ext cx="685800" cy="384048"/>
+            <a:off x="3293146" y="4169664"/>
+            <a:ext cx="685800" cy="475488"/>
           </a:xfrm>
           <a:prstGeom prst="rect">
             <a:avLst>
-              <a:gd name="adj" fmla="val 9524"/>
+              <a:gd name="adj" fmla="val 7692"/>
             </a:avLst>
           </a:prstGeom>
           <a:solidFill>
@@ -16028,8 +15758,8 @@
         </p:nvSpPr>
         <p:spPr>
           <a:xfrm>
-            <a:off x="3033522" y="4169664"/>
-            <a:ext cx="685800" cy="384048"/>
+            <a:off x="3293146" y="4169664"/>
+            <a:ext cx="685800" cy="475488"/>
           </a:xfrm>
           <a:prstGeom prst="rect">
             <a:avLst/>
@@ -16067,12 +15797,12 @@
         </p:nvSpPr>
         <p:spPr>
           <a:xfrm>
-            <a:off x="3942207" y="4169664"/>
-            <a:ext cx="685800" cy="384048"/>
+            <a:off x="4331643" y="4169664"/>
+            <a:ext cx="685800" cy="475488"/>
           </a:xfrm>
           <a:prstGeom prst="rect">
             <a:avLst>
-              <a:gd name="adj" fmla="val 9524"/>
+              <a:gd name="adj" fmla="val 7692"/>
             </a:avLst>
           </a:prstGeom>
           <a:solidFill>
@@ -16094,8 +15824,8 @@
         </p:nvSpPr>
         <p:spPr>
           <a:xfrm>
-            <a:off x="3942207" y="4169664"/>
-            <a:ext cx="685800" cy="384048"/>
+            <a:off x="4331643" y="4169664"/>
+            <a:ext cx="685800" cy="475488"/>
           </a:xfrm>
           <a:prstGeom prst="rect">
             <a:avLst/>
@@ -16133,12 +15863,12 @@
         </p:nvSpPr>
         <p:spPr>
           <a:xfrm>
-            <a:off x="4850892" y="4169664"/>
-            <a:ext cx="685800" cy="384048"/>
+            <a:off x="5370141" y="4169664"/>
+            <a:ext cx="685800" cy="475488"/>
           </a:xfrm>
           <a:prstGeom prst="rect">
             <a:avLst>
-              <a:gd name="adj" fmla="val 9524"/>
+              <a:gd name="adj" fmla="val 7692"/>
             </a:avLst>
           </a:prstGeom>
           <a:solidFill>
@@ -16160,8 +15890,8 @@
         </p:nvSpPr>
         <p:spPr>
           <a:xfrm>
-            <a:off x="4850892" y="4169664"/>
-            <a:ext cx="685800" cy="384048"/>
+            <a:off x="5370141" y="4169664"/>
+            <a:ext cx="685800" cy="475488"/>
           </a:xfrm>
           <a:prstGeom prst="rect">
             <a:avLst/>
@@ -16199,12 +15929,12 @@
         </p:nvSpPr>
         <p:spPr>
           <a:xfrm>
-            <a:off x="5759577" y="4169664"/>
-            <a:ext cx="685800" cy="384048"/>
+            <a:off x="6408638" y="4169664"/>
+            <a:ext cx="685800" cy="475488"/>
           </a:xfrm>
           <a:prstGeom prst="rect">
             <a:avLst>
-              <a:gd name="adj" fmla="val 9524"/>
+              <a:gd name="adj" fmla="val 7692"/>
             </a:avLst>
           </a:prstGeom>
           <a:solidFill>
@@ -16226,8 +15956,8 @@
         </p:nvSpPr>
         <p:spPr>
           <a:xfrm>
-            <a:off x="5759577" y="4169664"/>
-            <a:ext cx="685800" cy="384048"/>
+            <a:off x="6408638" y="4169664"/>
+            <a:ext cx="685800" cy="475488"/>
           </a:xfrm>
           <a:prstGeom prst="rect">
             <a:avLst/>
@@ -16265,12 +15995,12 @@
         </p:nvSpPr>
         <p:spPr>
           <a:xfrm>
-            <a:off x="6668262" y="4169664"/>
-            <a:ext cx="685800" cy="384048"/>
+            <a:off x="7447135" y="4169664"/>
+            <a:ext cx="685800" cy="475488"/>
           </a:xfrm>
           <a:prstGeom prst="rect">
             <a:avLst>
-              <a:gd name="adj" fmla="val 9524"/>
+              <a:gd name="adj" fmla="val 7692"/>
             </a:avLst>
           </a:prstGeom>
           <a:solidFill>
@@ -16292,8 +16022,8 @@
         </p:nvSpPr>
         <p:spPr>
           <a:xfrm>
-            <a:off x="6668262" y="4169664"/>
-            <a:ext cx="685800" cy="384048"/>
+            <a:off x="7447135" y="4169664"/>
+            <a:ext cx="685800" cy="475488"/>
           </a:xfrm>
           <a:prstGeom prst="rect">
             <a:avLst/>
@@ -16317,114 +16047,9 @@
                 <a:ea typeface="Trebuchet MS" pitchFamily="34" charset="-122"/>
                 <a:cs typeface="Trebuchet MS" pitchFamily="34" charset="-120"/>
               </a:rPr>
-              <a:t>i</a:t>
+              <a:t>er</a:t>
             </a:r>
             <a:endParaRPr lang="en-US" sz="900" dirty="0"/>
-          </a:p>
-        </p:txBody>
-      </p:sp>
-      <p:sp>
-        <p:nvSpPr>
-          <p:cNvPr id="48" name="Shape 46"/>
-          <p:cNvSpPr/>
-          <p:nvPr/>
-        </p:nvSpPr>
-        <p:spPr>
-          <a:xfrm>
-            <a:off x="7576947" y="4169664"/>
-            <a:ext cx="685800" cy="384048"/>
-          </a:xfrm>
-          <a:prstGeom prst="rect">
-            <a:avLst>
-              <a:gd name="adj" fmla="val 9524"/>
-            </a:avLst>
-          </a:prstGeom>
-          <a:solidFill>
-            <a:srgbClr val="FFFFFF"/>
-          </a:solidFill>
-          <a:ln w="12700">
-            <a:solidFill>
-              <a:srgbClr val="DB2777"/>
-            </a:solidFill>
-            <a:prstDash val="solid"/>
-          </a:ln>
-        </p:spPr>
-      </p:sp>
-      <p:sp>
-        <p:nvSpPr>
-          <p:cNvPr id="49" name="Text 47"/>
-          <p:cNvSpPr/>
-          <p:nvPr/>
-        </p:nvSpPr>
-        <p:spPr>
-          <a:xfrm>
-            <a:off x="7576947" y="4169664"/>
-            <a:ext cx="685800" cy="384048"/>
-          </a:xfrm>
-          <a:prstGeom prst="rect">
-            <a:avLst/>
-          </a:prstGeom>
-          <a:noFill/>
-          <a:ln/>
-        </p:spPr>
-        <p:txBody>
-          <a:bodyPr wrap="square" lIns="0" tIns="0" rIns="0" bIns="0" rtlCol="0" anchor="ctr"/>
-          <a:lstStyle/>
-          <a:p>
-            <a:pPr algn="ctr" indent="0" marL="0">
-              <a:buNone/>
-            </a:pPr>
-            <a:r>
-              <a:rPr lang="en-US" sz="900" b="1" dirty="0">
-                <a:solidFill>
-                  <a:srgbClr val="9D174D"/>
-                </a:solidFill>
-                <a:latin typeface="Trebuchet MS" pitchFamily="34" charset="0"/>
-                <a:ea typeface="Trebuchet MS" pitchFamily="34" charset="-122"/>
-                <a:cs typeface="Trebuchet MS" pitchFamily="34" charset="-120"/>
-              </a:rPr>
-              <a:t>ve</a:t>
-            </a:r>
-            <a:endParaRPr lang="en-US" sz="900" dirty="0"/>
-          </a:p>
-        </p:txBody>
-      </p:sp>
-      <p:sp>
-        <p:nvSpPr>
-          <p:cNvPr id="50" name="Text 48"/>
-          <p:cNvSpPr/>
-          <p:nvPr/>
-        </p:nvSpPr>
-        <p:spPr>
-          <a:xfrm>
-            <a:off x="7576947" y="4572000"/>
-            <a:ext cx="685800" cy="219456"/>
-          </a:xfrm>
-          <a:prstGeom prst="rect">
-            <a:avLst/>
-          </a:prstGeom>
-          <a:noFill/>
-          <a:ln/>
-        </p:spPr>
-        <p:txBody>
-          <a:bodyPr wrap="square" lIns="0" tIns="0" rIns="0" bIns="0" rtlCol="0" anchor="t"/>
-          <a:lstStyle/>
-          <a:p>
-            <a:pPr algn="ctr" indent="0" marL="0">
-              <a:buNone/>
-            </a:pPr>
-            <a:r>
-              <a:rPr lang="en-US" sz="750" i="1" dirty="0">
-                <a:solidFill>
-                  <a:srgbClr val="94A3B8"/>
-                </a:solidFill>
-                <a:latin typeface="Calibri" pitchFamily="34" charset="0"/>
-                <a:ea typeface="Calibri" pitchFamily="34" charset="-122"/>
-                <a:cs typeface="Calibri" pitchFamily="34" charset="-120"/>
-              </a:rPr>
-              <a:t>/v/</a:t>
-            </a:r>
-            <a:endParaRPr lang="en-US" sz="750" dirty="0"/>
           </a:p>
         </p:txBody>
       </p:sp>
@@ -16996,7 +16621,7 @@
                 <a:ea typeface="Calibri" pitchFamily="34" charset="-122"/>
                 <a:cs typeface="Calibri" pitchFamily="34" charset="-120"/>
               </a:rPr>
-              <a:t>Word Labs  •  wordlabs.app  •  Root: 'support' = hold up, carry from below</a:t>
+              <a:t>Word Labs  •  wordlabs.app  •  Root: 'support' = hold up, bear, carry</a:t>
             </a:r>
             <a:endParaRPr lang="en-US" sz="800" dirty="0"/>
           </a:p>
@@ -17330,7 +16955,7 @@
                 <a:ea typeface="Trebuchet MS" pitchFamily="34" charset="-122"/>
                 <a:cs typeface="Trebuchet MS" pitchFamily="34" charset="-120"/>
               </a:rPr>
-              <a:t>2</a:t>
+              <a:t>1</a:t>
             </a:r>
             <a:pPr algn="ctr" indent="0" marL="0">
               <a:buNone/>
@@ -17344,7 +16969,7 @@
                 <a:ea typeface="Trebuchet MS" pitchFamily="34" charset="-122"/>
                 <a:cs typeface="Trebuchet MS" pitchFamily="34" charset="-120"/>
               </a:rPr>
-              <a:t>  punctuation marks</a:t>
+              <a:t>  punctuation mark</a:t>
             </a:r>
             <a:endParaRPr lang="en-US" sz="2800" dirty="0"/>
           </a:p>
@@ -17636,7 +17261,7 @@
                 <a:ea typeface="Calibri" pitchFamily="34" charset="-122"/>
                 <a:cs typeface="Calibri" pitchFamily="34" charset="-120"/>
               </a:rPr>
-              <a:t>Word Labs  •  wordlabs.app  •  Root: 'support' = hold up, carry from below</a:t>
+              <a:t>Word Labs  •  wordlabs.app  •  Root: 'support' = hold up, bear, carry</a:t>
             </a:r>
             <a:endParaRPr lang="en-US" sz="800" dirty="0"/>
           </a:p>
@@ -17765,7 +17390,7 @@
                 <a:ea typeface="Calibri" pitchFamily="34" charset="-122"/>
                 <a:cs typeface="Calibri" pitchFamily="34" charset="-120"/>
               </a:rPr>
-              <a:t>unsupportive</a:t>
+              <a:t>unsupported</a:t>
             </a:r>
             <a:pPr algn="l" indent="0" marL="0">
               <a:buNone/>
@@ -17779,7 +17404,7 @@
                 <a:ea typeface="Calibri" pitchFamily="34" charset="-122"/>
                 <a:cs typeface="Calibri" pitchFamily="34" charset="-120"/>
               </a:rPr>
-              <a:t> coach was replaced by a more </a:t>
+              <a:t> tent collapsed, so we needed </a:t>
             </a:r>
             <a:pPr algn="l" indent="0" marL="0">
               <a:buNone/>
@@ -17796,7 +17421,7 @@
                 <a:ea typeface="Calibri" pitchFamily="34" charset="-122"/>
                 <a:cs typeface="Calibri" pitchFamily="34" charset="-120"/>
               </a:rPr>
-              <a:t>supportive</a:t>
+              <a:t>supporting</a:t>
             </a:r>
             <a:pPr algn="l" indent="0" marL="0">
               <a:buNone/>
@@ -17810,7 +17435,7 @@
                 <a:ea typeface="Calibri" pitchFamily="34" charset="-122"/>
                 <a:cs typeface="Calibri" pitchFamily="34" charset="-120"/>
               </a:rPr>
-              <a:t> leader, which boosted the </a:t>
+              <a:t> poles and ropes to make it </a:t>
             </a:r>
             <a:pPr algn="l" indent="0" marL="0">
               <a:buNone/>
@@ -17827,7 +17452,7 @@
                 <a:ea typeface="Calibri" pitchFamily="34" charset="-122"/>
                 <a:cs typeface="Calibri" pitchFamily="34" charset="-120"/>
               </a:rPr>
-              <a:t>supporters</a:t>
+              <a:t>supportable</a:t>
             </a:r>
             <a:pPr algn="l" indent="0" marL="0">
               <a:buNone/>
@@ -17841,7 +17466,7 @@
                 <a:ea typeface="Calibri" pitchFamily="34" charset="-122"/>
                 <a:cs typeface="Calibri" pitchFamily="34" charset="-120"/>
               </a:rPr>
-              <a:t>' confidence.</a:t>
+              <a:t> in the strong wind.</a:t>
             </a:r>
             <a:endParaRPr lang="en-US" sz="1800" dirty="0"/>
           </a:p>
@@ -17996,7 +17621,7 @@
                 <a:ea typeface="Trebuchet MS" pitchFamily="34" charset="-122"/>
                 <a:cs typeface="Trebuchet MS" pitchFamily="34" charset="-120"/>
               </a:rPr>
-              <a:t>unsupportive</a:t>
+              <a:t>unsupported</a:t>
             </a:r>
             <a:endParaRPr lang="en-US" sz="1400" dirty="0"/>
           </a:p>
@@ -18124,7 +17749,7 @@
                 <a:ea typeface="Trebuchet MS" pitchFamily="34" charset="-122"/>
                 <a:cs typeface="Trebuchet MS" pitchFamily="34" charset="-120"/>
               </a:rPr>
-              <a:t>supportive</a:t>
+              <a:t>supporting</a:t>
             </a:r>
             <a:endParaRPr lang="en-US" sz="1400" dirty="0"/>
           </a:p>
@@ -18252,7 +17877,7 @@
                 <a:ea typeface="Trebuchet MS" pitchFamily="34" charset="-122"/>
                 <a:cs typeface="Trebuchet MS" pitchFamily="34" charset="-120"/>
               </a:rPr>
-              <a:t>supporters</a:t>
+              <a:t>supportable</a:t>
             </a:r>
             <a:endParaRPr lang="en-US" sz="1400" dirty="0"/>
           </a:p>
@@ -18583,7 +18208,7 @@
                 <a:ea typeface="Calibri" pitchFamily="34" charset="-122"/>
                 <a:cs typeface="Calibri" pitchFamily="34" charset="-120"/>
               </a:rPr>
-              <a:t>Word Labs  •  wordlabs.app  •  Root: 'support' = hold up, carry from below</a:t>
+              <a:t>Word Labs  •  wordlabs.app  •  Root: 'support' = hold up, bear, carry</a:t>
             </a:r>
             <a:endParaRPr lang="en-US" sz="800" dirty="0"/>
           </a:p>
@@ -18722,7 +18347,7 @@
                 <a:ea typeface="Trebuchet MS" pitchFamily="34" charset="-122"/>
                 <a:cs typeface="Trebuchet MS" pitchFamily="34" charset="-120"/>
               </a:rPr>
-              <a:t>unsupportive</a:t>
+              <a:t>unsupported</a:t>
             </a:r>
             <a:endParaRPr lang="en-US" sz="2800" dirty="0"/>
           </a:p>
@@ -19410,7 +19035,7 @@
                 <a:ea typeface="Calibri" pitchFamily="34" charset="-122"/>
                 <a:cs typeface="Calibri" pitchFamily="34" charset="-120"/>
               </a:rPr>
-              <a:t>Word Labs  •  wordlabs.app  •  Root: 'support' = hold up, carry from below</a:t>
+              <a:t>Word Labs  •  wordlabs.app  •  Root: 'support' = hold up, bear, carry</a:t>
             </a:r>
             <a:endParaRPr lang="en-US" sz="800" dirty="0"/>
           </a:p>
@@ -19549,7 +19174,7 @@
                 <a:ea typeface="Trebuchet MS" pitchFamily="34" charset="-122"/>
                 <a:cs typeface="Trebuchet MS" pitchFamily="34" charset="-120"/>
               </a:rPr>
-              <a:t>unsupportive</a:t>
+              <a:t>unsupported</a:t>
             </a:r>
             <a:endParaRPr lang="en-US" sz="2800" dirty="0"/>
           </a:p>
@@ -19727,7 +19352,7 @@
                 <a:ea typeface="Calibri" pitchFamily="34" charset="-122"/>
                 <a:cs typeface="Calibri" pitchFamily="34" charset="-120"/>
               </a:rPr>
-              <a:t>not</a:t>
+              <a:t>not, without</a:t>
             </a:r>
             <a:endParaRPr lang="en-US" sz="850" dirty="0"/>
           </a:p>
@@ -19839,7 +19464,7 @@
                 <a:ea typeface="Calibri" pitchFamily="34" charset="-122"/>
                 <a:cs typeface="Calibri" pitchFamily="34" charset="-120"/>
               </a:rPr>
-              <a:t>hold up, back someone</a:t>
+              <a:t>hold up, help</a:t>
             </a:r>
             <a:endParaRPr lang="en-US" sz="850" dirty="0"/>
           </a:p>
@@ -19912,7 +19537,7 @@
                 <a:ea typeface="Trebuchet MS" pitchFamily="34" charset="-122"/>
                 <a:cs typeface="Trebuchet MS" pitchFamily="34" charset="-120"/>
               </a:rPr>
-              <a:t>ive</a:t>
+              <a:t>ed</a:t>
             </a:r>
             <a:endParaRPr lang="en-US" sz="1300" dirty="0"/>
           </a:p>
@@ -19951,7 +19576,7 @@
                 <a:ea typeface="Calibri" pitchFamily="34" charset="-122"/>
                 <a:cs typeface="Calibri" pitchFamily="34" charset="-120"/>
               </a:rPr>
-              <a:t>having the quality of</a:t>
+              <a:t>in the past</a:t>
             </a:r>
             <a:endParaRPr lang="en-US" sz="850" dirty="0"/>
           </a:p>
@@ -20507,7 +20132,7 @@
                 <a:ea typeface="Calibri" pitchFamily="34" charset="-122"/>
                 <a:cs typeface="Calibri" pitchFamily="34" charset="-120"/>
               </a:rPr>
-              <a:t>Word Labs  •  wordlabs.app  •  Root: 'support' = hold up, carry from below</a:t>
+              <a:t>Word Labs  •  wordlabs.app  •  Root: 'support' = hold up, bear, carry</a:t>
             </a:r>
             <a:endParaRPr lang="en-US" sz="800" dirty="0"/>
           </a:p>
@@ -20646,7 +20271,7 @@
                 <a:ea typeface="Trebuchet MS" pitchFamily="34" charset="-122"/>
                 <a:cs typeface="Trebuchet MS" pitchFamily="34" charset="-120"/>
               </a:rPr>
-              <a:t>unsupportive</a:t>
+              <a:t>unsupported</a:t>
             </a:r>
             <a:endParaRPr lang="en-US" sz="2800" dirty="0"/>
           </a:p>
@@ -20824,7 +20449,7 @@
                 <a:ea typeface="Calibri" pitchFamily="34" charset="-122"/>
                 <a:cs typeface="Calibri" pitchFamily="34" charset="-120"/>
               </a:rPr>
-              <a:t>not</a:t>
+              <a:t>not, without</a:t>
             </a:r>
             <a:endParaRPr lang="en-US" sz="850" dirty="0"/>
           </a:p>
@@ -20936,7 +20561,7 @@
                 <a:ea typeface="Calibri" pitchFamily="34" charset="-122"/>
                 <a:cs typeface="Calibri" pitchFamily="34" charset="-120"/>
               </a:rPr>
-              <a:t>hold up, back someone</a:t>
+              <a:t>hold up, help</a:t>
             </a:r>
             <a:endParaRPr lang="en-US" sz="850" dirty="0"/>
           </a:p>
@@ -21009,7 +20634,7 @@
                 <a:ea typeface="Trebuchet MS" pitchFamily="34" charset="-122"/>
                 <a:cs typeface="Trebuchet MS" pitchFamily="34" charset="-120"/>
               </a:rPr>
-              <a:t>ive</a:t>
+              <a:t>ed</a:t>
             </a:r>
             <a:endParaRPr lang="en-US" sz="1300" dirty="0"/>
           </a:p>
@@ -21048,7 +20673,7 @@
                 <a:ea typeface="Calibri" pitchFamily="34" charset="-122"/>
                 <a:cs typeface="Calibri" pitchFamily="34" charset="-120"/>
               </a:rPr>
-              <a:t>having the quality of</a:t>
+              <a:t>in the past</a:t>
             </a:r>
             <a:endParaRPr lang="en-US" sz="850" dirty="0"/>
           </a:p>
@@ -21522,7 +21147,7 @@
                 <a:ea typeface="Trebuchet MS" pitchFamily="34" charset="-122"/>
                 <a:cs typeface="Trebuchet MS" pitchFamily="34" charset="-120"/>
               </a:rPr>
-              <a:t>ive</a:t>
+              <a:t>ed</a:t>
             </a:r>
             <a:endParaRPr lang="en-US" sz="1400" dirty="0"/>
           </a:p>
@@ -21946,7 +21571,7 @@
                 <a:ea typeface="Calibri" pitchFamily="34" charset="-122"/>
                 <a:cs typeface="Calibri" pitchFamily="34" charset="-120"/>
               </a:rPr>
-              <a:t>Word Labs  •  wordlabs.app  •  Root: 'support' = hold up, carry from below</a:t>
+              <a:t>Word Labs  •  wordlabs.app  •  Root: 'support' = hold up, bear, carry</a:t>
             </a:r>
             <a:endParaRPr lang="en-US" sz="800" dirty="0"/>
           </a:p>
@@ -22085,7 +21710,7 @@
                 <a:ea typeface="Trebuchet MS" pitchFamily="34" charset="-122"/>
                 <a:cs typeface="Trebuchet MS" pitchFamily="34" charset="-120"/>
               </a:rPr>
-              <a:t>unsupportive</a:t>
+              <a:t>unsupported</a:t>
             </a:r>
             <a:endParaRPr lang="en-US" sz="2800" dirty="0"/>
           </a:p>
@@ -22263,7 +21888,7 @@
                 <a:ea typeface="Calibri" pitchFamily="34" charset="-122"/>
                 <a:cs typeface="Calibri" pitchFamily="34" charset="-120"/>
               </a:rPr>
-              <a:t>not</a:t>
+              <a:t>not, without</a:t>
             </a:r>
             <a:endParaRPr lang="en-US" sz="850" dirty="0"/>
           </a:p>
@@ -22375,7 +22000,7 @@
                 <a:ea typeface="Calibri" pitchFamily="34" charset="-122"/>
                 <a:cs typeface="Calibri" pitchFamily="34" charset="-120"/>
               </a:rPr>
-              <a:t>hold up, back someone</a:t>
+              <a:t>hold up, help</a:t>
             </a:r>
             <a:endParaRPr lang="en-US" sz="850" dirty="0"/>
           </a:p>
@@ -22448,7 +22073,7 @@
                 <a:ea typeface="Trebuchet MS" pitchFamily="34" charset="-122"/>
                 <a:cs typeface="Trebuchet MS" pitchFamily="34" charset="-120"/>
               </a:rPr>
-              <a:t>ive</a:t>
+              <a:t>ed</a:t>
             </a:r>
             <a:endParaRPr lang="en-US" sz="1300" dirty="0"/>
           </a:p>
@@ -22487,7 +22112,7 @@
                 <a:ea typeface="Calibri" pitchFamily="34" charset="-122"/>
                 <a:cs typeface="Calibri" pitchFamily="34" charset="-120"/>
               </a:rPr>
-              <a:t>having the quality of</a:t>
+              <a:t>in the past</a:t>
             </a:r>
             <a:endParaRPr lang="en-US" sz="850" dirty="0"/>
           </a:p>
@@ -22961,7 +22586,7 @@
                 <a:ea typeface="Trebuchet MS" pitchFamily="34" charset="-122"/>
                 <a:cs typeface="Trebuchet MS" pitchFamily="34" charset="-120"/>
               </a:rPr>
-              <a:t>ive</a:t>
+              <a:t>ed</a:t>
             </a:r>
             <a:endParaRPr lang="en-US" sz="1400" dirty="0"/>
           </a:p>
@@ -23042,11 +22667,11 @@
         <p:spPr>
           <a:xfrm>
             <a:off x="1874520" y="4096512"/>
-            <a:ext cx="6903720" cy="804672"/>
+            <a:ext cx="6903720" cy="658368"/>
           </a:xfrm>
           <a:prstGeom prst="rect">
             <a:avLst>
-              <a:gd name="adj" fmla="val 6818"/>
+              <a:gd name="adj" fmla="val 8333"/>
             </a:avLst>
           </a:prstGeom>
           <a:solidFill>
@@ -23069,11 +22694,11 @@
         <p:spPr>
           <a:xfrm>
             <a:off x="1951330" y="4169664"/>
-            <a:ext cx="676656" cy="384048"/>
+            <a:ext cx="676656" cy="475488"/>
           </a:xfrm>
           <a:prstGeom prst="rect">
             <a:avLst>
-              <a:gd name="adj" fmla="val 9524"/>
+              <a:gd name="adj" fmla="val 7692"/>
             </a:avLst>
           </a:prstGeom>
           <a:solidFill>
@@ -23096,7 +22721,7 @@
         <p:spPr>
           <a:xfrm>
             <a:off x="1951330" y="4169664"/>
-            <a:ext cx="676656" cy="384048"/>
+            <a:ext cx="676656" cy="475488"/>
           </a:xfrm>
           <a:prstGeom prst="rect">
             <a:avLst/>
@@ -23135,11 +22760,11 @@
         <p:spPr>
           <a:xfrm>
             <a:off x="2677363" y="4169664"/>
-            <a:ext cx="676656" cy="384048"/>
+            <a:ext cx="676656" cy="475488"/>
           </a:xfrm>
           <a:prstGeom prst="rect">
             <a:avLst>
-              <a:gd name="adj" fmla="val 9524"/>
+              <a:gd name="adj" fmla="val 7692"/>
             </a:avLst>
           </a:prstGeom>
           <a:solidFill>
@@ -23162,7 +22787,7 @@
         <p:spPr>
           <a:xfrm>
             <a:off x="2677363" y="4169664"/>
-            <a:ext cx="676656" cy="384048"/>
+            <a:ext cx="676656" cy="475488"/>
           </a:xfrm>
           <a:prstGeom prst="rect">
             <a:avLst/>
@@ -23201,11 +22826,11 @@
         <p:spPr>
           <a:xfrm>
             <a:off x="3403397" y="4169664"/>
-            <a:ext cx="676656" cy="384048"/>
+            <a:ext cx="676656" cy="475488"/>
           </a:xfrm>
           <a:prstGeom prst="rect">
             <a:avLst>
-              <a:gd name="adj" fmla="val 9524"/>
+              <a:gd name="adj" fmla="val 7692"/>
             </a:avLst>
           </a:prstGeom>
           <a:solidFill>
@@ -23228,7 +22853,7 @@
         <p:spPr>
           <a:xfrm>
             <a:off x="3403397" y="4169664"/>
-            <a:ext cx="676656" cy="384048"/>
+            <a:ext cx="676656" cy="475488"/>
           </a:xfrm>
           <a:prstGeom prst="rect">
             <a:avLst/>
@@ -23267,11 +22892,11 @@
         <p:spPr>
           <a:xfrm>
             <a:off x="4129430" y="4169664"/>
-            <a:ext cx="676656" cy="384048"/>
+            <a:ext cx="676656" cy="475488"/>
           </a:xfrm>
           <a:prstGeom prst="rect">
             <a:avLst>
-              <a:gd name="adj" fmla="val 9524"/>
+              <a:gd name="adj" fmla="val 7692"/>
             </a:avLst>
           </a:prstGeom>
           <a:solidFill>
@@ -23294,7 +22919,7 @@
         <p:spPr>
           <a:xfrm>
             <a:off x="4129430" y="4169664"/>
-            <a:ext cx="676656" cy="384048"/>
+            <a:ext cx="676656" cy="475488"/>
           </a:xfrm>
           <a:prstGeom prst="rect">
             <a:avLst/>
@@ -23333,11 +22958,11 @@
         <p:spPr>
           <a:xfrm>
             <a:off x="4855464" y="4169664"/>
-            <a:ext cx="676656" cy="384048"/>
+            <a:ext cx="676656" cy="475488"/>
           </a:xfrm>
           <a:prstGeom prst="rect">
             <a:avLst>
-              <a:gd name="adj" fmla="val 9524"/>
+              <a:gd name="adj" fmla="val 7692"/>
             </a:avLst>
           </a:prstGeom>
           <a:solidFill>
@@ -23360,7 +22985,7 @@
         <p:spPr>
           <a:xfrm>
             <a:off x="4855464" y="4169664"/>
-            <a:ext cx="676656" cy="384048"/>
+            <a:ext cx="676656" cy="475488"/>
           </a:xfrm>
           <a:prstGeom prst="rect">
             <a:avLst/>
@@ -23399,11 +23024,11 @@
         <p:spPr>
           <a:xfrm>
             <a:off x="5581498" y="4169664"/>
-            <a:ext cx="676656" cy="384048"/>
+            <a:ext cx="676656" cy="475488"/>
           </a:xfrm>
           <a:prstGeom prst="rect">
             <a:avLst>
-              <a:gd name="adj" fmla="val 9524"/>
+              <a:gd name="adj" fmla="val 7692"/>
             </a:avLst>
           </a:prstGeom>
           <a:solidFill>
@@ -23426,7 +23051,7 @@
         <p:spPr>
           <a:xfrm>
             <a:off x="5581498" y="4169664"/>
-            <a:ext cx="676656" cy="384048"/>
+            <a:ext cx="676656" cy="475488"/>
           </a:xfrm>
           <a:prstGeom prst="rect">
             <a:avLst/>
@@ -23465,11 +23090,11 @@
         <p:spPr>
           <a:xfrm>
             <a:off x="6307531" y="4169664"/>
-            <a:ext cx="676656" cy="384048"/>
+            <a:ext cx="676656" cy="475488"/>
           </a:xfrm>
           <a:prstGeom prst="rect">
             <a:avLst>
-              <a:gd name="adj" fmla="val 9524"/>
+              <a:gd name="adj" fmla="val 7692"/>
             </a:avLst>
           </a:prstGeom>
           <a:solidFill>
@@ -23492,7 +23117,7 @@
         <p:spPr>
           <a:xfrm>
             <a:off x="6307531" y="4169664"/>
-            <a:ext cx="676656" cy="384048"/>
+            <a:ext cx="676656" cy="475488"/>
           </a:xfrm>
           <a:prstGeom prst="rect">
             <a:avLst/>
@@ -23531,11 +23156,11 @@
         <p:spPr>
           <a:xfrm>
             <a:off x="7033565" y="4169664"/>
-            <a:ext cx="676656" cy="384048"/>
+            <a:ext cx="676656" cy="475488"/>
           </a:xfrm>
           <a:prstGeom prst="rect">
             <a:avLst>
-              <a:gd name="adj" fmla="val 9524"/>
+              <a:gd name="adj" fmla="val 7692"/>
             </a:avLst>
           </a:prstGeom>
           <a:solidFill>
@@ -23558,7 +23183,7 @@
         <p:spPr>
           <a:xfrm>
             <a:off x="7033565" y="4169664"/>
-            <a:ext cx="676656" cy="384048"/>
+            <a:ext cx="676656" cy="475488"/>
           </a:xfrm>
           <a:prstGeom prst="rect">
             <a:avLst/>
@@ -23582,7 +23207,7 @@
                 <a:ea typeface="Trebuchet MS" pitchFamily="34" charset="-122"/>
                 <a:cs typeface="Trebuchet MS" pitchFamily="34" charset="-120"/>
               </a:rPr>
-              <a:t>i</a:t>
+              <a:t>e</a:t>
             </a:r>
             <a:endParaRPr lang="en-US" sz="900" dirty="0"/>
           </a:p>
@@ -23597,11 +23222,11 @@
         <p:spPr>
           <a:xfrm>
             <a:off x="7759598" y="4169664"/>
-            <a:ext cx="676656" cy="384048"/>
+            <a:ext cx="676656" cy="475488"/>
           </a:xfrm>
           <a:prstGeom prst="rect">
             <a:avLst>
-              <a:gd name="adj" fmla="val 9524"/>
+              <a:gd name="adj" fmla="val 7692"/>
             </a:avLst>
           </a:prstGeom>
           <a:solidFill>
@@ -23624,7 +23249,7 @@
         <p:spPr>
           <a:xfrm>
             <a:off x="7759598" y="4169664"/>
-            <a:ext cx="676656" cy="384048"/>
+            <a:ext cx="676656" cy="475488"/>
           </a:xfrm>
           <a:prstGeom prst="rect">
             <a:avLst/>
@@ -23648,48 +23273,9 @@
                 <a:ea typeface="Trebuchet MS" pitchFamily="34" charset="-122"/>
                 <a:cs typeface="Trebuchet MS" pitchFamily="34" charset="-120"/>
               </a:rPr>
-              <a:t>ve</a:t>
+              <a:t>d</a:t>
             </a:r>
             <a:endParaRPr lang="en-US" sz="900" dirty="0"/>
-          </a:p>
-        </p:txBody>
-      </p:sp>
-      <p:sp>
-        <p:nvSpPr>
-          <p:cNvPr id="60" name="Text 58"/>
-          <p:cNvSpPr/>
-          <p:nvPr/>
-        </p:nvSpPr>
-        <p:spPr>
-          <a:xfrm>
-            <a:off x="7759598" y="4572000"/>
-            <a:ext cx="676656" cy="219456"/>
-          </a:xfrm>
-          <a:prstGeom prst="rect">
-            <a:avLst/>
-          </a:prstGeom>
-          <a:noFill/>
-          <a:ln/>
-        </p:spPr>
-        <p:txBody>
-          <a:bodyPr wrap="square" lIns="0" tIns="0" rIns="0" bIns="0" rtlCol="0" anchor="t"/>
-          <a:lstStyle/>
-          <a:p>
-            <a:pPr algn="ctr" indent="0" marL="0">
-              <a:buNone/>
-            </a:pPr>
-            <a:r>
-              <a:rPr lang="en-US" sz="750" i="1" dirty="0">
-                <a:solidFill>
-                  <a:srgbClr val="94A3B8"/>
-                </a:solidFill>
-                <a:latin typeface="Calibri" pitchFamily="34" charset="0"/>
-                <a:ea typeface="Calibri" pitchFamily="34" charset="-122"/>
-                <a:cs typeface="Calibri" pitchFamily="34" charset="-120"/>
-              </a:rPr>
-              <a:t>/v/</a:t>
-            </a:r>
-            <a:endParaRPr lang="en-US" sz="750" dirty="0"/>
           </a:p>
         </p:txBody>
       </p:sp>
@@ -23979,7 +23565,7 @@
                 <a:ea typeface="Calibri" pitchFamily="34" charset="-122"/>
                 <a:cs typeface="Calibri" pitchFamily="34" charset="-120"/>
               </a:rPr>
-              <a:t>Word Labs  •  wordlabs.app  •  Root: 'support' = hold up, carry from below</a:t>
+              <a:t>Word Labs  •  wordlabs.app  •  Root: 'support' = hold up, bear, carry</a:t>
             </a:r>
             <a:endParaRPr lang="en-US" sz="800" dirty="0"/>
           </a:p>
@@ -24118,7 +23704,7 @@
                 <a:ea typeface="Trebuchet MS" pitchFamily="34" charset="-122"/>
                 <a:cs typeface="Trebuchet MS" pitchFamily="34" charset="-120"/>
               </a:rPr>
-              <a:t>supportive</a:t>
+              <a:t>supporting</a:t>
             </a:r>
             <a:endParaRPr lang="en-US" sz="2800" dirty="0"/>
           </a:p>
@@ -24806,7 +24392,7 @@
                 <a:ea typeface="Calibri" pitchFamily="34" charset="-122"/>
                 <a:cs typeface="Calibri" pitchFamily="34" charset="-120"/>
               </a:rPr>
-              <a:t>Word Labs  •  wordlabs.app  •  Root: 'support' = hold up, carry from below</a:t>
+              <a:t>Word Labs  •  wordlabs.app  •  Root: 'support' = hold up, bear, carry</a:t>
             </a:r>
             <a:endParaRPr lang="en-US" sz="800" dirty="0"/>
           </a:p>
@@ -24945,7 +24531,7 @@
                 <a:ea typeface="Trebuchet MS" pitchFamily="34" charset="-122"/>
                 <a:cs typeface="Trebuchet MS" pitchFamily="34" charset="-120"/>
               </a:rPr>
-              <a:t>supportive</a:t>
+              <a:t>supporting</a:t>
             </a:r>
             <a:endParaRPr lang="en-US" sz="2800" dirty="0"/>
           </a:p>
@@ -25123,7 +24709,7 @@
                 <a:ea typeface="Calibri" pitchFamily="34" charset="-122"/>
                 <a:cs typeface="Calibri" pitchFamily="34" charset="-120"/>
               </a:rPr>
-              <a:t>hold up, back someone</a:t>
+              <a:t>hold up, help</a:t>
             </a:r>
             <a:endParaRPr lang="en-US" sz="850" dirty="0"/>
           </a:p>
@@ -25196,7 +24782,7 @@
                 <a:ea typeface="Trebuchet MS" pitchFamily="34" charset="-122"/>
                 <a:cs typeface="Trebuchet MS" pitchFamily="34" charset="-120"/>
               </a:rPr>
-              <a:t>ive</a:t>
+              <a:t>ing</a:t>
             </a:r>
             <a:endParaRPr lang="en-US" sz="1300" dirty="0"/>
           </a:p>
@@ -25235,7 +24821,7 @@
                 <a:ea typeface="Calibri" pitchFamily="34" charset="-122"/>
                 <a:cs typeface="Calibri" pitchFamily="34" charset="-120"/>
               </a:rPr>
-              <a:t>having the quality of</a:t>
+              <a:t>happening now</a:t>
             </a:r>
             <a:endParaRPr lang="en-US" sz="850" dirty="0"/>
           </a:p>
@@ -25791,7 +25377,7 @@
                 <a:ea typeface="Calibri" pitchFamily="34" charset="-122"/>
                 <a:cs typeface="Calibri" pitchFamily="34" charset="-120"/>
               </a:rPr>
-              <a:t>Word Labs  •  wordlabs.app  •  Root: 'support' = hold up, carry from below</a:t>
+              <a:t>Word Labs  •  wordlabs.app  •  Root: 'support' = hold up, bear, carry</a:t>
             </a:r>
             <a:endParaRPr lang="en-US" sz="800" dirty="0"/>
           </a:p>
@@ -25864,7 +25450,7 @@
                 <a:ea typeface="Trebuchet MS" pitchFamily="34" charset="-122"/>
                 <a:cs typeface="Trebuchet MS" pitchFamily="34" charset="-120"/>
               </a:rPr>
-              <a:t>We are learning that the root 'support' means 'hold up, carry from below'.</a:t>
+              <a:t>We are learning that the root 'support' means 'hold up, bear, carry'.</a:t>
             </a:r>
             <a:endParaRPr lang="en-US" sz="2000" dirty="0"/>
           </a:p>
@@ -26510,7 +26096,7 @@
                 <a:ea typeface="Calibri" pitchFamily="34" charset="-122"/>
                 <a:cs typeface="Calibri" pitchFamily="34" charset="-120"/>
               </a:rPr>
-              <a:t>Word Labs  •  wordlabs.app  •  Root: 'support' = hold up, carry from below</a:t>
+              <a:t>Word Labs  •  wordlabs.app  •  Root: 'support' = hold up, bear, carry</a:t>
             </a:r>
             <a:endParaRPr lang="en-US" sz="800" dirty="0"/>
           </a:p>
@@ -26649,7 +26235,7 @@
                 <a:ea typeface="Trebuchet MS" pitchFamily="34" charset="-122"/>
                 <a:cs typeface="Trebuchet MS" pitchFamily="34" charset="-120"/>
               </a:rPr>
-              <a:t>supportive</a:t>
+              <a:t>supporting</a:t>
             </a:r>
             <a:endParaRPr lang="en-US" sz="2800" dirty="0"/>
           </a:p>
@@ -26827,7 +26413,7 @@
                 <a:ea typeface="Calibri" pitchFamily="34" charset="-122"/>
                 <a:cs typeface="Calibri" pitchFamily="34" charset="-120"/>
               </a:rPr>
-              <a:t>hold up, back someone</a:t>
+              <a:t>hold up, help</a:t>
             </a:r>
             <a:endParaRPr lang="en-US" sz="850" dirty="0"/>
           </a:p>
@@ -26900,7 +26486,7 @@
                 <a:ea typeface="Trebuchet MS" pitchFamily="34" charset="-122"/>
                 <a:cs typeface="Trebuchet MS" pitchFamily="34" charset="-120"/>
               </a:rPr>
-              <a:t>ive</a:t>
+              <a:t>ing</a:t>
             </a:r>
             <a:endParaRPr lang="en-US" sz="1300" dirty="0"/>
           </a:p>
@@ -26939,7 +26525,7 @@
                 <a:ea typeface="Calibri" pitchFamily="34" charset="-122"/>
                 <a:cs typeface="Calibri" pitchFamily="34" charset="-120"/>
               </a:rPr>
-              <a:t>having the quality of</a:t>
+              <a:t>happening now</a:t>
             </a:r>
             <a:endParaRPr lang="en-US" sz="850" dirty="0"/>
           </a:p>
@@ -27308,7 +26894,7 @@
                 <a:ea typeface="Trebuchet MS" pitchFamily="34" charset="-122"/>
                 <a:cs typeface="Trebuchet MS" pitchFamily="34" charset="-120"/>
               </a:rPr>
-              <a:t>ive</a:t>
+              <a:t>ing</a:t>
             </a:r>
             <a:endParaRPr lang="en-US" sz="1400" dirty="0"/>
           </a:p>
@@ -27732,7 +27318,7 @@
                 <a:ea typeface="Calibri" pitchFamily="34" charset="-122"/>
                 <a:cs typeface="Calibri" pitchFamily="34" charset="-120"/>
               </a:rPr>
-              <a:t>Word Labs  •  wordlabs.app  •  Root: 'support' = hold up, carry from below</a:t>
+              <a:t>Word Labs  •  wordlabs.app  •  Root: 'support' = hold up, bear, carry</a:t>
             </a:r>
             <a:endParaRPr lang="en-US" sz="800" dirty="0"/>
           </a:p>
@@ -27871,7 +27457,7 @@
                 <a:ea typeface="Trebuchet MS" pitchFamily="34" charset="-122"/>
                 <a:cs typeface="Trebuchet MS" pitchFamily="34" charset="-120"/>
               </a:rPr>
-              <a:t>supportive</a:t>
+              <a:t>supporting</a:t>
             </a:r>
             <a:endParaRPr lang="en-US" sz="2800" dirty="0"/>
           </a:p>
@@ -28049,7 +27635,7 @@
                 <a:ea typeface="Calibri" pitchFamily="34" charset="-122"/>
                 <a:cs typeface="Calibri" pitchFamily="34" charset="-120"/>
               </a:rPr>
-              <a:t>hold up, back someone</a:t>
+              <a:t>hold up, help</a:t>
             </a:r>
             <a:endParaRPr lang="en-US" sz="850" dirty="0"/>
           </a:p>
@@ -28122,7 +27708,7 @@
                 <a:ea typeface="Trebuchet MS" pitchFamily="34" charset="-122"/>
                 <a:cs typeface="Trebuchet MS" pitchFamily="34" charset="-120"/>
               </a:rPr>
-              <a:t>ive</a:t>
+              <a:t>ing</a:t>
             </a:r>
             <a:endParaRPr lang="en-US" sz="1300" dirty="0"/>
           </a:p>
@@ -28161,7 +27747,7 @@
                 <a:ea typeface="Calibri" pitchFamily="34" charset="-122"/>
                 <a:cs typeface="Calibri" pitchFamily="34" charset="-120"/>
               </a:rPr>
-              <a:t>having the quality of</a:t>
+              <a:t>happening now</a:t>
             </a:r>
             <a:endParaRPr lang="en-US" sz="850" dirty="0"/>
           </a:p>
@@ -28530,7 +28116,7 @@
                 <a:ea typeface="Trebuchet MS" pitchFamily="34" charset="-122"/>
                 <a:cs typeface="Trebuchet MS" pitchFamily="34" charset="-120"/>
               </a:rPr>
-              <a:t>ive</a:t>
+              <a:t>ing</a:t>
             </a:r>
             <a:endParaRPr lang="en-US" sz="1400" dirty="0"/>
           </a:p>
@@ -28611,11 +28197,11 @@
         <p:spPr>
           <a:xfrm>
             <a:off x="1874520" y="4096512"/>
-            <a:ext cx="6903720" cy="804672"/>
+            <a:ext cx="6903720" cy="658368"/>
           </a:xfrm>
           <a:prstGeom prst="rect">
             <a:avLst>
-              <a:gd name="adj" fmla="val 6818"/>
+              <a:gd name="adj" fmla="val 8333"/>
             </a:avLst>
           </a:prstGeom>
           <a:solidFill>
@@ -28638,11 +28224,11 @@
         <p:spPr>
           <a:xfrm>
             <a:off x="2124837" y="4169664"/>
-            <a:ext cx="685800" cy="384048"/>
+            <a:ext cx="685800" cy="475488"/>
           </a:xfrm>
           <a:prstGeom prst="rect">
             <a:avLst>
-              <a:gd name="adj" fmla="val 9524"/>
+              <a:gd name="adj" fmla="val 7692"/>
             </a:avLst>
           </a:prstGeom>
           <a:solidFill>
@@ -28665,7 +28251,7 @@
         <p:spPr>
           <a:xfrm>
             <a:off x="2124837" y="4169664"/>
-            <a:ext cx="685800" cy="384048"/>
+            <a:ext cx="685800" cy="475488"/>
           </a:xfrm>
           <a:prstGeom prst="rect">
             <a:avLst/>
@@ -28704,11 +28290,11 @@
         <p:spPr>
           <a:xfrm>
             <a:off x="3033522" y="4169664"/>
-            <a:ext cx="685800" cy="384048"/>
+            <a:ext cx="685800" cy="475488"/>
           </a:xfrm>
           <a:prstGeom prst="rect">
             <a:avLst>
-              <a:gd name="adj" fmla="val 9524"/>
+              <a:gd name="adj" fmla="val 7692"/>
             </a:avLst>
           </a:prstGeom>
           <a:solidFill>
@@ -28731,7 +28317,7 @@
         <p:spPr>
           <a:xfrm>
             <a:off x="3033522" y="4169664"/>
-            <a:ext cx="685800" cy="384048"/>
+            <a:ext cx="685800" cy="475488"/>
           </a:xfrm>
           <a:prstGeom prst="rect">
             <a:avLst/>
@@ -28770,11 +28356,11 @@
         <p:spPr>
           <a:xfrm>
             <a:off x="3942207" y="4169664"/>
-            <a:ext cx="685800" cy="384048"/>
+            <a:ext cx="685800" cy="475488"/>
           </a:xfrm>
           <a:prstGeom prst="rect">
             <a:avLst>
-              <a:gd name="adj" fmla="val 9524"/>
+              <a:gd name="adj" fmla="val 7692"/>
             </a:avLst>
           </a:prstGeom>
           <a:solidFill>
@@ -28797,7 +28383,7 @@
         <p:spPr>
           <a:xfrm>
             <a:off x="3942207" y="4169664"/>
-            <a:ext cx="685800" cy="384048"/>
+            <a:ext cx="685800" cy="475488"/>
           </a:xfrm>
           <a:prstGeom prst="rect">
             <a:avLst/>
@@ -28836,11 +28422,11 @@
         <p:spPr>
           <a:xfrm>
             <a:off x="4850892" y="4169664"/>
-            <a:ext cx="685800" cy="384048"/>
+            <a:ext cx="685800" cy="475488"/>
           </a:xfrm>
           <a:prstGeom prst="rect">
             <a:avLst>
-              <a:gd name="adj" fmla="val 9524"/>
+              <a:gd name="adj" fmla="val 7692"/>
             </a:avLst>
           </a:prstGeom>
           <a:solidFill>
@@ -28863,7 +28449,7 @@
         <p:spPr>
           <a:xfrm>
             <a:off x="4850892" y="4169664"/>
-            <a:ext cx="685800" cy="384048"/>
+            <a:ext cx="685800" cy="475488"/>
           </a:xfrm>
           <a:prstGeom prst="rect">
             <a:avLst/>
@@ -28902,11 +28488,11 @@
         <p:spPr>
           <a:xfrm>
             <a:off x="5759577" y="4169664"/>
-            <a:ext cx="685800" cy="384048"/>
+            <a:ext cx="685800" cy="475488"/>
           </a:xfrm>
           <a:prstGeom prst="rect">
             <a:avLst>
-              <a:gd name="adj" fmla="val 9524"/>
+              <a:gd name="adj" fmla="val 7692"/>
             </a:avLst>
           </a:prstGeom>
           <a:solidFill>
@@ -28929,7 +28515,7 @@
         <p:spPr>
           <a:xfrm>
             <a:off x="5759577" y="4169664"/>
-            <a:ext cx="685800" cy="384048"/>
+            <a:ext cx="685800" cy="475488"/>
           </a:xfrm>
           <a:prstGeom prst="rect">
             <a:avLst/>
@@ -28968,11 +28554,11 @@
         <p:spPr>
           <a:xfrm>
             <a:off x="6668262" y="4169664"/>
-            <a:ext cx="685800" cy="384048"/>
+            <a:ext cx="685800" cy="475488"/>
           </a:xfrm>
           <a:prstGeom prst="rect">
             <a:avLst>
-              <a:gd name="adj" fmla="val 9524"/>
+              <a:gd name="adj" fmla="val 7692"/>
             </a:avLst>
           </a:prstGeom>
           <a:solidFill>
@@ -28995,7 +28581,7 @@
         <p:spPr>
           <a:xfrm>
             <a:off x="6668262" y="4169664"/>
-            <a:ext cx="685800" cy="384048"/>
+            <a:ext cx="685800" cy="475488"/>
           </a:xfrm>
           <a:prstGeom prst="rect">
             <a:avLst/>
@@ -29034,11 +28620,11 @@
         <p:spPr>
           <a:xfrm>
             <a:off x="7576947" y="4169664"/>
-            <a:ext cx="685800" cy="384048"/>
+            <a:ext cx="685800" cy="475488"/>
           </a:xfrm>
           <a:prstGeom prst="rect">
             <a:avLst>
-              <a:gd name="adj" fmla="val 9524"/>
+              <a:gd name="adj" fmla="val 7692"/>
             </a:avLst>
           </a:prstGeom>
           <a:solidFill>
@@ -29061,7 +28647,7 @@
         <p:spPr>
           <a:xfrm>
             <a:off x="7576947" y="4169664"/>
-            <a:ext cx="685800" cy="384048"/>
+            <a:ext cx="685800" cy="475488"/>
           </a:xfrm>
           <a:prstGeom prst="rect">
             <a:avLst/>
@@ -29085,48 +28671,9 @@
                 <a:ea typeface="Trebuchet MS" pitchFamily="34" charset="-122"/>
                 <a:cs typeface="Trebuchet MS" pitchFamily="34" charset="-120"/>
               </a:rPr>
-              <a:t>ve</a:t>
+              <a:t>ng</a:t>
             </a:r>
             <a:endParaRPr lang="en-US" sz="900" dirty="0"/>
-          </a:p>
-        </p:txBody>
-      </p:sp>
-      <p:sp>
-        <p:nvSpPr>
-          <p:cNvPr id="50" name="Text 48"/>
-          <p:cNvSpPr/>
-          <p:nvPr/>
-        </p:nvSpPr>
-        <p:spPr>
-          <a:xfrm>
-            <a:off x="7576947" y="4572000"/>
-            <a:ext cx="685800" cy="219456"/>
-          </a:xfrm>
-          <a:prstGeom prst="rect">
-            <a:avLst/>
-          </a:prstGeom>
-          <a:noFill/>
-          <a:ln/>
-        </p:spPr>
-        <p:txBody>
-          <a:bodyPr wrap="square" lIns="0" tIns="0" rIns="0" bIns="0" rtlCol="0" anchor="t"/>
-          <a:lstStyle/>
-          <a:p>
-            <a:pPr algn="ctr" indent="0" marL="0">
-              <a:buNone/>
-            </a:pPr>
-            <a:r>
-              <a:rPr lang="en-US" sz="750" i="1" dirty="0">
-                <a:solidFill>
-                  <a:srgbClr val="94A3B8"/>
-                </a:solidFill>
-                <a:latin typeface="Calibri" pitchFamily="34" charset="0"/>
-                <a:ea typeface="Calibri" pitchFamily="34" charset="-122"/>
-                <a:cs typeface="Calibri" pitchFamily="34" charset="-120"/>
-              </a:rPr>
-              <a:t>/v/</a:t>
-            </a:r>
-            <a:endParaRPr lang="en-US" sz="750" dirty="0"/>
           </a:p>
         </p:txBody>
       </p:sp>
@@ -29416,7 +28963,7 @@
                 <a:ea typeface="Calibri" pitchFamily="34" charset="-122"/>
                 <a:cs typeface="Calibri" pitchFamily="34" charset="-120"/>
               </a:rPr>
-              <a:t>Word Labs  •  wordlabs.app  •  Root: 'support' = hold up, carry from below</a:t>
+              <a:t>Word Labs  •  wordlabs.app  •  Root: 'support' = hold up, bear, carry</a:t>
             </a:r>
             <a:endParaRPr lang="en-US" sz="800" dirty="0"/>
           </a:p>
@@ -29555,7 +29102,7 @@
                 <a:ea typeface="Trebuchet MS" pitchFamily="34" charset="-122"/>
                 <a:cs typeface="Trebuchet MS" pitchFamily="34" charset="-120"/>
               </a:rPr>
-              <a:t>supporters</a:t>
+              <a:t>supportable</a:t>
             </a:r>
             <a:endParaRPr lang="en-US" sz="2800" dirty="0"/>
           </a:p>
@@ -30243,7 +29790,7 @@
                 <a:ea typeface="Calibri" pitchFamily="34" charset="-122"/>
                 <a:cs typeface="Calibri" pitchFamily="34" charset="-120"/>
               </a:rPr>
-              <a:t>Word Labs  •  wordlabs.app  •  Root: 'support' = hold up, carry from below</a:t>
+              <a:t>Word Labs  •  wordlabs.app  •  Root: 'support' = hold up, bear, carry</a:t>
             </a:r>
             <a:endParaRPr lang="en-US" sz="800" dirty="0"/>
           </a:p>
@@ -30382,7 +29929,7 @@
                 <a:ea typeface="Trebuchet MS" pitchFamily="34" charset="-122"/>
                 <a:cs typeface="Trebuchet MS" pitchFamily="34" charset="-120"/>
               </a:rPr>
-              <a:t>supporters</a:t>
+              <a:t>supportable</a:t>
             </a:r>
             <a:endParaRPr lang="en-US" sz="2800" dirty="0"/>
           </a:p>
@@ -30462,7 +30009,7 @@
         </p:nvSpPr>
         <p:spPr>
           <a:xfrm>
-            <a:off x="2221992" y="2258568"/>
+            <a:off x="2938272" y="2258568"/>
             <a:ext cx="1828800" cy="292608"/>
           </a:xfrm>
           <a:prstGeom prst="rect">
@@ -30496,7 +30043,7 @@
         </p:nvSpPr>
         <p:spPr>
           <a:xfrm>
-            <a:off x="2221992" y="2258568"/>
+            <a:off x="2938272" y="2258568"/>
             <a:ext cx="1828800" cy="292608"/>
           </a:xfrm>
           <a:prstGeom prst="rect">
@@ -30535,7 +30082,7 @@
         </p:nvSpPr>
         <p:spPr>
           <a:xfrm>
-            <a:off x="2221992" y="2569464"/>
+            <a:off x="2938272" y="2569464"/>
             <a:ext cx="1828800" cy="201168"/>
           </a:xfrm>
           <a:prstGeom prst="rect">
@@ -30560,7 +30107,7 @@
                 <a:ea typeface="Calibri" pitchFamily="34" charset="-122"/>
                 <a:cs typeface="Calibri" pitchFamily="34" charset="-120"/>
               </a:rPr>
-              <a:t>hold up, back someone</a:t>
+              <a:t>hold up, help</a:t>
             </a:r>
             <a:endParaRPr lang="en-US" sz="850" dirty="0"/>
           </a:p>
@@ -30574,7 +30121,7 @@
         </p:nvSpPr>
         <p:spPr>
           <a:xfrm>
-            <a:off x="4370832" y="2258568"/>
+            <a:off x="5803392" y="2258568"/>
             <a:ext cx="1828800" cy="292608"/>
           </a:xfrm>
           <a:prstGeom prst="rect">
@@ -30608,7 +30155,7 @@
         </p:nvSpPr>
         <p:spPr>
           <a:xfrm>
-            <a:off x="4370832" y="2258568"/>
+            <a:off x="5803392" y="2258568"/>
             <a:ext cx="1828800" cy="292608"/>
           </a:xfrm>
           <a:prstGeom prst="rect">
@@ -30633,7 +30180,7 @@
                 <a:ea typeface="Trebuchet MS" pitchFamily="34" charset="-122"/>
                 <a:cs typeface="Trebuchet MS" pitchFamily="34" charset="-120"/>
               </a:rPr>
-              <a:t>er</a:t>
+              <a:t>able</a:t>
             </a:r>
             <a:endParaRPr lang="en-US" sz="1300" dirty="0"/>
           </a:p>
@@ -30647,7 +30194,7 @@
         </p:nvSpPr>
         <p:spPr>
           <a:xfrm>
-            <a:off x="4370832" y="2569464"/>
+            <a:off x="5803392" y="2569464"/>
             <a:ext cx="1828800" cy="201168"/>
           </a:xfrm>
           <a:prstGeom prst="rect">
@@ -30672,7 +30219,7 @@
                 <a:ea typeface="Calibri" pitchFamily="34" charset="-122"/>
                 <a:cs typeface="Calibri" pitchFamily="34" charset="-120"/>
               </a:rPr>
-              <a:t>a person who does</a:t>
+              <a:t>able to be</a:t>
             </a:r>
             <a:endParaRPr lang="en-US" sz="850" dirty="0"/>
           </a:p>
@@ -30686,30 +30233,23 @@
         </p:nvSpPr>
         <p:spPr>
           <a:xfrm>
-            <a:off x="6519672" y="2258568"/>
-            <a:ext cx="1828800" cy="292608"/>
+            <a:off x="365760" y="3273552"/>
+            <a:ext cx="1371600" cy="658368"/>
           </a:xfrm>
           <a:prstGeom prst="rect">
             <a:avLst>
-              <a:gd name="adj" fmla="val 25000"/>
+              <a:gd name="adj" fmla="val 8333"/>
             </a:avLst>
           </a:prstGeom>
           <a:solidFill>
-            <a:srgbClr val="FCE7F3"/>
-          </a:solidFill>
-          <a:ln w="19050">
-            <a:solidFill>
-              <a:srgbClr val="DB2777"/>
-            </a:solidFill>
-            <a:prstDash val="solid"/>
-          </a:ln>
-          <a:effectLst>
-            <a:outerShdw sx="100000" sy="100000" kx="0" ky="0" algn="bl" rotWithShape="0" blurRad="101600" dist="38100" dir="8100000">
-              <a:srgbClr val="000000">
-                <a:alpha val="12000"/>
-              </a:srgbClr>
-            </a:outerShdw>
-          </a:effectLst>
+            <a:srgbClr val="E2E8F0"/>
+          </a:solidFill>
+          <a:ln w="12700">
+            <a:solidFill>
+              <a:srgbClr val="E2E8F0"/>
+            </a:solidFill>
+            <a:prstDash val="solid"/>
+          </a:ln>
         </p:spPr>
       </p:sp>
       <p:sp>
@@ -30720,90 +30260,117 @@
         </p:nvSpPr>
         <p:spPr>
           <a:xfrm>
-            <a:off x="6519672" y="2258568"/>
-            <a:ext cx="1828800" cy="292608"/>
-          </a:xfrm>
-          <a:prstGeom prst="rect">
-            <a:avLst/>
-          </a:prstGeom>
-          <a:noFill/>
-          <a:ln/>
-        </p:spPr>
-        <p:txBody>
-          <a:bodyPr wrap="square" lIns="0" tIns="0" rIns="0" bIns="0" rtlCol="0" anchor="ctr"/>
-          <a:lstStyle/>
-          <a:p>
-            <a:pPr algn="ctr" indent="0" marL="0">
-              <a:buNone/>
-            </a:pPr>
-            <a:r>
-              <a:rPr lang="en-US" sz="1300" b="1" dirty="0">
-                <a:solidFill>
-                  <a:srgbClr val="9D174D"/>
+            <a:off x="365760" y="3273552"/>
+            <a:ext cx="1371600" cy="658368"/>
+          </a:xfrm>
+          <a:prstGeom prst="rect">
+            <a:avLst/>
+          </a:prstGeom>
+          <a:noFill/>
+          <a:ln/>
+        </p:spPr>
+        <p:txBody>
+          <a:bodyPr wrap="square" lIns="0" tIns="0" rIns="0" bIns="0" rtlCol="0" anchor="ctr"/>
+          <a:lstStyle/>
+          <a:p>
+            <a:pPr algn="ctr" indent="0" marL="0">
+              <a:buNone/>
+            </a:pPr>
+            <a:r>
+              <a:rPr lang="en-US" sz="1100" b="1" dirty="0">
+                <a:solidFill>
+                  <a:srgbClr val="475569"/>
                 </a:solidFill>
                 <a:latin typeface="Trebuchet MS" pitchFamily="34" charset="0"/>
                 <a:ea typeface="Trebuchet MS" pitchFamily="34" charset="-122"/>
                 <a:cs typeface="Trebuchet MS" pitchFamily="34" charset="-120"/>
               </a:rPr>
-              <a:t>s</a:t>
-            </a:r>
-            <a:endParaRPr lang="en-US" sz="1300" dirty="0"/>
-          </a:p>
-        </p:txBody>
-      </p:sp>
-      <p:sp>
-        <p:nvSpPr>
-          <p:cNvPr id="24" name="Text 22"/>
-          <p:cNvSpPr/>
-          <p:nvPr/>
-        </p:nvSpPr>
-        <p:spPr>
-          <a:xfrm>
-            <a:off x="6519672" y="2569464"/>
-            <a:ext cx="1828800" cy="201168"/>
-          </a:xfrm>
-          <a:prstGeom prst="rect">
-            <a:avLst/>
-          </a:prstGeom>
-          <a:noFill/>
-          <a:ln/>
-        </p:spPr>
-        <p:txBody>
-          <a:bodyPr wrap="square" lIns="0" tIns="0" rIns="0" bIns="0" rtlCol="0" anchor="t"/>
-          <a:lstStyle/>
-          <a:p>
-            <a:pPr algn="ctr" indent="0" marL="0">
-              <a:buNone/>
-            </a:pPr>
-            <a:r>
-              <a:rPr lang="en-US" sz="850" dirty="0">
-                <a:solidFill>
-                  <a:srgbClr val="475569"/>
+              <a:t>Syllables</a:t>
+            </a:r>
+            <a:endParaRPr lang="en-US" sz="1100" dirty="0"/>
+          </a:p>
+        </p:txBody>
+      </p:sp>
+      <p:sp>
+        <p:nvSpPr>
+          <p:cNvPr id="24" name="Shape 22"/>
+          <p:cNvSpPr/>
+          <p:nvPr/>
+        </p:nvSpPr>
+        <p:spPr>
+          <a:xfrm>
+            <a:off x="1874520" y="3273552"/>
+            <a:ext cx="6903720" cy="658368"/>
+          </a:xfrm>
+          <a:prstGeom prst="rect">
+            <a:avLst>
+              <a:gd name="adj" fmla="val 8333"/>
+            </a:avLst>
+          </a:prstGeom>
+          <a:solidFill>
+            <a:srgbClr val="F8FAFC"/>
+          </a:solidFill>
+          <a:ln w="12700">
+            <a:solidFill>
+              <a:srgbClr val="E2E8F0"/>
+            </a:solidFill>
+            <a:prstDash val="dash"/>
+          </a:ln>
+        </p:spPr>
+      </p:sp>
+      <p:sp>
+        <p:nvSpPr>
+          <p:cNvPr id="25" name="Text 23"/>
+          <p:cNvSpPr/>
+          <p:nvPr/>
+        </p:nvSpPr>
+        <p:spPr>
+          <a:xfrm>
+            <a:off x="1874520" y="3273552"/>
+            <a:ext cx="6903720" cy="658368"/>
+          </a:xfrm>
+          <a:prstGeom prst="rect">
+            <a:avLst/>
+          </a:prstGeom>
+          <a:noFill/>
+          <a:ln/>
+        </p:spPr>
+        <p:txBody>
+          <a:bodyPr wrap="square" rtlCol="0" anchor="ctr"/>
+          <a:lstStyle/>
+          <a:p>
+            <a:pPr algn="ctr" indent="0" marL="0">
+              <a:buNone/>
+            </a:pPr>
+            <a:r>
+              <a:rPr lang="en-US" sz="1100" i="1" dirty="0">
+                <a:solidFill>
+                  <a:srgbClr val="CBD5E1"/>
                 </a:solidFill>
                 <a:latin typeface="Calibri" pitchFamily="34" charset="0"/>
                 <a:ea typeface="Calibri" pitchFamily="34" charset="-122"/>
                 <a:cs typeface="Calibri" pitchFamily="34" charset="-120"/>
               </a:rPr>
-              <a:t>more than one</a:t>
-            </a:r>
-            <a:endParaRPr lang="en-US" sz="850" dirty="0"/>
-          </a:p>
-        </p:txBody>
-      </p:sp>
-      <p:sp>
-        <p:nvSpPr>
-          <p:cNvPr id="25" name="Shape 23"/>
-          <p:cNvSpPr/>
-          <p:nvPr/>
-        </p:nvSpPr>
-        <p:spPr>
-          <a:xfrm>
-            <a:off x="365760" y="3273552"/>
-            <a:ext cx="1371600" cy="658368"/>
+              <a:t>Write here...</a:t>
+            </a:r>
+            <a:endParaRPr lang="en-US" sz="1100" dirty="0"/>
+          </a:p>
+        </p:txBody>
+      </p:sp>
+      <p:sp>
+        <p:nvSpPr>
+          <p:cNvPr id="26" name="Shape 24"/>
+          <p:cNvSpPr/>
+          <p:nvPr/>
+        </p:nvSpPr>
+        <p:spPr>
+          <a:xfrm>
+            <a:off x="365760" y="4096512"/>
+            <a:ext cx="1371600" cy="804672"/>
           </a:xfrm>
           <a:prstGeom prst="rect">
             <a:avLst>
-              <a:gd name="adj" fmla="val 8333"/>
+              <a:gd name="adj" fmla="val 6818"/>
             </a:avLst>
           </a:prstGeom>
           <a:solidFill>
@@ -30819,14 +30386,14 @@
       </p:sp>
       <p:sp>
         <p:nvSpPr>
-          <p:cNvPr id="26" name="Text 24"/>
-          <p:cNvSpPr/>
-          <p:nvPr/>
-        </p:nvSpPr>
-        <p:spPr>
-          <a:xfrm>
-            <a:off x="365760" y="3273552"/>
-            <a:ext cx="1371600" cy="658368"/>
+          <p:cNvPr id="27" name="Text 25"/>
+          <p:cNvSpPr/>
+          <p:nvPr/>
+        </p:nvSpPr>
+        <p:spPr>
+          <a:xfrm>
+            <a:off x="365760" y="4096512"/>
+            <a:ext cx="1371600" cy="804672"/>
           </a:xfrm>
           <a:prstGeom prst="rect">
             <a:avLst/>
@@ -30850,7 +30417,7 @@
                 <a:ea typeface="Trebuchet MS" pitchFamily="34" charset="-122"/>
                 <a:cs typeface="Trebuchet MS" pitchFamily="34" charset="-120"/>
               </a:rPr>
-              <a:t>Syllables</a:t>
+              <a:t>Phonemes</a:t>
             </a:r>
             <a:endParaRPr lang="en-US" sz="1100" dirty="0"/>
           </a:p>
@@ -30858,80 +30425,14 @@
       </p:sp>
       <p:sp>
         <p:nvSpPr>
-          <p:cNvPr id="27" name="Shape 25"/>
-          <p:cNvSpPr/>
-          <p:nvPr/>
-        </p:nvSpPr>
-        <p:spPr>
-          <a:xfrm>
-            <a:off x="1874520" y="3273552"/>
-            <a:ext cx="6903720" cy="658368"/>
-          </a:xfrm>
-          <a:prstGeom prst="rect">
-            <a:avLst>
-              <a:gd name="adj" fmla="val 8333"/>
-            </a:avLst>
-          </a:prstGeom>
-          <a:solidFill>
-            <a:srgbClr val="F8FAFC"/>
-          </a:solidFill>
-          <a:ln w="12700">
-            <a:solidFill>
-              <a:srgbClr val="E2E8F0"/>
-            </a:solidFill>
-            <a:prstDash val="dash"/>
-          </a:ln>
-        </p:spPr>
-      </p:sp>
-      <p:sp>
-        <p:nvSpPr>
-          <p:cNvPr id="28" name="Text 26"/>
-          <p:cNvSpPr/>
-          <p:nvPr/>
-        </p:nvSpPr>
-        <p:spPr>
-          <a:xfrm>
-            <a:off x="1874520" y="3273552"/>
-            <a:ext cx="6903720" cy="658368"/>
-          </a:xfrm>
-          <a:prstGeom prst="rect">
-            <a:avLst/>
-          </a:prstGeom>
-          <a:noFill/>
-          <a:ln/>
-        </p:spPr>
-        <p:txBody>
-          <a:bodyPr wrap="square" rtlCol="0" anchor="ctr"/>
-          <a:lstStyle/>
-          <a:p>
-            <a:pPr algn="ctr" indent="0" marL="0">
-              <a:buNone/>
-            </a:pPr>
-            <a:r>
-              <a:rPr lang="en-US" sz="1100" i="1" dirty="0">
-                <a:solidFill>
-                  <a:srgbClr val="CBD5E1"/>
-                </a:solidFill>
-                <a:latin typeface="Calibri" pitchFamily="34" charset="0"/>
-                <a:ea typeface="Calibri" pitchFamily="34" charset="-122"/>
-                <a:cs typeface="Calibri" pitchFamily="34" charset="-120"/>
-              </a:rPr>
-              <a:t>Write here...</a:t>
-            </a:r>
-            <a:endParaRPr lang="en-US" sz="1100" dirty="0"/>
-          </a:p>
-        </p:txBody>
-      </p:sp>
-      <p:sp>
-        <p:nvSpPr>
-          <p:cNvPr id="29" name="Shape 27"/>
-          <p:cNvSpPr/>
-          <p:nvPr/>
-        </p:nvSpPr>
-        <p:spPr>
-          <a:xfrm>
-            <a:off x="365760" y="4096512"/>
-            <a:ext cx="1371600" cy="804672"/>
+          <p:cNvPr id="28" name="Shape 26"/>
+          <p:cNvSpPr/>
+          <p:nvPr/>
+        </p:nvSpPr>
+        <p:spPr>
+          <a:xfrm>
+            <a:off x="1874520" y="4096512"/>
+            <a:ext cx="6903720" cy="804672"/>
           </a:xfrm>
           <a:prstGeom prst="rect">
             <a:avLst>
@@ -30939,85 +30440,19 @@
             </a:avLst>
           </a:prstGeom>
           <a:solidFill>
-            <a:srgbClr val="E2E8F0"/>
+            <a:srgbClr val="F8FAFC"/>
           </a:solidFill>
           <a:ln w="12700">
             <a:solidFill>
               <a:srgbClr val="E2E8F0"/>
             </a:solidFill>
-            <a:prstDash val="solid"/>
-          </a:ln>
-        </p:spPr>
-      </p:sp>
-      <p:sp>
-        <p:nvSpPr>
-          <p:cNvPr id="30" name="Text 28"/>
-          <p:cNvSpPr/>
-          <p:nvPr/>
-        </p:nvSpPr>
-        <p:spPr>
-          <a:xfrm>
-            <a:off x="365760" y="4096512"/>
-            <a:ext cx="1371600" cy="804672"/>
-          </a:xfrm>
-          <a:prstGeom prst="rect">
-            <a:avLst/>
-          </a:prstGeom>
-          <a:noFill/>
-          <a:ln/>
-        </p:spPr>
-        <p:txBody>
-          <a:bodyPr wrap="square" lIns="0" tIns="0" rIns="0" bIns="0" rtlCol="0" anchor="ctr"/>
-          <a:lstStyle/>
-          <a:p>
-            <a:pPr algn="ctr" indent="0" marL="0">
-              <a:buNone/>
-            </a:pPr>
-            <a:r>
-              <a:rPr lang="en-US" sz="1100" b="1" dirty="0">
-                <a:solidFill>
-                  <a:srgbClr val="475569"/>
-                </a:solidFill>
-                <a:latin typeface="Trebuchet MS" pitchFamily="34" charset="0"/>
-                <a:ea typeface="Trebuchet MS" pitchFamily="34" charset="-122"/>
-                <a:cs typeface="Trebuchet MS" pitchFamily="34" charset="-120"/>
-              </a:rPr>
-              <a:t>Phonemes</a:t>
-            </a:r>
-            <a:endParaRPr lang="en-US" sz="1100" dirty="0"/>
-          </a:p>
-        </p:txBody>
-      </p:sp>
-      <p:sp>
-        <p:nvSpPr>
-          <p:cNvPr id="31" name="Shape 29"/>
-          <p:cNvSpPr/>
-          <p:nvPr/>
-        </p:nvSpPr>
-        <p:spPr>
-          <a:xfrm>
-            <a:off x="1874520" y="4096512"/>
-            <a:ext cx="6903720" cy="804672"/>
-          </a:xfrm>
-          <a:prstGeom prst="rect">
-            <a:avLst>
-              <a:gd name="adj" fmla="val 6818"/>
-            </a:avLst>
-          </a:prstGeom>
-          <a:solidFill>
-            <a:srgbClr val="F8FAFC"/>
-          </a:solidFill>
-          <a:ln w="12700">
-            <a:solidFill>
-              <a:srgbClr val="E2E8F0"/>
-            </a:solidFill>
             <a:prstDash val="dash"/>
           </a:ln>
         </p:spPr>
       </p:sp>
       <p:sp>
         <p:nvSpPr>
-          <p:cNvPr id="32" name="Text 30"/>
+          <p:cNvPr id="29" name="Text 27"/>
           <p:cNvSpPr/>
           <p:nvPr/>
         </p:nvSpPr>
@@ -31340,7 +30775,7 @@
                 <a:ea typeface="Calibri" pitchFamily="34" charset="-122"/>
                 <a:cs typeface="Calibri" pitchFamily="34" charset="-120"/>
               </a:rPr>
-              <a:t>Word Labs  •  wordlabs.app  •  Root: 'support' = hold up, carry from below</a:t>
+              <a:t>Word Labs  •  wordlabs.app  •  Root: 'support' = hold up, bear, carry</a:t>
             </a:r>
             <a:endParaRPr lang="en-US" sz="800" dirty="0"/>
           </a:p>
@@ -31479,7 +30914,7 @@
                 <a:ea typeface="Trebuchet MS" pitchFamily="34" charset="-122"/>
                 <a:cs typeface="Trebuchet MS" pitchFamily="34" charset="-120"/>
               </a:rPr>
-              <a:t>supporters</a:t>
+              <a:t>supportable</a:t>
             </a:r>
             <a:endParaRPr lang="en-US" sz="2800" dirty="0"/>
           </a:p>
@@ -31559,7 +30994,7 @@
         </p:nvSpPr>
         <p:spPr>
           <a:xfrm>
-            <a:off x="2221992" y="2258568"/>
+            <a:off x="2938272" y="2258568"/>
             <a:ext cx="1828800" cy="292608"/>
           </a:xfrm>
           <a:prstGeom prst="rect">
@@ -31593,7 +31028,7 @@
         </p:nvSpPr>
         <p:spPr>
           <a:xfrm>
-            <a:off x="2221992" y="2258568"/>
+            <a:off x="2938272" y="2258568"/>
             <a:ext cx="1828800" cy="292608"/>
           </a:xfrm>
           <a:prstGeom prst="rect">
@@ -31632,7 +31067,7 @@
         </p:nvSpPr>
         <p:spPr>
           <a:xfrm>
-            <a:off x="2221992" y="2569464"/>
+            <a:off x="2938272" y="2569464"/>
             <a:ext cx="1828800" cy="201168"/>
           </a:xfrm>
           <a:prstGeom prst="rect">
@@ -31657,7 +31092,7 @@
                 <a:ea typeface="Calibri" pitchFamily="34" charset="-122"/>
                 <a:cs typeface="Calibri" pitchFamily="34" charset="-120"/>
               </a:rPr>
-              <a:t>hold up, back someone</a:t>
+              <a:t>hold up, help</a:t>
             </a:r>
             <a:endParaRPr lang="en-US" sz="850" dirty="0"/>
           </a:p>
@@ -31671,7 +31106,7 @@
         </p:nvSpPr>
         <p:spPr>
           <a:xfrm>
-            <a:off x="4370832" y="2258568"/>
+            <a:off x="5803392" y="2258568"/>
             <a:ext cx="1828800" cy="292608"/>
           </a:xfrm>
           <a:prstGeom prst="rect">
@@ -31705,7 +31140,7 @@
         </p:nvSpPr>
         <p:spPr>
           <a:xfrm>
-            <a:off x="4370832" y="2258568"/>
+            <a:off x="5803392" y="2258568"/>
             <a:ext cx="1828800" cy="292608"/>
           </a:xfrm>
           <a:prstGeom prst="rect">
@@ -31730,7 +31165,7 @@
                 <a:ea typeface="Trebuchet MS" pitchFamily="34" charset="-122"/>
                 <a:cs typeface="Trebuchet MS" pitchFamily="34" charset="-120"/>
               </a:rPr>
-              <a:t>er</a:t>
+              <a:t>able</a:t>
             </a:r>
             <a:endParaRPr lang="en-US" sz="1300" dirty="0"/>
           </a:p>
@@ -31744,7 +31179,7 @@
         </p:nvSpPr>
         <p:spPr>
           <a:xfrm>
-            <a:off x="4370832" y="2569464"/>
+            <a:off x="5803392" y="2569464"/>
             <a:ext cx="1828800" cy="201168"/>
           </a:xfrm>
           <a:prstGeom prst="rect">
@@ -31769,7 +31204,7 @@
                 <a:ea typeface="Calibri" pitchFamily="34" charset="-122"/>
                 <a:cs typeface="Calibri" pitchFamily="34" charset="-120"/>
               </a:rPr>
-              <a:t>a person who does</a:t>
+              <a:t>able to be</a:t>
             </a:r>
             <a:endParaRPr lang="en-US" sz="850" dirty="0"/>
           </a:p>
@@ -31783,30 +31218,23 @@
         </p:nvSpPr>
         <p:spPr>
           <a:xfrm>
-            <a:off x="6519672" y="2258568"/>
-            <a:ext cx="1828800" cy="292608"/>
+            <a:off x="365760" y="3273552"/>
+            <a:ext cx="1371600" cy="658368"/>
           </a:xfrm>
           <a:prstGeom prst="rect">
             <a:avLst>
-              <a:gd name="adj" fmla="val 25000"/>
+              <a:gd name="adj" fmla="val 8333"/>
             </a:avLst>
           </a:prstGeom>
           <a:solidFill>
-            <a:srgbClr val="FCE7F3"/>
-          </a:solidFill>
-          <a:ln w="19050">
-            <a:solidFill>
-              <a:srgbClr val="DB2777"/>
-            </a:solidFill>
-            <a:prstDash val="solid"/>
-          </a:ln>
-          <a:effectLst>
-            <a:outerShdw sx="100000" sy="100000" kx="0" ky="0" algn="bl" rotWithShape="0" blurRad="101600" dist="38100" dir="8100000">
-              <a:srgbClr val="000000">
-                <a:alpha val="12000"/>
-              </a:srgbClr>
-            </a:outerShdw>
-          </a:effectLst>
+            <a:srgbClr val="E2E8F0"/>
+          </a:solidFill>
+          <a:ln w="12700">
+            <a:solidFill>
+              <a:srgbClr val="E2E8F0"/>
+            </a:solidFill>
+            <a:prstDash val="solid"/>
+          </a:ln>
         </p:spPr>
       </p:sp>
       <p:sp>
@@ -31817,86 +31245,47 @@
         </p:nvSpPr>
         <p:spPr>
           <a:xfrm>
-            <a:off x="6519672" y="2258568"/>
-            <a:ext cx="1828800" cy="292608"/>
-          </a:xfrm>
-          <a:prstGeom prst="rect">
-            <a:avLst/>
-          </a:prstGeom>
-          <a:noFill/>
-          <a:ln/>
-        </p:spPr>
-        <p:txBody>
-          <a:bodyPr wrap="square" lIns="0" tIns="0" rIns="0" bIns="0" rtlCol="0" anchor="ctr"/>
-          <a:lstStyle/>
-          <a:p>
-            <a:pPr algn="ctr" indent="0" marL="0">
-              <a:buNone/>
-            </a:pPr>
-            <a:r>
-              <a:rPr lang="en-US" sz="1300" b="1" dirty="0">
-                <a:solidFill>
-                  <a:srgbClr val="9D174D"/>
+            <a:off x="365760" y="3273552"/>
+            <a:ext cx="1371600" cy="658368"/>
+          </a:xfrm>
+          <a:prstGeom prst="rect">
+            <a:avLst/>
+          </a:prstGeom>
+          <a:noFill/>
+          <a:ln/>
+        </p:spPr>
+        <p:txBody>
+          <a:bodyPr wrap="square" lIns="0" tIns="0" rIns="0" bIns="0" rtlCol="0" anchor="ctr"/>
+          <a:lstStyle/>
+          <a:p>
+            <a:pPr algn="ctr" indent="0" marL="0">
+              <a:buNone/>
+            </a:pPr>
+            <a:r>
+              <a:rPr lang="en-US" sz="1100" b="1" dirty="0">
+                <a:solidFill>
+                  <a:srgbClr val="475569"/>
                 </a:solidFill>
                 <a:latin typeface="Trebuchet MS" pitchFamily="34" charset="0"/>
                 <a:ea typeface="Trebuchet MS" pitchFamily="34" charset="-122"/>
                 <a:cs typeface="Trebuchet MS" pitchFamily="34" charset="-120"/>
               </a:rPr>
-              <a:t>s</a:t>
-            </a:r>
-            <a:endParaRPr lang="en-US" sz="1300" dirty="0"/>
-          </a:p>
-        </p:txBody>
-      </p:sp>
-      <p:sp>
-        <p:nvSpPr>
-          <p:cNvPr id="24" name="Text 22"/>
-          <p:cNvSpPr/>
-          <p:nvPr/>
-        </p:nvSpPr>
-        <p:spPr>
-          <a:xfrm>
-            <a:off x="6519672" y="2569464"/>
-            <a:ext cx="1828800" cy="201168"/>
-          </a:xfrm>
-          <a:prstGeom prst="rect">
-            <a:avLst/>
-          </a:prstGeom>
-          <a:noFill/>
-          <a:ln/>
-        </p:spPr>
-        <p:txBody>
-          <a:bodyPr wrap="square" lIns="0" tIns="0" rIns="0" bIns="0" rtlCol="0" anchor="t"/>
-          <a:lstStyle/>
-          <a:p>
-            <a:pPr algn="ctr" indent="0" marL="0">
-              <a:buNone/>
-            </a:pPr>
-            <a:r>
-              <a:rPr lang="en-US" sz="850" dirty="0">
-                <a:solidFill>
-                  <a:srgbClr val="475569"/>
-                </a:solidFill>
-                <a:latin typeface="Calibri" pitchFamily="34" charset="0"/>
-                <a:ea typeface="Calibri" pitchFamily="34" charset="-122"/>
-                <a:cs typeface="Calibri" pitchFamily="34" charset="-120"/>
-              </a:rPr>
-              <a:t>more than one</a:t>
-            </a:r>
-            <a:endParaRPr lang="en-US" sz="850" dirty="0"/>
-          </a:p>
-        </p:txBody>
-      </p:sp>
-      <p:sp>
-        <p:nvSpPr>
-          <p:cNvPr id="25" name="Shape 23"/>
-          <p:cNvSpPr/>
-          <p:nvPr/>
-        </p:nvSpPr>
-        <p:spPr>
-          <a:xfrm>
-            <a:off x="365760" y="3273552"/>
-            <a:ext cx="1371600" cy="658368"/>
+              <a:t>Syllables</a:t>
+            </a:r>
+            <a:endParaRPr lang="en-US" sz="1100" dirty="0"/>
+          </a:p>
+        </p:txBody>
+      </p:sp>
+      <p:sp>
+        <p:nvSpPr>
+          <p:cNvPr id="24" name="Shape 22"/>
+          <p:cNvSpPr/>
+          <p:nvPr/>
+        </p:nvSpPr>
+        <p:spPr>
+          <a:xfrm>
+            <a:off x="1874520" y="3273552"/>
+            <a:ext cx="6903720" cy="658368"/>
           </a:xfrm>
           <a:prstGeom prst="rect">
             <a:avLst>
@@ -31904,11 +31293,38 @@
             </a:avLst>
           </a:prstGeom>
           <a:solidFill>
-            <a:srgbClr val="E2E8F0"/>
-          </a:solidFill>
-          <a:ln w="12700">
-            <a:solidFill>
-              <a:srgbClr val="E2E8F0"/>
+            <a:srgbClr val="CCFBF1"/>
+          </a:solidFill>
+          <a:ln w="12700">
+            <a:solidFill>
+              <a:srgbClr val="0D9488"/>
+            </a:solidFill>
+            <a:prstDash val="solid"/>
+          </a:ln>
+        </p:spPr>
+      </p:sp>
+      <p:sp>
+        <p:nvSpPr>
+          <p:cNvPr id="25" name="Shape 23"/>
+          <p:cNvSpPr/>
+          <p:nvPr/>
+        </p:nvSpPr>
+        <p:spPr>
+          <a:xfrm>
+            <a:off x="1975104" y="3364992"/>
+            <a:ext cx="1554480" cy="475488"/>
+          </a:xfrm>
+          <a:prstGeom prst="rect">
+            <a:avLst>
+              <a:gd name="adj" fmla="val 9615"/>
+            </a:avLst>
+          </a:prstGeom>
+          <a:solidFill>
+            <a:srgbClr val="FFFFFF"/>
+          </a:solidFill>
+          <a:ln w="12700">
+            <a:solidFill>
+              <a:srgbClr val="0D9488"/>
             </a:solidFill>
             <a:prstDash val="solid"/>
           </a:ln>
@@ -31922,63 +31338,75 @@
         </p:nvSpPr>
         <p:spPr>
           <a:xfrm>
-            <a:off x="365760" y="3273552"/>
-            <a:ext cx="1371600" cy="658368"/>
-          </a:xfrm>
-          <a:prstGeom prst="rect">
-            <a:avLst/>
-          </a:prstGeom>
-          <a:noFill/>
-          <a:ln/>
-        </p:spPr>
-        <p:txBody>
-          <a:bodyPr wrap="square" lIns="0" tIns="0" rIns="0" bIns="0" rtlCol="0" anchor="ctr"/>
-          <a:lstStyle/>
-          <a:p>
-            <a:pPr algn="ctr" indent="0" marL="0">
-              <a:buNone/>
-            </a:pPr>
-            <a:r>
-              <a:rPr lang="en-US" sz="1100" b="1" dirty="0">
-                <a:solidFill>
-                  <a:srgbClr val="475569"/>
+            <a:off x="1975104" y="3364992"/>
+            <a:ext cx="1554480" cy="475488"/>
+          </a:xfrm>
+          <a:prstGeom prst="rect">
+            <a:avLst/>
+          </a:prstGeom>
+          <a:noFill/>
+          <a:ln/>
+        </p:spPr>
+        <p:txBody>
+          <a:bodyPr wrap="square" lIns="0" tIns="0" rIns="0" bIns="0" rtlCol="0" anchor="ctr"/>
+          <a:lstStyle/>
+          <a:p>
+            <a:pPr algn="ctr" indent="0" marL="0">
+              <a:buNone/>
+            </a:pPr>
+            <a:r>
+              <a:rPr lang="en-US" sz="1400" b="1" dirty="0">
+                <a:solidFill>
+                  <a:srgbClr val="0D9488"/>
                 </a:solidFill>
                 <a:latin typeface="Trebuchet MS" pitchFamily="34" charset="0"/>
                 <a:ea typeface="Trebuchet MS" pitchFamily="34" charset="-122"/>
                 <a:cs typeface="Trebuchet MS" pitchFamily="34" charset="-120"/>
               </a:rPr>
-              <a:t>Syllables</a:t>
-            </a:r>
-            <a:endParaRPr lang="en-US" sz="1100" dirty="0"/>
-          </a:p>
-        </p:txBody>
-      </p:sp>
-      <p:sp>
-        <p:nvSpPr>
-          <p:cNvPr id="27" name="Shape 25"/>
-          <p:cNvSpPr/>
-          <p:nvPr/>
-        </p:nvSpPr>
-        <p:spPr>
-          <a:xfrm>
-            <a:off x="1874520" y="3273552"/>
-            <a:ext cx="6903720" cy="658368"/>
-          </a:xfrm>
-          <a:prstGeom prst="rect">
-            <a:avLst>
-              <a:gd name="adj" fmla="val 8333"/>
-            </a:avLst>
-          </a:prstGeom>
-          <a:solidFill>
-            <a:srgbClr val="CCFBF1"/>
-          </a:solidFill>
-          <a:ln w="12700">
-            <a:solidFill>
-              <a:srgbClr val="0D9488"/>
-            </a:solidFill>
-            <a:prstDash val="solid"/>
-          </a:ln>
-        </p:spPr>
+              <a:t>sup</a:t>
+            </a:r>
+            <a:endParaRPr lang="en-US" sz="1400" dirty="0"/>
+          </a:p>
+        </p:txBody>
+      </p:sp>
+      <p:sp>
+        <p:nvSpPr>
+          <p:cNvPr id="27" name="Text 25"/>
+          <p:cNvSpPr/>
+          <p:nvPr/>
+        </p:nvSpPr>
+        <p:spPr>
+          <a:xfrm>
+            <a:off x="3529584" y="3364992"/>
+            <a:ext cx="73152" cy="475488"/>
+          </a:xfrm>
+          <a:prstGeom prst="rect">
+            <a:avLst/>
+          </a:prstGeom>
+          <a:noFill/>
+          <a:ln/>
+        </p:spPr>
+        <p:txBody>
+          <a:bodyPr wrap="square" lIns="0" tIns="0" rIns="0" bIns="0" rtlCol="0" anchor="ctr"/>
+          <a:lstStyle/>
+          <a:p>
+            <a:pPr algn="ctr" indent="0" marL="0">
+              <a:buNone/>
+            </a:pPr>
+            <a:r>
+              <a:rPr lang="en-US" sz="1600" b="1" dirty="0">
+                <a:solidFill>
+                  <a:srgbClr val="0D9488"/>
+                </a:solidFill>
+                <a:latin typeface="Trebuchet MS" pitchFamily="34" charset="0"/>
+                <a:ea typeface="Trebuchet MS" pitchFamily="34" charset="-122"/>
+                <a:cs typeface="Trebuchet MS" pitchFamily="34" charset="-120"/>
+              </a:rPr>
+              <a:t>·</a:t>
+            </a:r>
+            <a:endParaRPr lang="en-US" sz="1600" dirty="0"/>
+          </a:p>
+        </p:txBody>
       </p:sp>
       <p:sp>
         <p:nvSpPr>
@@ -31988,8 +31416,8 @@
         </p:nvSpPr>
         <p:spPr>
           <a:xfrm>
-            <a:off x="2313432" y="3364992"/>
-            <a:ext cx="1645920" cy="475488"/>
+            <a:off x="3602736" y="3364992"/>
+            <a:ext cx="1554480" cy="475488"/>
           </a:xfrm>
           <a:prstGeom prst="rect">
             <a:avLst>
@@ -32015,8 +31443,8 @@
         </p:nvSpPr>
         <p:spPr>
           <a:xfrm>
-            <a:off x="2313432" y="3364992"/>
-            <a:ext cx="1645920" cy="475488"/>
+            <a:off x="3602736" y="3364992"/>
+            <a:ext cx="1554480" cy="475488"/>
           </a:xfrm>
           <a:prstGeom prst="rect">
             <a:avLst/>
@@ -32040,7 +31468,7 @@
                 <a:ea typeface="Trebuchet MS" pitchFamily="34" charset="-122"/>
                 <a:cs typeface="Trebuchet MS" pitchFamily="34" charset="-120"/>
               </a:rPr>
-              <a:t>sup</a:t>
+              <a:t>port</a:t>
             </a:r>
             <a:endParaRPr lang="en-US" sz="1400" dirty="0"/>
           </a:p>
@@ -32054,8 +31482,8 @@
         </p:nvSpPr>
         <p:spPr>
           <a:xfrm>
-            <a:off x="3959352" y="3364992"/>
-            <a:ext cx="411480" cy="475488"/>
+            <a:off x="5157216" y="3364992"/>
+            <a:ext cx="73152" cy="475488"/>
           </a:xfrm>
           <a:prstGeom prst="rect">
             <a:avLst/>
@@ -32093,8 +31521,8 @@
         </p:nvSpPr>
         <p:spPr>
           <a:xfrm>
-            <a:off x="4370832" y="3364992"/>
-            <a:ext cx="1645920" cy="475488"/>
+            <a:off x="5230368" y="3364992"/>
+            <a:ext cx="1554480" cy="475488"/>
           </a:xfrm>
           <a:prstGeom prst="rect">
             <a:avLst>
@@ -32120,8 +31548,8 @@
         </p:nvSpPr>
         <p:spPr>
           <a:xfrm>
-            <a:off x="4370832" y="3364992"/>
-            <a:ext cx="1645920" cy="475488"/>
+            <a:off x="5230368" y="3364992"/>
+            <a:ext cx="1554480" cy="475488"/>
           </a:xfrm>
           <a:prstGeom prst="rect">
             <a:avLst/>
@@ -32145,7 +31573,7 @@
                 <a:ea typeface="Trebuchet MS" pitchFamily="34" charset="-122"/>
                 <a:cs typeface="Trebuchet MS" pitchFamily="34" charset="-120"/>
               </a:rPr>
-              <a:t>port</a:t>
+              <a:t>a</a:t>
             </a:r>
             <a:endParaRPr lang="en-US" sz="1400" dirty="0"/>
           </a:p>
@@ -32159,8 +31587,8 @@
         </p:nvSpPr>
         <p:spPr>
           <a:xfrm>
-            <a:off x="6016752" y="3364992"/>
-            <a:ext cx="411480" cy="475488"/>
+            <a:off x="6784848" y="3364992"/>
+            <a:ext cx="73152" cy="475488"/>
           </a:xfrm>
           <a:prstGeom prst="rect">
             <a:avLst/>
@@ -32198,8 +31626,8 @@
         </p:nvSpPr>
         <p:spPr>
           <a:xfrm>
-            <a:off x="6428232" y="3364992"/>
-            <a:ext cx="1645920" cy="475488"/>
+            <a:off x="6858000" y="3364992"/>
+            <a:ext cx="1554480" cy="475488"/>
           </a:xfrm>
           <a:prstGeom prst="rect">
             <a:avLst>
@@ -32225,8 +31653,8 @@
         </p:nvSpPr>
         <p:spPr>
           <a:xfrm>
-            <a:off x="6428232" y="3364992"/>
-            <a:ext cx="1645920" cy="475488"/>
+            <a:off x="6858000" y="3364992"/>
+            <a:ext cx="1554480" cy="475488"/>
           </a:xfrm>
           <a:prstGeom prst="rect">
             <a:avLst/>
@@ -32250,7 +31678,7 @@
                 <a:ea typeface="Trebuchet MS" pitchFamily="34" charset="-122"/>
                 <a:cs typeface="Trebuchet MS" pitchFamily="34" charset="-120"/>
               </a:rPr>
-              <a:t>ers</a:t>
+              <a:t>ble</a:t>
             </a:r>
             <a:endParaRPr lang="en-US" sz="1400" dirty="0"/>
           </a:p>
@@ -32674,7 +32102,7 @@
                 <a:ea typeface="Calibri" pitchFamily="34" charset="-122"/>
                 <a:cs typeface="Calibri" pitchFamily="34" charset="-120"/>
               </a:rPr>
-              <a:t>Word Labs  •  wordlabs.app  •  Root: 'support' = hold up, carry from below</a:t>
+              <a:t>Word Labs  •  wordlabs.app  •  Root: 'support' = hold up, bear, carry</a:t>
             </a:r>
             <a:endParaRPr lang="en-US" sz="800" dirty="0"/>
           </a:p>
@@ -32813,7 +32241,7 @@
                 <a:ea typeface="Trebuchet MS" pitchFamily="34" charset="-122"/>
                 <a:cs typeface="Trebuchet MS" pitchFamily="34" charset="-120"/>
               </a:rPr>
-              <a:t>supporters</a:t>
+              <a:t>supportable</a:t>
             </a:r>
             <a:endParaRPr lang="en-US" sz="2800" dirty="0"/>
           </a:p>
@@ -32893,7 +32321,7 @@
         </p:nvSpPr>
         <p:spPr>
           <a:xfrm>
-            <a:off x="2221992" y="2258568"/>
+            <a:off x="2938272" y="2258568"/>
             <a:ext cx="1828800" cy="292608"/>
           </a:xfrm>
           <a:prstGeom prst="rect">
@@ -32927,7 +32355,7 @@
         </p:nvSpPr>
         <p:spPr>
           <a:xfrm>
-            <a:off x="2221992" y="2258568"/>
+            <a:off x="2938272" y="2258568"/>
             <a:ext cx="1828800" cy="292608"/>
           </a:xfrm>
           <a:prstGeom prst="rect">
@@ -32966,7 +32394,7 @@
         </p:nvSpPr>
         <p:spPr>
           <a:xfrm>
-            <a:off x="2221992" y="2569464"/>
+            <a:off x="2938272" y="2569464"/>
             <a:ext cx="1828800" cy="201168"/>
           </a:xfrm>
           <a:prstGeom prst="rect">
@@ -32991,7 +32419,7 @@
                 <a:ea typeface="Calibri" pitchFamily="34" charset="-122"/>
                 <a:cs typeface="Calibri" pitchFamily="34" charset="-120"/>
               </a:rPr>
-              <a:t>hold up, back someone</a:t>
+              <a:t>hold up, help</a:t>
             </a:r>
             <a:endParaRPr lang="en-US" sz="850" dirty="0"/>
           </a:p>
@@ -33005,7 +32433,7 @@
         </p:nvSpPr>
         <p:spPr>
           <a:xfrm>
-            <a:off x="4370832" y="2258568"/>
+            <a:off x="5803392" y="2258568"/>
             <a:ext cx="1828800" cy="292608"/>
           </a:xfrm>
           <a:prstGeom prst="rect">
@@ -33039,7 +32467,7 @@
         </p:nvSpPr>
         <p:spPr>
           <a:xfrm>
-            <a:off x="4370832" y="2258568"/>
+            <a:off x="5803392" y="2258568"/>
             <a:ext cx="1828800" cy="292608"/>
           </a:xfrm>
           <a:prstGeom prst="rect">
@@ -33064,7 +32492,7 @@
                 <a:ea typeface="Trebuchet MS" pitchFamily="34" charset="-122"/>
                 <a:cs typeface="Trebuchet MS" pitchFamily="34" charset="-120"/>
               </a:rPr>
-              <a:t>er</a:t>
+              <a:t>able</a:t>
             </a:r>
             <a:endParaRPr lang="en-US" sz="1300" dirty="0"/>
           </a:p>
@@ -33078,7 +32506,7 @@
         </p:nvSpPr>
         <p:spPr>
           <a:xfrm>
-            <a:off x="4370832" y="2569464"/>
+            <a:off x="5803392" y="2569464"/>
             <a:ext cx="1828800" cy="201168"/>
           </a:xfrm>
           <a:prstGeom prst="rect">
@@ -33103,7 +32531,7 @@
                 <a:ea typeface="Calibri" pitchFamily="34" charset="-122"/>
                 <a:cs typeface="Calibri" pitchFamily="34" charset="-120"/>
               </a:rPr>
-              <a:t>a person who does</a:t>
+              <a:t>able to be</a:t>
             </a:r>
             <a:endParaRPr lang="en-US" sz="850" dirty="0"/>
           </a:p>
@@ -33117,30 +32545,23 @@
         </p:nvSpPr>
         <p:spPr>
           <a:xfrm>
-            <a:off x="6519672" y="2258568"/>
-            <a:ext cx="1828800" cy="292608"/>
+            <a:off x="365760" y="3273552"/>
+            <a:ext cx="1371600" cy="658368"/>
           </a:xfrm>
           <a:prstGeom prst="rect">
             <a:avLst>
-              <a:gd name="adj" fmla="val 25000"/>
+              <a:gd name="adj" fmla="val 8333"/>
             </a:avLst>
           </a:prstGeom>
           <a:solidFill>
-            <a:srgbClr val="FCE7F3"/>
-          </a:solidFill>
-          <a:ln w="19050">
-            <a:solidFill>
-              <a:srgbClr val="DB2777"/>
-            </a:solidFill>
-            <a:prstDash val="solid"/>
-          </a:ln>
-          <a:effectLst>
-            <a:outerShdw sx="100000" sy="100000" kx="0" ky="0" algn="bl" rotWithShape="0" blurRad="101600" dist="38100" dir="8100000">
-              <a:srgbClr val="000000">
-                <a:alpha val="12000"/>
-              </a:srgbClr>
-            </a:outerShdw>
-          </a:effectLst>
+            <a:srgbClr val="E2E8F0"/>
+          </a:solidFill>
+          <a:ln w="12700">
+            <a:solidFill>
+              <a:srgbClr val="E2E8F0"/>
+            </a:solidFill>
+            <a:prstDash val="solid"/>
+          </a:ln>
         </p:spPr>
       </p:sp>
       <p:sp>
@@ -33151,86 +32572,47 @@
         </p:nvSpPr>
         <p:spPr>
           <a:xfrm>
-            <a:off x="6519672" y="2258568"/>
-            <a:ext cx="1828800" cy="292608"/>
-          </a:xfrm>
-          <a:prstGeom prst="rect">
-            <a:avLst/>
-          </a:prstGeom>
-          <a:noFill/>
-          <a:ln/>
-        </p:spPr>
-        <p:txBody>
-          <a:bodyPr wrap="square" lIns="0" tIns="0" rIns="0" bIns="0" rtlCol="0" anchor="ctr"/>
-          <a:lstStyle/>
-          <a:p>
-            <a:pPr algn="ctr" indent="0" marL="0">
-              <a:buNone/>
-            </a:pPr>
-            <a:r>
-              <a:rPr lang="en-US" sz="1300" b="1" dirty="0">
-                <a:solidFill>
-                  <a:srgbClr val="9D174D"/>
+            <a:off x="365760" y="3273552"/>
+            <a:ext cx="1371600" cy="658368"/>
+          </a:xfrm>
+          <a:prstGeom prst="rect">
+            <a:avLst/>
+          </a:prstGeom>
+          <a:noFill/>
+          <a:ln/>
+        </p:spPr>
+        <p:txBody>
+          <a:bodyPr wrap="square" lIns="0" tIns="0" rIns="0" bIns="0" rtlCol="0" anchor="ctr"/>
+          <a:lstStyle/>
+          <a:p>
+            <a:pPr algn="ctr" indent="0" marL="0">
+              <a:buNone/>
+            </a:pPr>
+            <a:r>
+              <a:rPr lang="en-US" sz="1100" b="1" dirty="0">
+                <a:solidFill>
+                  <a:srgbClr val="475569"/>
                 </a:solidFill>
                 <a:latin typeface="Trebuchet MS" pitchFamily="34" charset="0"/>
                 <a:ea typeface="Trebuchet MS" pitchFamily="34" charset="-122"/>
                 <a:cs typeface="Trebuchet MS" pitchFamily="34" charset="-120"/>
               </a:rPr>
-              <a:t>s</a:t>
-            </a:r>
-            <a:endParaRPr lang="en-US" sz="1300" dirty="0"/>
-          </a:p>
-        </p:txBody>
-      </p:sp>
-      <p:sp>
-        <p:nvSpPr>
-          <p:cNvPr id="24" name="Text 22"/>
-          <p:cNvSpPr/>
-          <p:nvPr/>
-        </p:nvSpPr>
-        <p:spPr>
-          <a:xfrm>
-            <a:off x="6519672" y="2569464"/>
-            <a:ext cx="1828800" cy="201168"/>
-          </a:xfrm>
-          <a:prstGeom prst="rect">
-            <a:avLst/>
-          </a:prstGeom>
-          <a:noFill/>
-          <a:ln/>
-        </p:spPr>
-        <p:txBody>
-          <a:bodyPr wrap="square" lIns="0" tIns="0" rIns="0" bIns="0" rtlCol="0" anchor="t"/>
-          <a:lstStyle/>
-          <a:p>
-            <a:pPr algn="ctr" indent="0" marL="0">
-              <a:buNone/>
-            </a:pPr>
-            <a:r>
-              <a:rPr lang="en-US" sz="850" dirty="0">
-                <a:solidFill>
-                  <a:srgbClr val="475569"/>
-                </a:solidFill>
-                <a:latin typeface="Calibri" pitchFamily="34" charset="0"/>
-                <a:ea typeface="Calibri" pitchFamily="34" charset="-122"/>
-                <a:cs typeface="Calibri" pitchFamily="34" charset="-120"/>
-              </a:rPr>
-              <a:t>more than one</a:t>
-            </a:r>
-            <a:endParaRPr lang="en-US" sz="850" dirty="0"/>
-          </a:p>
-        </p:txBody>
-      </p:sp>
-      <p:sp>
-        <p:nvSpPr>
-          <p:cNvPr id="25" name="Shape 23"/>
-          <p:cNvSpPr/>
-          <p:nvPr/>
-        </p:nvSpPr>
-        <p:spPr>
-          <a:xfrm>
-            <a:off x="365760" y="3273552"/>
-            <a:ext cx="1371600" cy="658368"/>
+              <a:t>Syllables</a:t>
+            </a:r>
+            <a:endParaRPr lang="en-US" sz="1100" dirty="0"/>
+          </a:p>
+        </p:txBody>
+      </p:sp>
+      <p:sp>
+        <p:nvSpPr>
+          <p:cNvPr id="24" name="Shape 22"/>
+          <p:cNvSpPr/>
+          <p:nvPr/>
+        </p:nvSpPr>
+        <p:spPr>
+          <a:xfrm>
+            <a:off x="1874520" y="3273552"/>
+            <a:ext cx="6903720" cy="658368"/>
           </a:xfrm>
           <a:prstGeom prst="rect">
             <a:avLst>
@@ -33238,11 +32620,38 @@
             </a:avLst>
           </a:prstGeom>
           <a:solidFill>
-            <a:srgbClr val="E2E8F0"/>
-          </a:solidFill>
-          <a:ln w="12700">
-            <a:solidFill>
-              <a:srgbClr val="E2E8F0"/>
+            <a:srgbClr val="CCFBF1"/>
+          </a:solidFill>
+          <a:ln w="12700">
+            <a:solidFill>
+              <a:srgbClr val="0D9488"/>
+            </a:solidFill>
+            <a:prstDash val="solid"/>
+          </a:ln>
+        </p:spPr>
+      </p:sp>
+      <p:sp>
+        <p:nvSpPr>
+          <p:cNvPr id="25" name="Shape 23"/>
+          <p:cNvSpPr/>
+          <p:nvPr/>
+        </p:nvSpPr>
+        <p:spPr>
+          <a:xfrm>
+            <a:off x="1975104" y="3364992"/>
+            <a:ext cx="1554480" cy="475488"/>
+          </a:xfrm>
+          <a:prstGeom prst="rect">
+            <a:avLst>
+              <a:gd name="adj" fmla="val 9615"/>
+            </a:avLst>
+          </a:prstGeom>
+          <a:solidFill>
+            <a:srgbClr val="FFFFFF"/>
+          </a:solidFill>
+          <a:ln w="12700">
+            <a:solidFill>
+              <a:srgbClr val="0D9488"/>
             </a:solidFill>
             <a:prstDash val="solid"/>
           </a:ln>
@@ -33256,32 +32665,413 @@
         </p:nvSpPr>
         <p:spPr>
           <a:xfrm>
-            <a:off x="365760" y="3273552"/>
-            <a:ext cx="1371600" cy="658368"/>
-          </a:xfrm>
-          <a:prstGeom prst="rect">
-            <a:avLst/>
-          </a:prstGeom>
-          <a:noFill/>
-          <a:ln/>
-        </p:spPr>
-        <p:txBody>
-          <a:bodyPr wrap="square" lIns="0" tIns="0" rIns="0" bIns="0" rtlCol="0" anchor="ctr"/>
-          <a:lstStyle/>
-          <a:p>
-            <a:pPr algn="ctr" indent="0" marL="0">
-              <a:buNone/>
-            </a:pPr>
-            <a:r>
-              <a:rPr lang="en-US" sz="1100" b="1" dirty="0">
-                <a:solidFill>
-                  <a:srgbClr val="475569"/>
+            <a:off x="1975104" y="3364992"/>
+            <a:ext cx="1554480" cy="475488"/>
+          </a:xfrm>
+          <a:prstGeom prst="rect">
+            <a:avLst/>
+          </a:prstGeom>
+          <a:noFill/>
+          <a:ln/>
+        </p:spPr>
+        <p:txBody>
+          <a:bodyPr wrap="square" lIns="0" tIns="0" rIns="0" bIns="0" rtlCol="0" anchor="ctr"/>
+          <a:lstStyle/>
+          <a:p>
+            <a:pPr algn="ctr" indent="0" marL="0">
+              <a:buNone/>
+            </a:pPr>
+            <a:r>
+              <a:rPr lang="en-US" sz="1400" b="1" dirty="0">
+                <a:solidFill>
+                  <a:srgbClr val="0D9488"/>
                 </a:solidFill>
                 <a:latin typeface="Trebuchet MS" pitchFamily="34" charset="0"/>
                 <a:ea typeface="Trebuchet MS" pitchFamily="34" charset="-122"/>
                 <a:cs typeface="Trebuchet MS" pitchFamily="34" charset="-120"/>
               </a:rPr>
-              <a:t>Syllables</a:t>
+              <a:t>sup</a:t>
+            </a:r>
+            <a:endParaRPr lang="en-US" sz="1400" dirty="0"/>
+          </a:p>
+        </p:txBody>
+      </p:sp>
+      <p:sp>
+        <p:nvSpPr>
+          <p:cNvPr id="27" name="Text 25"/>
+          <p:cNvSpPr/>
+          <p:nvPr/>
+        </p:nvSpPr>
+        <p:spPr>
+          <a:xfrm>
+            <a:off x="3529584" y="3364992"/>
+            <a:ext cx="73152" cy="475488"/>
+          </a:xfrm>
+          <a:prstGeom prst="rect">
+            <a:avLst/>
+          </a:prstGeom>
+          <a:noFill/>
+          <a:ln/>
+        </p:spPr>
+        <p:txBody>
+          <a:bodyPr wrap="square" lIns="0" tIns="0" rIns="0" bIns="0" rtlCol="0" anchor="ctr"/>
+          <a:lstStyle/>
+          <a:p>
+            <a:pPr algn="ctr" indent="0" marL="0">
+              <a:buNone/>
+            </a:pPr>
+            <a:r>
+              <a:rPr lang="en-US" sz="1600" b="1" dirty="0">
+                <a:solidFill>
+                  <a:srgbClr val="0D9488"/>
+                </a:solidFill>
+                <a:latin typeface="Trebuchet MS" pitchFamily="34" charset="0"/>
+                <a:ea typeface="Trebuchet MS" pitchFamily="34" charset="-122"/>
+                <a:cs typeface="Trebuchet MS" pitchFamily="34" charset="-120"/>
+              </a:rPr>
+              <a:t>·</a:t>
+            </a:r>
+            <a:endParaRPr lang="en-US" sz="1600" dirty="0"/>
+          </a:p>
+        </p:txBody>
+      </p:sp>
+      <p:sp>
+        <p:nvSpPr>
+          <p:cNvPr id="28" name="Shape 26"/>
+          <p:cNvSpPr/>
+          <p:nvPr/>
+        </p:nvSpPr>
+        <p:spPr>
+          <a:xfrm>
+            <a:off x="3602736" y="3364992"/>
+            <a:ext cx="1554480" cy="475488"/>
+          </a:xfrm>
+          <a:prstGeom prst="rect">
+            <a:avLst>
+              <a:gd name="adj" fmla="val 9615"/>
+            </a:avLst>
+          </a:prstGeom>
+          <a:solidFill>
+            <a:srgbClr val="FFFFFF"/>
+          </a:solidFill>
+          <a:ln w="12700">
+            <a:solidFill>
+              <a:srgbClr val="0D9488"/>
+            </a:solidFill>
+            <a:prstDash val="solid"/>
+          </a:ln>
+        </p:spPr>
+      </p:sp>
+      <p:sp>
+        <p:nvSpPr>
+          <p:cNvPr id="29" name="Text 27"/>
+          <p:cNvSpPr/>
+          <p:nvPr/>
+        </p:nvSpPr>
+        <p:spPr>
+          <a:xfrm>
+            <a:off x="3602736" y="3364992"/>
+            <a:ext cx="1554480" cy="475488"/>
+          </a:xfrm>
+          <a:prstGeom prst="rect">
+            <a:avLst/>
+          </a:prstGeom>
+          <a:noFill/>
+          <a:ln/>
+        </p:spPr>
+        <p:txBody>
+          <a:bodyPr wrap="square" lIns="0" tIns="0" rIns="0" bIns="0" rtlCol="0" anchor="ctr"/>
+          <a:lstStyle/>
+          <a:p>
+            <a:pPr algn="ctr" indent="0" marL="0">
+              <a:buNone/>
+            </a:pPr>
+            <a:r>
+              <a:rPr lang="en-US" sz="1400" b="1" dirty="0">
+                <a:solidFill>
+                  <a:srgbClr val="0D9488"/>
+                </a:solidFill>
+                <a:latin typeface="Trebuchet MS" pitchFamily="34" charset="0"/>
+                <a:ea typeface="Trebuchet MS" pitchFamily="34" charset="-122"/>
+                <a:cs typeface="Trebuchet MS" pitchFamily="34" charset="-120"/>
+              </a:rPr>
+              <a:t>port</a:t>
+            </a:r>
+            <a:endParaRPr lang="en-US" sz="1400" dirty="0"/>
+          </a:p>
+        </p:txBody>
+      </p:sp>
+      <p:sp>
+        <p:nvSpPr>
+          <p:cNvPr id="30" name="Text 28"/>
+          <p:cNvSpPr/>
+          <p:nvPr/>
+        </p:nvSpPr>
+        <p:spPr>
+          <a:xfrm>
+            <a:off x="5157216" y="3364992"/>
+            <a:ext cx="73152" cy="475488"/>
+          </a:xfrm>
+          <a:prstGeom prst="rect">
+            <a:avLst/>
+          </a:prstGeom>
+          <a:noFill/>
+          <a:ln/>
+        </p:spPr>
+        <p:txBody>
+          <a:bodyPr wrap="square" lIns="0" tIns="0" rIns="0" bIns="0" rtlCol="0" anchor="ctr"/>
+          <a:lstStyle/>
+          <a:p>
+            <a:pPr algn="ctr" indent="0" marL="0">
+              <a:buNone/>
+            </a:pPr>
+            <a:r>
+              <a:rPr lang="en-US" sz="1600" b="1" dirty="0">
+                <a:solidFill>
+                  <a:srgbClr val="0D9488"/>
+                </a:solidFill>
+                <a:latin typeface="Trebuchet MS" pitchFamily="34" charset="0"/>
+                <a:ea typeface="Trebuchet MS" pitchFamily="34" charset="-122"/>
+                <a:cs typeface="Trebuchet MS" pitchFamily="34" charset="-120"/>
+              </a:rPr>
+              <a:t>·</a:t>
+            </a:r>
+            <a:endParaRPr lang="en-US" sz="1600" dirty="0"/>
+          </a:p>
+        </p:txBody>
+      </p:sp>
+      <p:sp>
+        <p:nvSpPr>
+          <p:cNvPr id="31" name="Shape 29"/>
+          <p:cNvSpPr/>
+          <p:nvPr/>
+        </p:nvSpPr>
+        <p:spPr>
+          <a:xfrm>
+            <a:off x="5230368" y="3364992"/>
+            <a:ext cx="1554480" cy="475488"/>
+          </a:xfrm>
+          <a:prstGeom prst="rect">
+            <a:avLst>
+              <a:gd name="adj" fmla="val 9615"/>
+            </a:avLst>
+          </a:prstGeom>
+          <a:solidFill>
+            <a:srgbClr val="FFFFFF"/>
+          </a:solidFill>
+          <a:ln w="12700">
+            <a:solidFill>
+              <a:srgbClr val="0D9488"/>
+            </a:solidFill>
+            <a:prstDash val="solid"/>
+          </a:ln>
+        </p:spPr>
+      </p:sp>
+      <p:sp>
+        <p:nvSpPr>
+          <p:cNvPr id="32" name="Text 30"/>
+          <p:cNvSpPr/>
+          <p:nvPr/>
+        </p:nvSpPr>
+        <p:spPr>
+          <a:xfrm>
+            <a:off x="5230368" y="3364992"/>
+            <a:ext cx="1554480" cy="475488"/>
+          </a:xfrm>
+          <a:prstGeom prst="rect">
+            <a:avLst/>
+          </a:prstGeom>
+          <a:noFill/>
+          <a:ln/>
+        </p:spPr>
+        <p:txBody>
+          <a:bodyPr wrap="square" lIns="0" tIns="0" rIns="0" bIns="0" rtlCol="0" anchor="ctr"/>
+          <a:lstStyle/>
+          <a:p>
+            <a:pPr algn="ctr" indent="0" marL="0">
+              <a:buNone/>
+            </a:pPr>
+            <a:r>
+              <a:rPr lang="en-US" sz="1400" b="1" dirty="0">
+                <a:solidFill>
+                  <a:srgbClr val="0D9488"/>
+                </a:solidFill>
+                <a:latin typeface="Trebuchet MS" pitchFamily="34" charset="0"/>
+                <a:ea typeface="Trebuchet MS" pitchFamily="34" charset="-122"/>
+                <a:cs typeface="Trebuchet MS" pitchFamily="34" charset="-120"/>
+              </a:rPr>
+              <a:t>a</a:t>
+            </a:r>
+            <a:endParaRPr lang="en-US" sz="1400" dirty="0"/>
+          </a:p>
+        </p:txBody>
+      </p:sp>
+      <p:sp>
+        <p:nvSpPr>
+          <p:cNvPr id="33" name="Text 31"/>
+          <p:cNvSpPr/>
+          <p:nvPr/>
+        </p:nvSpPr>
+        <p:spPr>
+          <a:xfrm>
+            <a:off x="6784848" y="3364992"/>
+            <a:ext cx="73152" cy="475488"/>
+          </a:xfrm>
+          <a:prstGeom prst="rect">
+            <a:avLst/>
+          </a:prstGeom>
+          <a:noFill/>
+          <a:ln/>
+        </p:spPr>
+        <p:txBody>
+          <a:bodyPr wrap="square" lIns="0" tIns="0" rIns="0" bIns="0" rtlCol="0" anchor="ctr"/>
+          <a:lstStyle/>
+          <a:p>
+            <a:pPr algn="ctr" indent="0" marL="0">
+              <a:buNone/>
+            </a:pPr>
+            <a:r>
+              <a:rPr lang="en-US" sz="1600" b="1" dirty="0">
+                <a:solidFill>
+                  <a:srgbClr val="0D9488"/>
+                </a:solidFill>
+                <a:latin typeface="Trebuchet MS" pitchFamily="34" charset="0"/>
+                <a:ea typeface="Trebuchet MS" pitchFamily="34" charset="-122"/>
+                <a:cs typeface="Trebuchet MS" pitchFamily="34" charset="-120"/>
+              </a:rPr>
+              <a:t>·</a:t>
+            </a:r>
+            <a:endParaRPr lang="en-US" sz="1600" dirty="0"/>
+          </a:p>
+        </p:txBody>
+      </p:sp>
+      <p:sp>
+        <p:nvSpPr>
+          <p:cNvPr id="34" name="Shape 32"/>
+          <p:cNvSpPr/>
+          <p:nvPr/>
+        </p:nvSpPr>
+        <p:spPr>
+          <a:xfrm>
+            <a:off x="6858000" y="3364992"/>
+            <a:ext cx="1554480" cy="475488"/>
+          </a:xfrm>
+          <a:prstGeom prst="rect">
+            <a:avLst>
+              <a:gd name="adj" fmla="val 9615"/>
+            </a:avLst>
+          </a:prstGeom>
+          <a:solidFill>
+            <a:srgbClr val="FFFFFF"/>
+          </a:solidFill>
+          <a:ln w="12700">
+            <a:solidFill>
+              <a:srgbClr val="0D9488"/>
+            </a:solidFill>
+            <a:prstDash val="solid"/>
+          </a:ln>
+        </p:spPr>
+      </p:sp>
+      <p:sp>
+        <p:nvSpPr>
+          <p:cNvPr id="35" name="Text 33"/>
+          <p:cNvSpPr/>
+          <p:nvPr/>
+        </p:nvSpPr>
+        <p:spPr>
+          <a:xfrm>
+            <a:off x="6858000" y="3364992"/>
+            <a:ext cx="1554480" cy="475488"/>
+          </a:xfrm>
+          <a:prstGeom prst="rect">
+            <a:avLst/>
+          </a:prstGeom>
+          <a:noFill/>
+          <a:ln/>
+        </p:spPr>
+        <p:txBody>
+          <a:bodyPr wrap="square" lIns="0" tIns="0" rIns="0" bIns="0" rtlCol="0" anchor="ctr"/>
+          <a:lstStyle/>
+          <a:p>
+            <a:pPr algn="ctr" indent="0" marL="0">
+              <a:buNone/>
+            </a:pPr>
+            <a:r>
+              <a:rPr lang="en-US" sz="1400" b="1" dirty="0">
+                <a:solidFill>
+                  <a:srgbClr val="0D9488"/>
+                </a:solidFill>
+                <a:latin typeface="Trebuchet MS" pitchFamily="34" charset="0"/>
+                <a:ea typeface="Trebuchet MS" pitchFamily="34" charset="-122"/>
+                <a:cs typeface="Trebuchet MS" pitchFamily="34" charset="-120"/>
+              </a:rPr>
+              <a:t>ble</a:t>
+            </a:r>
+            <a:endParaRPr lang="en-US" sz="1400" dirty="0"/>
+          </a:p>
+        </p:txBody>
+      </p:sp>
+      <p:sp>
+        <p:nvSpPr>
+          <p:cNvPr id="36" name="Shape 34"/>
+          <p:cNvSpPr/>
+          <p:nvPr/>
+        </p:nvSpPr>
+        <p:spPr>
+          <a:xfrm>
+            <a:off x="365760" y="4096512"/>
+            <a:ext cx="1371600" cy="804672"/>
+          </a:xfrm>
+          <a:prstGeom prst="rect">
+            <a:avLst>
+              <a:gd name="adj" fmla="val 6818"/>
+            </a:avLst>
+          </a:prstGeom>
+          <a:solidFill>
+            <a:srgbClr val="E2E8F0"/>
+          </a:solidFill>
+          <a:ln w="12700">
+            <a:solidFill>
+              <a:srgbClr val="E2E8F0"/>
+            </a:solidFill>
+            <a:prstDash val="solid"/>
+          </a:ln>
+        </p:spPr>
+      </p:sp>
+      <p:sp>
+        <p:nvSpPr>
+          <p:cNvPr id="37" name="Text 35"/>
+          <p:cNvSpPr/>
+          <p:nvPr/>
+        </p:nvSpPr>
+        <p:spPr>
+          <a:xfrm>
+            <a:off x="365760" y="4096512"/>
+            <a:ext cx="1371600" cy="804672"/>
+          </a:xfrm>
+          <a:prstGeom prst="rect">
+            <a:avLst/>
+          </a:prstGeom>
+          <a:noFill/>
+          <a:ln/>
+        </p:spPr>
+        <p:txBody>
+          <a:bodyPr wrap="square" lIns="0" tIns="0" rIns="0" bIns="0" rtlCol="0" anchor="ctr"/>
+          <a:lstStyle/>
+          <a:p>
+            <a:pPr algn="ctr" indent="0" marL="0">
+              <a:buNone/>
+            </a:pPr>
+            <a:r>
+              <a:rPr lang="en-US" sz="1100" b="1" dirty="0">
+                <a:solidFill>
+                  <a:srgbClr val="475569"/>
+                </a:solidFill>
+                <a:latin typeface="Trebuchet MS" pitchFamily="34" charset="0"/>
+                <a:ea typeface="Trebuchet MS" pitchFamily="34" charset="-122"/>
+                <a:cs typeface="Trebuchet MS" pitchFamily="34" charset="-120"/>
+              </a:rPr>
+              <a:t>Phonemes</a:t>
             </a:r>
             <a:endParaRPr lang="en-US" sz="1100" dirty="0"/>
           </a:p>
@@ -33289,13 +33079,13 @@
       </p:sp>
       <p:sp>
         <p:nvSpPr>
-          <p:cNvPr id="27" name="Shape 25"/>
-          <p:cNvSpPr/>
-          <p:nvPr/>
-        </p:nvSpPr>
-        <p:spPr>
-          <a:xfrm>
-            <a:off x="1874520" y="3273552"/>
+          <p:cNvPr id="38" name="Shape 36"/>
+          <p:cNvSpPr/>
+          <p:nvPr/>
+        </p:nvSpPr>
+        <p:spPr>
+          <a:xfrm>
+            <a:off x="1874520" y="4096512"/>
             <a:ext cx="6903720" cy="658368"/>
           </a:xfrm>
           <a:prstGeom prst="rect">
@@ -33304,30 +33094,30 @@
             </a:avLst>
           </a:prstGeom>
           <a:solidFill>
-            <a:srgbClr val="CCFBF1"/>
-          </a:solidFill>
-          <a:ln w="12700">
-            <a:solidFill>
-              <a:srgbClr val="0D9488"/>
-            </a:solidFill>
-            <a:prstDash val="solid"/>
-          </a:ln>
-        </p:spPr>
-      </p:sp>
-      <p:sp>
-        <p:nvSpPr>
-          <p:cNvPr id="28" name="Shape 26"/>
-          <p:cNvSpPr/>
-          <p:nvPr/>
-        </p:nvSpPr>
-        <p:spPr>
-          <a:xfrm>
-            <a:off x="2313432" y="3364992"/>
-            <a:ext cx="1645920" cy="475488"/>
+            <a:srgbClr val="FCE7F3"/>
+          </a:solidFill>
+          <a:ln w="12700">
+            <a:solidFill>
+              <a:srgbClr val="DB2777"/>
+            </a:solidFill>
+            <a:prstDash val="solid"/>
+          </a:ln>
+        </p:spPr>
+      </p:sp>
+      <p:sp>
+        <p:nvSpPr>
+          <p:cNvPr id="39" name="Shape 37"/>
+          <p:cNvSpPr/>
+          <p:nvPr/>
+        </p:nvSpPr>
+        <p:spPr>
+          <a:xfrm>
+            <a:off x="2023872" y="4169664"/>
+            <a:ext cx="685800" cy="475488"/>
           </a:xfrm>
           <a:prstGeom prst="rect">
             <a:avLst>
-              <a:gd name="adj" fmla="val 9615"/>
+              <a:gd name="adj" fmla="val 7692"/>
             </a:avLst>
           </a:prstGeom>
           <a:solidFill>
@@ -33335,104 +33125,131 @@
           </a:solidFill>
           <a:ln w="12700">
             <a:solidFill>
-              <a:srgbClr val="0D9488"/>
-            </a:solidFill>
-            <a:prstDash val="solid"/>
-          </a:ln>
-        </p:spPr>
-      </p:sp>
-      <p:sp>
-        <p:nvSpPr>
-          <p:cNvPr id="29" name="Text 27"/>
-          <p:cNvSpPr/>
-          <p:nvPr/>
-        </p:nvSpPr>
-        <p:spPr>
-          <a:xfrm>
-            <a:off x="2313432" y="3364992"/>
-            <a:ext cx="1645920" cy="475488"/>
-          </a:xfrm>
-          <a:prstGeom prst="rect">
-            <a:avLst/>
-          </a:prstGeom>
-          <a:noFill/>
-          <a:ln/>
-        </p:spPr>
-        <p:txBody>
-          <a:bodyPr wrap="square" lIns="0" tIns="0" rIns="0" bIns="0" rtlCol="0" anchor="ctr"/>
-          <a:lstStyle/>
-          <a:p>
-            <a:pPr algn="ctr" indent="0" marL="0">
-              <a:buNone/>
-            </a:pPr>
-            <a:r>
-              <a:rPr lang="en-US" sz="1400" b="1" dirty="0">
-                <a:solidFill>
-                  <a:srgbClr val="0D9488"/>
+              <a:srgbClr val="DB2777"/>
+            </a:solidFill>
+            <a:prstDash val="solid"/>
+          </a:ln>
+        </p:spPr>
+      </p:sp>
+      <p:sp>
+        <p:nvSpPr>
+          <p:cNvPr id="40" name="Text 38"/>
+          <p:cNvSpPr/>
+          <p:nvPr/>
+        </p:nvSpPr>
+        <p:spPr>
+          <a:xfrm>
+            <a:off x="2023872" y="4169664"/>
+            <a:ext cx="685800" cy="475488"/>
+          </a:xfrm>
+          <a:prstGeom prst="rect">
+            <a:avLst/>
+          </a:prstGeom>
+          <a:noFill/>
+          <a:ln/>
+        </p:spPr>
+        <p:txBody>
+          <a:bodyPr wrap="square" lIns="0" tIns="0" rIns="0" bIns="0" rtlCol="0" anchor="ctr"/>
+          <a:lstStyle/>
+          <a:p>
+            <a:pPr algn="ctr" indent="0" marL="0">
+              <a:buNone/>
+            </a:pPr>
+            <a:r>
+              <a:rPr lang="en-US" sz="900" b="1" dirty="0">
+                <a:solidFill>
+                  <a:srgbClr val="9D174D"/>
                 </a:solidFill>
                 <a:latin typeface="Trebuchet MS" pitchFamily="34" charset="0"/>
                 <a:ea typeface="Trebuchet MS" pitchFamily="34" charset="-122"/>
                 <a:cs typeface="Trebuchet MS" pitchFamily="34" charset="-120"/>
               </a:rPr>
-              <a:t>sup</a:t>
-            </a:r>
-            <a:endParaRPr lang="en-US" sz="1400" dirty="0"/>
-          </a:p>
-        </p:txBody>
-      </p:sp>
-      <p:sp>
-        <p:nvSpPr>
-          <p:cNvPr id="30" name="Text 28"/>
-          <p:cNvSpPr/>
-          <p:nvPr/>
-        </p:nvSpPr>
-        <p:spPr>
-          <a:xfrm>
-            <a:off x="3959352" y="3364992"/>
-            <a:ext cx="411480" cy="475488"/>
-          </a:xfrm>
-          <a:prstGeom prst="rect">
-            <a:avLst/>
-          </a:prstGeom>
-          <a:noFill/>
-          <a:ln/>
-        </p:spPr>
-        <p:txBody>
-          <a:bodyPr wrap="square" lIns="0" tIns="0" rIns="0" bIns="0" rtlCol="0" anchor="ctr"/>
-          <a:lstStyle/>
-          <a:p>
-            <a:pPr algn="ctr" indent="0" marL="0">
-              <a:buNone/>
-            </a:pPr>
-            <a:r>
-              <a:rPr lang="en-US" sz="1600" b="1" dirty="0">
-                <a:solidFill>
-                  <a:srgbClr val="0D9488"/>
+              <a:t>s</a:t>
+            </a:r>
+            <a:endParaRPr lang="en-US" sz="900" dirty="0"/>
+          </a:p>
+        </p:txBody>
+      </p:sp>
+      <p:sp>
+        <p:nvSpPr>
+          <p:cNvPr id="41" name="Shape 39"/>
+          <p:cNvSpPr/>
+          <p:nvPr/>
+        </p:nvSpPr>
+        <p:spPr>
+          <a:xfrm>
+            <a:off x="2831592" y="4169664"/>
+            <a:ext cx="685800" cy="475488"/>
+          </a:xfrm>
+          <a:prstGeom prst="rect">
+            <a:avLst>
+              <a:gd name="adj" fmla="val 7692"/>
+            </a:avLst>
+          </a:prstGeom>
+          <a:solidFill>
+            <a:srgbClr val="FFFFFF"/>
+          </a:solidFill>
+          <a:ln w="12700">
+            <a:solidFill>
+              <a:srgbClr val="DB2777"/>
+            </a:solidFill>
+            <a:prstDash val="solid"/>
+          </a:ln>
+        </p:spPr>
+      </p:sp>
+      <p:sp>
+        <p:nvSpPr>
+          <p:cNvPr id="42" name="Text 40"/>
+          <p:cNvSpPr/>
+          <p:nvPr/>
+        </p:nvSpPr>
+        <p:spPr>
+          <a:xfrm>
+            <a:off x="2831592" y="4169664"/>
+            <a:ext cx="685800" cy="475488"/>
+          </a:xfrm>
+          <a:prstGeom prst="rect">
+            <a:avLst/>
+          </a:prstGeom>
+          <a:noFill/>
+          <a:ln/>
+        </p:spPr>
+        <p:txBody>
+          <a:bodyPr wrap="square" lIns="0" tIns="0" rIns="0" bIns="0" rtlCol="0" anchor="ctr"/>
+          <a:lstStyle/>
+          <a:p>
+            <a:pPr algn="ctr" indent="0" marL="0">
+              <a:buNone/>
+            </a:pPr>
+            <a:r>
+              <a:rPr lang="en-US" sz="900" b="1" dirty="0">
+                <a:solidFill>
+                  <a:srgbClr val="9D174D"/>
                 </a:solidFill>
                 <a:latin typeface="Trebuchet MS" pitchFamily="34" charset="0"/>
                 <a:ea typeface="Trebuchet MS" pitchFamily="34" charset="-122"/>
                 <a:cs typeface="Trebuchet MS" pitchFamily="34" charset="-120"/>
               </a:rPr>
-              <a:t>·</a:t>
-            </a:r>
-            <a:endParaRPr lang="en-US" sz="1600" dirty="0"/>
-          </a:p>
-        </p:txBody>
-      </p:sp>
-      <p:sp>
-        <p:nvSpPr>
-          <p:cNvPr id="31" name="Shape 29"/>
-          <p:cNvSpPr/>
-          <p:nvPr/>
-        </p:nvSpPr>
-        <p:spPr>
-          <a:xfrm>
-            <a:off x="4370832" y="3364992"/>
-            <a:ext cx="1645920" cy="475488"/>
+              <a:t>u</a:t>
+            </a:r>
+            <a:endParaRPr lang="en-US" sz="900" dirty="0"/>
+          </a:p>
+        </p:txBody>
+      </p:sp>
+      <p:sp>
+        <p:nvSpPr>
+          <p:cNvPr id="43" name="Shape 41"/>
+          <p:cNvSpPr/>
+          <p:nvPr/>
+        </p:nvSpPr>
+        <p:spPr>
+          <a:xfrm>
+            <a:off x="3639312" y="4169664"/>
+            <a:ext cx="685800" cy="475488"/>
           </a:xfrm>
           <a:prstGeom prst="rect">
             <a:avLst>
-              <a:gd name="adj" fmla="val 9615"/>
+              <a:gd name="adj" fmla="val 7692"/>
             </a:avLst>
           </a:prstGeom>
           <a:solidFill>
@@ -33440,104 +33257,131 @@
           </a:solidFill>
           <a:ln w="12700">
             <a:solidFill>
-              <a:srgbClr val="0D9488"/>
-            </a:solidFill>
-            <a:prstDash val="solid"/>
-          </a:ln>
-        </p:spPr>
-      </p:sp>
-      <p:sp>
-        <p:nvSpPr>
-          <p:cNvPr id="32" name="Text 30"/>
-          <p:cNvSpPr/>
-          <p:nvPr/>
-        </p:nvSpPr>
-        <p:spPr>
-          <a:xfrm>
-            <a:off x="4370832" y="3364992"/>
-            <a:ext cx="1645920" cy="475488"/>
-          </a:xfrm>
-          <a:prstGeom prst="rect">
-            <a:avLst/>
-          </a:prstGeom>
-          <a:noFill/>
-          <a:ln/>
-        </p:spPr>
-        <p:txBody>
-          <a:bodyPr wrap="square" lIns="0" tIns="0" rIns="0" bIns="0" rtlCol="0" anchor="ctr"/>
-          <a:lstStyle/>
-          <a:p>
-            <a:pPr algn="ctr" indent="0" marL="0">
-              <a:buNone/>
-            </a:pPr>
-            <a:r>
-              <a:rPr lang="en-US" sz="1400" b="1" dirty="0">
-                <a:solidFill>
-                  <a:srgbClr val="0D9488"/>
+              <a:srgbClr val="DB2777"/>
+            </a:solidFill>
+            <a:prstDash val="solid"/>
+          </a:ln>
+        </p:spPr>
+      </p:sp>
+      <p:sp>
+        <p:nvSpPr>
+          <p:cNvPr id="44" name="Text 42"/>
+          <p:cNvSpPr/>
+          <p:nvPr/>
+        </p:nvSpPr>
+        <p:spPr>
+          <a:xfrm>
+            <a:off x="3639312" y="4169664"/>
+            <a:ext cx="685800" cy="475488"/>
+          </a:xfrm>
+          <a:prstGeom prst="rect">
+            <a:avLst/>
+          </a:prstGeom>
+          <a:noFill/>
+          <a:ln/>
+        </p:spPr>
+        <p:txBody>
+          <a:bodyPr wrap="square" lIns="0" tIns="0" rIns="0" bIns="0" rtlCol="0" anchor="ctr"/>
+          <a:lstStyle/>
+          <a:p>
+            <a:pPr algn="ctr" indent="0" marL="0">
+              <a:buNone/>
+            </a:pPr>
+            <a:r>
+              <a:rPr lang="en-US" sz="900" b="1" dirty="0">
+                <a:solidFill>
+                  <a:srgbClr val="9D174D"/>
                 </a:solidFill>
                 <a:latin typeface="Trebuchet MS" pitchFamily="34" charset="0"/>
                 <a:ea typeface="Trebuchet MS" pitchFamily="34" charset="-122"/>
                 <a:cs typeface="Trebuchet MS" pitchFamily="34" charset="-120"/>
               </a:rPr>
-              <a:t>port</a:t>
-            </a:r>
-            <a:endParaRPr lang="en-US" sz="1400" dirty="0"/>
-          </a:p>
-        </p:txBody>
-      </p:sp>
-      <p:sp>
-        <p:nvSpPr>
-          <p:cNvPr id="33" name="Text 31"/>
-          <p:cNvSpPr/>
-          <p:nvPr/>
-        </p:nvSpPr>
-        <p:spPr>
-          <a:xfrm>
-            <a:off x="6016752" y="3364992"/>
-            <a:ext cx="411480" cy="475488"/>
-          </a:xfrm>
-          <a:prstGeom prst="rect">
-            <a:avLst/>
-          </a:prstGeom>
-          <a:noFill/>
-          <a:ln/>
-        </p:spPr>
-        <p:txBody>
-          <a:bodyPr wrap="square" lIns="0" tIns="0" rIns="0" bIns="0" rtlCol="0" anchor="ctr"/>
-          <a:lstStyle/>
-          <a:p>
-            <a:pPr algn="ctr" indent="0" marL="0">
-              <a:buNone/>
-            </a:pPr>
-            <a:r>
-              <a:rPr lang="en-US" sz="1600" b="1" dirty="0">
-                <a:solidFill>
-                  <a:srgbClr val="0D9488"/>
+              <a:t>pp</a:t>
+            </a:r>
+            <a:endParaRPr lang="en-US" sz="900" dirty="0"/>
+          </a:p>
+        </p:txBody>
+      </p:sp>
+      <p:sp>
+        <p:nvSpPr>
+          <p:cNvPr id="45" name="Shape 43"/>
+          <p:cNvSpPr/>
+          <p:nvPr/>
+        </p:nvSpPr>
+        <p:spPr>
+          <a:xfrm>
+            <a:off x="4447032" y="4169664"/>
+            <a:ext cx="685800" cy="475488"/>
+          </a:xfrm>
+          <a:prstGeom prst="rect">
+            <a:avLst>
+              <a:gd name="adj" fmla="val 7692"/>
+            </a:avLst>
+          </a:prstGeom>
+          <a:solidFill>
+            <a:srgbClr val="FFFFFF"/>
+          </a:solidFill>
+          <a:ln w="12700">
+            <a:solidFill>
+              <a:srgbClr val="DB2777"/>
+            </a:solidFill>
+            <a:prstDash val="solid"/>
+          </a:ln>
+        </p:spPr>
+      </p:sp>
+      <p:sp>
+        <p:nvSpPr>
+          <p:cNvPr id="46" name="Text 44"/>
+          <p:cNvSpPr/>
+          <p:nvPr/>
+        </p:nvSpPr>
+        <p:spPr>
+          <a:xfrm>
+            <a:off x="4447032" y="4169664"/>
+            <a:ext cx="685800" cy="475488"/>
+          </a:xfrm>
+          <a:prstGeom prst="rect">
+            <a:avLst/>
+          </a:prstGeom>
+          <a:noFill/>
+          <a:ln/>
+        </p:spPr>
+        <p:txBody>
+          <a:bodyPr wrap="square" lIns="0" tIns="0" rIns="0" bIns="0" rtlCol="0" anchor="ctr"/>
+          <a:lstStyle/>
+          <a:p>
+            <a:pPr algn="ctr" indent="0" marL="0">
+              <a:buNone/>
+            </a:pPr>
+            <a:r>
+              <a:rPr lang="en-US" sz="900" b="1" dirty="0">
+                <a:solidFill>
+                  <a:srgbClr val="9D174D"/>
                 </a:solidFill>
                 <a:latin typeface="Trebuchet MS" pitchFamily="34" charset="0"/>
                 <a:ea typeface="Trebuchet MS" pitchFamily="34" charset="-122"/>
                 <a:cs typeface="Trebuchet MS" pitchFamily="34" charset="-120"/>
               </a:rPr>
-              <a:t>·</a:t>
-            </a:r>
-            <a:endParaRPr lang="en-US" sz="1600" dirty="0"/>
-          </a:p>
-        </p:txBody>
-      </p:sp>
-      <p:sp>
-        <p:nvSpPr>
-          <p:cNvPr id="34" name="Shape 32"/>
-          <p:cNvSpPr/>
-          <p:nvPr/>
-        </p:nvSpPr>
-        <p:spPr>
-          <a:xfrm>
-            <a:off x="6428232" y="3364992"/>
-            <a:ext cx="1645920" cy="475488"/>
+              <a:t>or</a:t>
+            </a:r>
+            <a:endParaRPr lang="en-US" sz="900" dirty="0"/>
+          </a:p>
+        </p:txBody>
+      </p:sp>
+      <p:sp>
+        <p:nvSpPr>
+          <p:cNvPr id="47" name="Shape 45"/>
+          <p:cNvSpPr/>
+          <p:nvPr/>
+        </p:nvSpPr>
+        <p:spPr>
+          <a:xfrm>
+            <a:off x="5254752" y="4169664"/>
+            <a:ext cx="685800" cy="475488"/>
           </a:xfrm>
           <a:prstGeom prst="rect">
             <a:avLst>
-              <a:gd name="adj" fmla="val 9615"/>
+              <a:gd name="adj" fmla="val 7692"/>
             </a:avLst>
           </a:prstGeom>
           <a:solidFill>
@@ -33545,153 +33389,126 @@
           </a:solidFill>
           <a:ln w="12700">
             <a:solidFill>
-              <a:srgbClr val="0D9488"/>
-            </a:solidFill>
-            <a:prstDash val="solid"/>
-          </a:ln>
-        </p:spPr>
-      </p:sp>
-      <p:sp>
-        <p:nvSpPr>
-          <p:cNvPr id="35" name="Text 33"/>
-          <p:cNvSpPr/>
-          <p:nvPr/>
-        </p:nvSpPr>
-        <p:spPr>
-          <a:xfrm>
-            <a:off x="6428232" y="3364992"/>
-            <a:ext cx="1645920" cy="475488"/>
-          </a:xfrm>
-          <a:prstGeom prst="rect">
-            <a:avLst/>
-          </a:prstGeom>
-          <a:noFill/>
-          <a:ln/>
-        </p:spPr>
-        <p:txBody>
-          <a:bodyPr wrap="square" lIns="0" tIns="0" rIns="0" bIns="0" rtlCol="0" anchor="ctr"/>
-          <a:lstStyle/>
-          <a:p>
-            <a:pPr algn="ctr" indent="0" marL="0">
-              <a:buNone/>
-            </a:pPr>
-            <a:r>
-              <a:rPr lang="en-US" sz="1400" b="1" dirty="0">
-                <a:solidFill>
-                  <a:srgbClr val="0D9488"/>
+              <a:srgbClr val="DB2777"/>
+            </a:solidFill>
+            <a:prstDash val="solid"/>
+          </a:ln>
+        </p:spPr>
+      </p:sp>
+      <p:sp>
+        <p:nvSpPr>
+          <p:cNvPr id="48" name="Text 46"/>
+          <p:cNvSpPr/>
+          <p:nvPr/>
+        </p:nvSpPr>
+        <p:spPr>
+          <a:xfrm>
+            <a:off x="5254752" y="4169664"/>
+            <a:ext cx="685800" cy="475488"/>
+          </a:xfrm>
+          <a:prstGeom prst="rect">
+            <a:avLst/>
+          </a:prstGeom>
+          <a:noFill/>
+          <a:ln/>
+        </p:spPr>
+        <p:txBody>
+          <a:bodyPr wrap="square" lIns="0" tIns="0" rIns="0" bIns="0" rtlCol="0" anchor="ctr"/>
+          <a:lstStyle/>
+          <a:p>
+            <a:pPr algn="ctr" indent="0" marL="0">
+              <a:buNone/>
+            </a:pPr>
+            <a:r>
+              <a:rPr lang="en-US" sz="900" b="1" dirty="0">
+                <a:solidFill>
+                  <a:srgbClr val="9D174D"/>
                 </a:solidFill>
                 <a:latin typeface="Trebuchet MS" pitchFamily="34" charset="0"/>
                 <a:ea typeface="Trebuchet MS" pitchFamily="34" charset="-122"/>
                 <a:cs typeface="Trebuchet MS" pitchFamily="34" charset="-120"/>
               </a:rPr>
-              <a:t>ers</a:t>
-            </a:r>
-            <a:endParaRPr lang="en-US" sz="1400" dirty="0"/>
-          </a:p>
-        </p:txBody>
-      </p:sp>
-      <p:sp>
-        <p:nvSpPr>
-          <p:cNvPr id="36" name="Shape 34"/>
-          <p:cNvSpPr/>
-          <p:nvPr/>
-        </p:nvSpPr>
-        <p:spPr>
-          <a:xfrm>
-            <a:off x="365760" y="4096512"/>
-            <a:ext cx="1371600" cy="804672"/>
+              <a:t>t</a:t>
+            </a:r>
+            <a:endParaRPr lang="en-US" sz="900" dirty="0"/>
+          </a:p>
+        </p:txBody>
+      </p:sp>
+      <p:sp>
+        <p:nvSpPr>
+          <p:cNvPr id="49" name="Shape 47"/>
+          <p:cNvSpPr/>
+          <p:nvPr/>
+        </p:nvSpPr>
+        <p:spPr>
+          <a:xfrm>
+            <a:off x="6062472" y="4169664"/>
+            <a:ext cx="685800" cy="475488"/>
           </a:xfrm>
           <a:prstGeom prst="rect">
             <a:avLst>
-              <a:gd name="adj" fmla="val 6818"/>
+              <a:gd name="adj" fmla="val 7692"/>
             </a:avLst>
           </a:prstGeom>
           <a:solidFill>
-            <a:srgbClr val="E2E8F0"/>
-          </a:solidFill>
-          <a:ln w="12700">
-            <a:solidFill>
-              <a:srgbClr val="E2E8F0"/>
-            </a:solidFill>
-            <a:prstDash val="solid"/>
-          </a:ln>
-        </p:spPr>
-      </p:sp>
-      <p:sp>
-        <p:nvSpPr>
-          <p:cNvPr id="37" name="Text 35"/>
-          <p:cNvSpPr/>
-          <p:nvPr/>
-        </p:nvSpPr>
-        <p:spPr>
-          <a:xfrm>
-            <a:off x="365760" y="4096512"/>
-            <a:ext cx="1371600" cy="804672"/>
-          </a:xfrm>
-          <a:prstGeom prst="rect">
-            <a:avLst/>
-          </a:prstGeom>
-          <a:noFill/>
-          <a:ln/>
-        </p:spPr>
-        <p:txBody>
-          <a:bodyPr wrap="square" lIns="0" tIns="0" rIns="0" bIns="0" rtlCol="0" anchor="ctr"/>
-          <a:lstStyle/>
-          <a:p>
-            <a:pPr algn="ctr" indent="0" marL="0">
-              <a:buNone/>
-            </a:pPr>
-            <a:r>
-              <a:rPr lang="en-US" sz="1100" b="1" dirty="0">
-                <a:solidFill>
-                  <a:srgbClr val="475569"/>
+            <a:srgbClr val="FFFFFF"/>
+          </a:solidFill>
+          <a:ln w="12700">
+            <a:solidFill>
+              <a:srgbClr val="DB2777"/>
+            </a:solidFill>
+            <a:prstDash val="solid"/>
+          </a:ln>
+        </p:spPr>
+      </p:sp>
+      <p:sp>
+        <p:nvSpPr>
+          <p:cNvPr id="50" name="Text 48"/>
+          <p:cNvSpPr/>
+          <p:nvPr/>
+        </p:nvSpPr>
+        <p:spPr>
+          <a:xfrm>
+            <a:off x="6062472" y="4169664"/>
+            <a:ext cx="685800" cy="475488"/>
+          </a:xfrm>
+          <a:prstGeom prst="rect">
+            <a:avLst/>
+          </a:prstGeom>
+          <a:noFill/>
+          <a:ln/>
+        </p:spPr>
+        <p:txBody>
+          <a:bodyPr wrap="square" lIns="0" tIns="0" rIns="0" bIns="0" rtlCol="0" anchor="ctr"/>
+          <a:lstStyle/>
+          <a:p>
+            <a:pPr algn="ctr" indent="0" marL="0">
+              <a:buNone/>
+            </a:pPr>
+            <a:r>
+              <a:rPr lang="en-US" sz="900" b="1" dirty="0">
+                <a:solidFill>
+                  <a:srgbClr val="9D174D"/>
                 </a:solidFill>
                 <a:latin typeface="Trebuchet MS" pitchFamily="34" charset="0"/>
                 <a:ea typeface="Trebuchet MS" pitchFamily="34" charset="-122"/>
                 <a:cs typeface="Trebuchet MS" pitchFamily="34" charset="-120"/>
               </a:rPr>
-              <a:t>Phonemes</a:t>
-            </a:r>
-            <a:endParaRPr lang="en-US" sz="1100" dirty="0"/>
-          </a:p>
-        </p:txBody>
-      </p:sp>
-      <p:sp>
-        <p:nvSpPr>
-          <p:cNvPr id="38" name="Shape 36"/>
-          <p:cNvSpPr/>
-          <p:nvPr/>
-        </p:nvSpPr>
-        <p:spPr>
-          <a:xfrm>
-            <a:off x="1874520" y="4096512"/>
-            <a:ext cx="6903720" cy="658368"/>
-          </a:xfrm>
-          <a:prstGeom prst="rect">
-            <a:avLst>
-              <a:gd name="adj" fmla="val 8333"/>
-            </a:avLst>
-          </a:prstGeom>
-          <a:solidFill>
-            <a:srgbClr val="FCE7F3"/>
-          </a:solidFill>
-          <a:ln w="12700">
-            <a:solidFill>
-              <a:srgbClr val="DB2777"/>
-            </a:solidFill>
-            <a:prstDash val="solid"/>
-          </a:ln>
-        </p:spPr>
-      </p:sp>
-      <p:sp>
-        <p:nvSpPr>
-          <p:cNvPr id="39" name="Shape 37"/>
-          <p:cNvSpPr/>
-          <p:nvPr/>
-        </p:nvSpPr>
-        <p:spPr>
-          <a:xfrm>
-            <a:off x="2124837" y="4169664"/>
+              <a:t>a</a:t>
+            </a:r>
+            <a:endParaRPr lang="en-US" sz="900" dirty="0"/>
+          </a:p>
+        </p:txBody>
+      </p:sp>
+      <p:sp>
+        <p:nvSpPr>
+          <p:cNvPr id="51" name="Shape 49"/>
+          <p:cNvSpPr/>
+          <p:nvPr/>
+        </p:nvSpPr>
+        <p:spPr>
+          <a:xfrm>
+            <a:off x="6870192" y="4169664"/>
             <a:ext cx="685800" cy="475488"/>
           </a:xfrm>
           <a:prstGeom prst="rect">
@@ -33712,13 +33529,13 @@
       </p:sp>
       <p:sp>
         <p:nvSpPr>
-          <p:cNvPr id="40" name="Text 38"/>
-          <p:cNvSpPr/>
-          <p:nvPr/>
-        </p:nvSpPr>
-        <p:spPr>
-          <a:xfrm>
-            <a:off x="2124837" y="4169664"/>
+          <p:cNvPr id="52" name="Text 50"/>
+          <p:cNvSpPr/>
+          <p:nvPr/>
+        </p:nvSpPr>
+        <p:spPr>
+          <a:xfrm>
+            <a:off x="6870192" y="4169664"/>
             <a:ext cx="685800" cy="475488"/>
           </a:xfrm>
           <a:prstGeom prst="rect">
@@ -33743,7 +33560,7 @@
                 <a:ea typeface="Trebuchet MS" pitchFamily="34" charset="-122"/>
                 <a:cs typeface="Trebuchet MS" pitchFamily="34" charset="-120"/>
               </a:rPr>
-              <a:t>s</a:t>
+              <a:t>b</a:t>
             </a:r>
             <a:endParaRPr lang="en-US" sz="900" dirty="0"/>
           </a:p>
@@ -33751,13 +33568,13 @@
       </p:sp>
       <p:sp>
         <p:nvSpPr>
-          <p:cNvPr id="41" name="Shape 39"/>
-          <p:cNvSpPr/>
-          <p:nvPr/>
-        </p:nvSpPr>
-        <p:spPr>
-          <a:xfrm>
-            <a:off x="3033522" y="4169664"/>
+          <p:cNvPr id="53" name="Shape 51"/>
+          <p:cNvSpPr/>
+          <p:nvPr/>
+        </p:nvSpPr>
+        <p:spPr>
+          <a:xfrm>
+            <a:off x="7677912" y="4169664"/>
             <a:ext cx="685800" cy="475488"/>
           </a:xfrm>
           <a:prstGeom prst="rect">
@@ -33778,13 +33595,13 @@
       </p:sp>
       <p:sp>
         <p:nvSpPr>
-          <p:cNvPr id="42" name="Text 40"/>
-          <p:cNvSpPr/>
-          <p:nvPr/>
-        </p:nvSpPr>
-        <p:spPr>
-          <a:xfrm>
-            <a:off x="3033522" y="4169664"/>
+          <p:cNvPr id="54" name="Text 52"/>
+          <p:cNvSpPr/>
+          <p:nvPr/>
+        </p:nvSpPr>
+        <p:spPr>
+          <a:xfrm>
+            <a:off x="7677912" y="4169664"/>
             <a:ext cx="685800" cy="475488"/>
           </a:xfrm>
           <a:prstGeom prst="rect">
@@ -33809,337 +33626,7 @@
                 <a:ea typeface="Trebuchet MS" pitchFamily="34" charset="-122"/>
                 <a:cs typeface="Trebuchet MS" pitchFamily="34" charset="-120"/>
               </a:rPr>
-              <a:t>u</a:t>
-            </a:r>
-            <a:endParaRPr lang="en-US" sz="900" dirty="0"/>
-          </a:p>
-        </p:txBody>
-      </p:sp>
-      <p:sp>
-        <p:nvSpPr>
-          <p:cNvPr id="43" name="Shape 41"/>
-          <p:cNvSpPr/>
-          <p:nvPr/>
-        </p:nvSpPr>
-        <p:spPr>
-          <a:xfrm>
-            <a:off x="3942207" y="4169664"/>
-            <a:ext cx="685800" cy="475488"/>
-          </a:xfrm>
-          <a:prstGeom prst="rect">
-            <a:avLst>
-              <a:gd name="adj" fmla="val 7692"/>
-            </a:avLst>
-          </a:prstGeom>
-          <a:solidFill>
-            <a:srgbClr val="FFFFFF"/>
-          </a:solidFill>
-          <a:ln w="12700">
-            <a:solidFill>
-              <a:srgbClr val="DB2777"/>
-            </a:solidFill>
-            <a:prstDash val="solid"/>
-          </a:ln>
-        </p:spPr>
-      </p:sp>
-      <p:sp>
-        <p:nvSpPr>
-          <p:cNvPr id="44" name="Text 42"/>
-          <p:cNvSpPr/>
-          <p:nvPr/>
-        </p:nvSpPr>
-        <p:spPr>
-          <a:xfrm>
-            <a:off x="3942207" y="4169664"/>
-            <a:ext cx="685800" cy="475488"/>
-          </a:xfrm>
-          <a:prstGeom prst="rect">
-            <a:avLst/>
-          </a:prstGeom>
-          <a:noFill/>
-          <a:ln/>
-        </p:spPr>
-        <p:txBody>
-          <a:bodyPr wrap="square" lIns="0" tIns="0" rIns="0" bIns="0" rtlCol="0" anchor="ctr"/>
-          <a:lstStyle/>
-          <a:p>
-            <a:pPr algn="ctr" indent="0" marL="0">
-              <a:buNone/>
-            </a:pPr>
-            <a:r>
-              <a:rPr lang="en-US" sz="900" b="1" dirty="0">
-                <a:solidFill>
-                  <a:srgbClr val="9D174D"/>
-                </a:solidFill>
-                <a:latin typeface="Trebuchet MS" pitchFamily="34" charset="0"/>
-                <a:ea typeface="Trebuchet MS" pitchFamily="34" charset="-122"/>
-                <a:cs typeface="Trebuchet MS" pitchFamily="34" charset="-120"/>
-              </a:rPr>
-              <a:t>pp</a:t>
-            </a:r>
-            <a:endParaRPr lang="en-US" sz="900" dirty="0"/>
-          </a:p>
-        </p:txBody>
-      </p:sp>
-      <p:sp>
-        <p:nvSpPr>
-          <p:cNvPr id="45" name="Shape 43"/>
-          <p:cNvSpPr/>
-          <p:nvPr/>
-        </p:nvSpPr>
-        <p:spPr>
-          <a:xfrm>
-            <a:off x="4850892" y="4169664"/>
-            <a:ext cx="685800" cy="475488"/>
-          </a:xfrm>
-          <a:prstGeom prst="rect">
-            <a:avLst>
-              <a:gd name="adj" fmla="val 7692"/>
-            </a:avLst>
-          </a:prstGeom>
-          <a:solidFill>
-            <a:srgbClr val="FFFFFF"/>
-          </a:solidFill>
-          <a:ln w="12700">
-            <a:solidFill>
-              <a:srgbClr val="DB2777"/>
-            </a:solidFill>
-            <a:prstDash val="solid"/>
-          </a:ln>
-        </p:spPr>
-      </p:sp>
-      <p:sp>
-        <p:nvSpPr>
-          <p:cNvPr id="46" name="Text 44"/>
-          <p:cNvSpPr/>
-          <p:nvPr/>
-        </p:nvSpPr>
-        <p:spPr>
-          <a:xfrm>
-            <a:off x="4850892" y="4169664"/>
-            <a:ext cx="685800" cy="475488"/>
-          </a:xfrm>
-          <a:prstGeom prst="rect">
-            <a:avLst/>
-          </a:prstGeom>
-          <a:noFill/>
-          <a:ln/>
-        </p:spPr>
-        <p:txBody>
-          <a:bodyPr wrap="square" lIns="0" tIns="0" rIns="0" bIns="0" rtlCol="0" anchor="ctr"/>
-          <a:lstStyle/>
-          <a:p>
-            <a:pPr algn="ctr" indent="0" marL="0">
-              <a:buNone/>
-            </a:pPr>
-            <a:r>
-              <a:rPr lang="en-US" sz="900" b="1" dirty="0">
-                <a:solidFill>
-                  <a:srgbClr val="9D174D"/>
-                </a:solidFill>
-                <a:latin typeface="Trebuchet MS" pitchFamily="34" charset="0"/>
-                <a:ea typeface="Trebuchet MS" pitchFamily="34" charset="-122"/>
-                <a:cs typeface="Trebuchet MS" pitchFamily="34" charset="-120"/>
-              </a:rPr>
-              <a:t>or</a:t>
-            </a:r>
-            <a:endParaRPr lang="en-US" sz="900" dirty="0"/>
-          </a:p>
-        </p:txBody>
-      </p:sp>
-      <p:sp>
-        <p:nvSpPr>
-          <p:cNvPr id="47" name="Shape 45"/>
-          <p:cNvSpPr/>
-          <p:nvPr/>
-        </p:nvSpPr>
-        <p:spPr>
-          <a:xfrm>
-            <a:off x="5759577" y="4169664"/>
-            <a:ext cx="685800" cy="475488"/>
-          </a:xfrm>
-          <a:prstGeom prst="rect">
-            <a:avLst>
-              <a:gd name="adj" fmla="val 7692"/>
-            </a:avLst>
-          </a:prstGeom>
-          <a:solidFill>
-            <a:srgbClr val="FFFFFF"/>
-          </a:solidFill>
-          <a:ln w="12700">
-            <a:solidFill>
-              <a:srgbClr val="DB2777"/>
-            </a:solidFill>
-            <a:prstDash val="solid"/>
-          </a:ln>
-        </p:spPr>
-      </p:sp>
-      <p:sp>
-        <p:nvSpPr>
-          <p:cNvPr id="48" name="Text 46"/>
-          <p:cNvSpPr/>
-          <p:nvPr/>
-        </p:nvSpPr>
-        <p:spPr>
-          <a:xfrm>
-            <a:off x="5759577" y="4169664"/>
-            <a:ext cx="685800" cy="475488"/>
-          </a:xfrm>
-          <a:prstGeom prst="rect">
-            <a:avLst/>
-          </a:prstGeom>
-          <a:noFill/>
-          <a:ln/>
-        </p:spPr>
-        <p:txBody>
-          <a:bodyPr wrap="square" lIns="0" tIns="0" rIns="0" bIns="0" rtlCol="0" anchor="ctr"/>
-          <a:lstStyle/>
-          <a:p>
-            <a:pPr algn="ctr" indent="0" marL="0">
-              <a:buNone/>
-            </a:pPr>
-            <a:r>
-              <a:rPr lang="en-US" sz="900" b="1" dirty="0">
-                <a:solidFill>
-                  <a:srgbClr val="9D174D"/>
-                </a:solidFill>
-                <a:latin typeface="Trebuchet MS" pitchFamily="34" charset="0"/>
-                <a:ea typeface="Trebuchet MS" pitchFamily="34" charset="-122"/>
-                <a:cs typeface="Trebuchet MS" pitchFamily="34" charset="-120"/>
-              </a:rPr>
-              <a:t>t</a:t>
-            </a:r>
-            <a:endParaRPr lang="en-US" sz="900" dirty="0"/>
-          </a:p>
-        </p:txBody>
-      </p:sp>
-      <p:sp>
-        <p:nvSpPr>
-          <p:cNvPr id="49" name="Shape 47"/>
-          <p:cNvSpPr/>
-          <p:nvPr/>
-        </p:nvSpPr>
-        <p:spPr>
-          <a:xfrm>
-            <a:off x="6668262" y="4169664"/>
-            <a:ext cx="685800" cy="475488"/>
-          </a:xfrm>
-          <a:prstGeom prst="rect">
-            <a:avLst>
-              <a:gd name="adj" fmla="val 7692"/>
-            </a:avLst>
-          </a:prstGeom>
-          <a:solidFill>
-            <a:srgbClr val="FFFFFF"/>
-          </a:solidFill>
-          <a:ln w="12700">
-            <a:solidFill>
-              <a:srgbClr val="DB2777"/>
-            </a:solidFill>
-            <a:prstDash val="solid"/>
-          </a:ln>
-        </p:spPr>
-      </p:sp>
-      <p:sp>
-        <p:nvSpPr>
-          <p:cNvPr id="50" name="Text 48"/>
-          <p:cNvSpPr/>
-          <p:nvPr/>
-        </p:nvSpPr>
-        <p:spPr>
-          <a:xfrm>
-            <a:off x="6668262" y="4169664"/>
-            <a:ext cx="685800" cy="475488"/>
-          </a:xfrm>
-          <a:prstGeom prst="rect">
-            <a:avLst/>
-          </a:prstGeom>
-          <a:noFill/>
-          <a:ln/>
-        </p:spPr>
-        <p:txBody>
-          <a:bodyPr wrap="square" lIns="0" tIns="0" rIns="0" bIns="0" rtlCol="0" anchor="ctr"/>
-          <a:lstStyle/>
-          <a:p>
-            <a:pPr algn="ctr" indent="0" marL="0">
-              <a:buNone/>
-            </a:pPr>
-            <a:r>
-              <a:rPr lang="en-US" sz="900" b="1" dirty="0">
-                <a:solidFill>
-                  <a:srgbClr val="9D174D"/>
-                </a:solidFill>
-                <a:latin typeface="Trebuchet MS" pitchFamily="34" charset="0"/>
-                <a:ea typeface="Trebuchet MS" pitchFamily="34" charset="-122"/>
-                <a:cs typeface="Trebuchet MS" pitchFamily="34" charset="-120"/>
-              </a:rPr>
-              <a:t>er</a:t>
-            </a:r>
-            <a:endParaRPr lang="en-US" sz="900" dirty="0"/>
-          </a:p>
-        </p:txBody>
-      </p:sp>
-      <p:sp>
-        <p:nvSpPr>
-          <p:cNvPr id="51" name="Shape 49"/>
-          <p:cNvSpPr/>
-          <p:nvPr/>
-        </p:nvSpPr>
-        <p:spPr>
-          <a:xfrm>
-            <a:off x="7576947" y="4169664"/>
-            <a:ext cx="685800" cy="475488"/>
-          </a:xfrm>
-          <a:prstGeom prst="rect">
-            <a:avLst>
-              <a:gd name="adj" fmla="val 7692"/>
-            </a:avLst>
-          </a:prstGeom>
-          <a:solidFill>
-            <a:srgbClr val="FFFFFF"/>
-          </a:solidFill>
-          <a:ln w="12700">
-            <a:solidFill>
-              <a:srgbClr val="DB2777"/>
-            </a:solidFill>
-            <a:prstDash val="solid"/>
-          </a:ln>
-        </p:spPr>
-      </p:sp>
-      <p:sp>
-        <p:nvSpPr>
-          <p:cNvPr id="52" name="Text 50"/>
-          <p:cNvSpPr/>
-          <p:nvPr/>
-        </p:nvSpPr>
-        <p:spPr>
-          <a:xfrm>
-            <a:off x="7576947" y="4169664"/>
-            <a:ext cx="685800" cy="475488"/>
-          </a:xfrm>
-          <a:prstGeom prst="rect">
-            <a:avLst/>
-          </a:prstGeom>
-          <a:noFill/>
-          <a:ln/>
-        </p:spPr>
-        <p:txBody>
-          <a:bodyPr wrap="square" lIns="0" tIns="0" rIns="0" bIns="0" rtlCol="0" anchor="ctr"/>
-          <a:lstStyle/>
-          <a:p>
-            <a:pPr algn="ctr" indent="0" marL="0">
-              <a:buNone/>
-            </a:pPr>
-            <a:r>
-              <a:rPr lang="en-US" sz="900" b="1" dirty="0">
-                <a:solidFill>
-                  <a:srgbClr val="9D174D"/>
-                </a:solidFill>
-                <a:latin typeface="Trebuchet MS" pitchFamily="34" charset="0"/>
-                <a:ea typeface="Trebuchet MS" pitchFamily="34" charset="-122"/>
-                <a:cs typeface="Trebuchet MS" pitchFamily="34" charset="-120"/>
-              </a:rPr>
-              <a:t>s</a:t>
+              <a:t>le</a:t>
             </a:r>
             <a:endParaRPr lang="en-US" sz="900" dirty="0"/>
           </a:p>
@@ -34431,7 +33918,7 @@
                 <a:ea typeface="Calibri" pitchFamily="34" charset="-122"/>
                 <a:cs typeface="Calibri" pitchFamily="34" charset="-120"/>
               </a:rPr>
-              <a:t>Word Labs  •  wordlabs.app  •  Root: 'support' = hold up, carry from below</a:t>
+              <a:t>Word Labs  •  wordlabs.app  •  Root: 'support' = hold up, bear, carry</a:t>
             </a:r>
             <a:endParaRPr lang="en-US" sz="800" dirty="0"/>
           </a:p>
@@ -35600,7 +35087,7 @@
                 <a:ea typeface="Calibri" pitchFamily="34" charset="-122"/>
                 <a:cs typeface="Calibri" pitchFamily="34" charset="-120"/>
               </a:rPr>
-              <a:t>Word Labs  •  wordlabs.app  •  Root: 'support' = hold up, carry from below</a:t>
+              <a:t>Word Labs  •  wordlabs.app  •  Root: 'support' = hold up, bear, carry</a:t>
             </a:r>
             <a:endParaRPr lang="en-US" sz="800" dirty="0"/>
           </a:p>
@@ -36246,7 +35733,7 @@
                 <a:ea typeface="Trebuchet MS" pitchFamily="34" charset="-122"/>
                 <a:cs typeface="Trebuchet MS" pitchFamily="34" charset="-120"/>
               </a:rPr>
-              <a:t>life-</a:t>
+              <a:t>re-</a:t>
             </a:r>
             <a:endParaRPr lang="en-US" sz="1300" dirty="0"/>
           </a:p>
@@ -36399,7 +35886,7 @@
                 <a:ea typeface="Trebuchet MS" pitchFamily="34" charset="-122"/>
                 <a:cs typeface="Trebuchet MS" pitchFamily="34" charset="-120"/>
               </a:rPr>
-              <a:t>re-</a:t>
+              <a:t>non-</a:t>
             </a:r>
             <a:endParaRPr lang="en-US" sz="1300" dirty="0"/>
           </a:p>
@@ -36552,7 +36039,7 @@
                 <a:ea typeface="Trebuchet MS" pitchFamily="34" charset="-122"/>
                 <a:cs typeface="Trebuchet MS" pitchFamily="34" charset="-120"/>
               </a:rPr>
-              <a:t>non-</a:t>
+              <a:t>over-</a:t>
             </a:r>
             <a:endParaRPr lang="en-US" sz="1300" dirty="0"/>
           </a:p>
@@ -37142,7 +36629,7 @@
                 <a:ea typeface="Trebuchet MS" pitchFamily="34" charset="-122"/>
                 <a:cs typeface="Trebuchet MS" pitchFamily="34" charset="-120"/>
               </a:rPr>
-              <a:t>unsupportive</a:t>
+              <a:t>unsupported</a:t>
             </a:r>
             <a:endParaRPr lang="en-US" sz="1200" dirty="0"/>
           </a:p>
@@ -37500,7 +36987,7 @@
                 <a:ea typeface="Calibri" pitchFamily="34" charset="-122"/>
                 <a:cs typeface="Calibri" pitchFamily="34" charset="-120"/>
               </a:rPr>
-              <a:t>Word Labs  •  wordlabs.app  •  Root: 'support' = hold up, carry from below</a:t>
+              <a:t>Word Labs  •  wordlabs.app  •  Root: 'support' = hold up, bear, carry</a:t>
             </a:r>
             <a:endParaRPr lang="en-US" sz="800" dirty="0"/>
           </a:p>
@@ -37664,7 +37151,7 @@
                 <a:ea typeface="Calibri" pitchFamily="34" charset="-122"/>
                 <a:cs typeface="Calibri" pitchFamily="34" charset="-120"/>
               </a:rPr>
-              <a:t>The core part of a word carrying its basic meaning. For example, 'support' means 'hold up, carry from below'.</a:t>
+              <a:t>The core part of a word carrying its basic meaning. For example, 'support' means 'hold up, bear, carry'.</a:t>
             </a:r>
             <a:endParaRPr lang="en-US" sz="1350" dirty="0"/>
           </a:p>
@@ -38284,7 +37771,7 @@
                 <a:ea typeface="Calibri" pitchFamily="34" charset="-122"/>
                 <a:cs typeface="Calibri" pitchFamily="34" charset="-120"/>
               </a:rPr>
-              <a:t>Word Labs  •  wordlabs.app  •  Root: 'support' = hold up, carry from below</a:t>
+              <a:t>Word Labs  •  wordlabs.app  •  Root: 'support' = hold up, bear, carry</a:t>
             </a:r>
             <a:endParaRPr lang="en-US" sz="800" dirty="0"/>
           </a:p>
@@ -38396,7 +37883,7 @@
                 <a:ea typeface="Calibri" pitchFamily="34" charset="-122"/>
                 <a:cs typeface="Calibri" pitchFamily="34" charset="-120"/>
               </a:rPr>
-              <a:t>1.  The word 'supporter' contains the root 'support' plus the suffix '-er' meaning a person who does something.</a:t>
+              <a:t>1.  The prefix 'un-' in 'unsupported' means not or without.</a:t>
             </a:r>
             <a:endParaRPr lang="en-US" sz="1300" dirty="0"/>
           </a:p>
@@ -38535,7 +38022,7 @@
                 <a:ea typeface="Calibri" pitchFamily="34" charset="-122"/>
                 <a:cs typeface="Calibri" pitchFamily="34" charset="-120"/>
               </a:rPr>
-              <a:t>2.  The root 'support' comes from ancient Greek.</a:t>
+              <a:t>2.  The word 'supportive' means refusing to help someone.</a:t>
             </a:r>
             <a:endParaRPr lang="en-US" sz="1300" dirty="0"/>
           </a:p>
@@ -38674,7 +38161,7 @@
                 <a:ea typeface="Calibri" pitchFamily="34" charset="-122"/>
                 <a:cs typeface="Calibri" pitchFamily="34" charset="-120"/>
               </a:rPr>
-              <a:t>3.  The prefix 'un-' in 'unsupportive' means 'not'.</a:t>
+              <a:t>3.  The root 'support' comes from the Greek language.</a:t>
             </a:r>
             <a:endParaRPr lang="en-US" sz="1300" dirty="0"/>
           </a:p>
@@ -38697,11 +38184,11 @@
             </a:avLst>
           </a:prstGeom>
           <a:solidFill>
-            <a:srgbClr val="DCFCE7"/>
-          </a:solidFill>
-          <a:ln w="12700">
-            <a:solidFill>
-              <a:srgbClr val="16A34A"/>
+            <a:srgbClr val="FEE2E2"/>
+          </a:solidFill>
+          <a:ln w="12700">
+            <a:solidFill>
+              <a:srgbClr val="DC2626"/>
             </a:solidFill>
             <a:prstDash val="solid"/>
           </a:ln>
@@ -38734,13 +38221,13 @@
             <a:r>
               <a:rPr lang="en-US" sz="1100" b="1" dirty="0">
                 <a:solidFill>
-                  <a:srgbClr val="16A34A"/>
+                  <a:srgbClr val="DC2626"/>
                 </a:solidFill>
                 <a:latin typeface="Trebuchet MS" pitchFamily="34" charset="0"/>
                 <a:ea typeface="Trebuchet MS" pitchFamily="34" charset="-122"/>
                 <a:cs typeface="Trebuchet MS" pitchFamily="34" charset="-120"/>
               </a:rPr>
-              <a:t>TRUE</a:t>
+              <a:t>FALSE</a:t>
             </a:r>
             <a:endParaRPr lang="en-US" sz="1100" dirty="0"/>
           </a:p>
@@ -38813,7 +38300,7 @@
                 <a:ea typeface="Calibri" pitchFamily="34" charset="-122"/>
                 <a:cs typeface="Calibri" pitchFamily="34" charset="-120"/>
               </a:rPr>
-              <a:t>4.  A 'supportive' friend is one who is kind and helpful when you need them.</a:t>
+              <a:t>4.  The root 'support' carries the idea of holding up or helping.</a:t>
             </a:r>
             <a:endParaRPr lang="en-US" sz="1300" dirty="0"/>
           </a:p>
@@ -38952,7 +38439,7 @@
                 <a:ea typeface="Calibri" pitchFamily="34" charset="-122"/>
                 <a:cs typeface="Calibri" pitchFamily="34" charset="-120"/>
               </a:rPr>
-              <a:t>5.  The suffix '-ive' in 'supportive' means the same as the suffix '-er'.</a:t>
+              <a:t>5.  The word 'supporter' contains the root 'support' and the suffix '-er' meaning a person who does something.</a:t>
             </a:r>
             <a:endParaRPr lang="en-US" sz="1300" dirty="0"/>
           </a:p>
@@ -38975,11 +38462,11 @@
             </a:avLst>
           </a:prstGeom>
           <a:solidFill>
-            <a:srgbClr val="FEE2E2"/>
-          </a:solidFill>
-          <a:ln w="12700">
-            <a:solidFill>
-              <a:srgbClr val="DC2626"/>
+            <a:srgbClr val="DCFCE7"/>
+          </a:solidFill>
+          <a:ln w="12700">
+            <a:solidFill>
+              <a:srgbClr val="16A34A"/>
             </a:solidFill>
             <a:prstDash val="solid"/>
           </a:ln>
@@ -39012,13 +38499,13 @@
             <a:r>
               <a:rPr lang="en-US" sz="1100" b="1" dirty="0">
                 <a:solidFill>
-                  <a:srgbClr val="DC2626"/>
+                  <a:srgbClr val="16A34A"/>
                 </a:solidFill>
                 <a:latin typeface="Trebuchet MS" pitchFamily="34" charset="0"/>
                 <a:ea typeface="Trebuchet MS" pitchFamily="34" charset="-122"/>
                 <a:cs typeface="Trebuchet MS" pitchFamily="34" charset="-120"/>
               </a:rPr>
-              <a:t>FALSE</a:t>
+              <a:t>TRUE</a:t>
             </a:r>
             <a:endParaRPr lang="en-US" sz="1100" dirty="0"/>
           </a:p>
@@ -39310,7 +38797,7 @@
                 <a:ea typeface="Calibri" pitchFamily="34" charset="-122"/>
                 <a:cs typeface="Calibri" pitchFamily="34" charset="-120"/>
               </a:rPr>
-              <a:t>Word Labs  •  wordlabs.app  •  Root: 'support' = hold up, carry from below</a:t>
+              <a:t>Word Labs  •  wordlabs.app  •  Root: 'support' = hold up, bear, carry</a:t>
             </a:r>
             <a:endParaRPr lang="en-US" sz="800" dirty="0"/>
           </a:p>
@@ -39447,7 +38934,7 @@
                 <a:ea typeface="Trebuchet MS" pitchFamily="34" charset="-122"/>
                 <a:cs typeface="Trebuchet MS" pitchFamily="34" charset="-120"/>
               </a:rPr>
-              <a:t>hold up, carry from below</a:t>
+              <a:t>hold up, bear, carry</a:t>
             </a:r>
             <a:endParaRPr lang="en-US" sz="2000" dirty="0"/>
           </a:p>
@@ -39987,7 +39474,7 @@
                 <a:ea typeface="Trebuchet MS" pitchFamily="34" charset="-122"/>
                 <a:cs typeface="Trebuchet MS" pitchFamily="34" charset="-120"/>
               </a:rPr>
-              <a:t>unsupportive</a:t>
+              <a:t>unsupported</a:t>
             </a:r>
             <a:endParaRPr lang="en-US" sz="1300" dirty="0"/>
           </a:p>
@@ -40279,7 +39766,7 @@
                 <a:ea typeface="Calibri" pitchFamily="34" charset="-122"/>
                 <a:cs typeface="Calibri" pitchFamily="34" charset="-120"/>
               </a:rPr>
-              <a:t>Word Labs  •  wordlabs.app  •  Root: 'support' = hold up, carry from below</a:t>
+              <a:t>Word Labs  •  wordlabs.app  •  Root: 'support' = hold up, bear, carry</a:t>
             </a:r>
             <a:endParaRPr lang="en-US" sz="800" dirty="0"/>
           </a:p>
@@ -40925,7 +40412,7 @@
                 <a:ea typeface="Trebuchet MS" pitchFamily="34" charset="-122"/>
                 <a:cs typeface="Trebuchet MS" pitchFamily="34" charset="-120"/>
               </a:rPr>
-              <a:t>life-</a:t>
+              <a:t>re-</a:t>
             </a:r>
             <a:endParaRPr lang="en-US" sz="1300" dirty="0"/>
           </a:p>
@@ -41078,7 +40565,7 @@
                 <a:ea typeface="Trebuchet MS" pitchFamily="34" charset="-122"/>
                 <a:cs typeface="Trebuchet MS" pitchFamily="34" charset="-120"/>
               </a:rPr>
-              <a:t>re-</a:t>
+              <a:t>non-</a:t>
             </a:r>
             <a:endParaRPr lang="en-US" sz="1300" dirty="0"/>
           </a:p>
@@ -41231,7 +40718,7 @@
                 <a:ea typeface="Trebuchet MS" pitchFamily="34" charset="-122"/>
                 <a:cs typeface="Trebuchet MS" pitchFamily="34" charset="-120"/>
               </a:rPr>
-              <a:t>non-</a:t>
+              <a:t>over-</a:t>
             </a:r>
             <a:endParaRPr lang="en-US" sz="1300" dirty="0"/>
           </a:p>
@@ -42053,7 +41540,7 @@
                 <a:ea typeface="Calibri" pitchFamily="34" charset="-122"/>
                 <a:cs typeface="Calibri" pitchFamily="34" charset="-120"/>
               </a:rPr>
-              <a:t>Word Labs  •  wordlabs.app  •  Root: 'support' = hold up, carry from below</a:t>
+              <a:t>Word Labs  •  wordlabs.app  •  Root: 'support' = hold up, bear, carry</a:t>
             </a:r>
             <a:endParaRPr lang="en-US" sz="800" dirty="0"/>
           </a:p>
@@ -42231,7 +41718,7 @@
                 <a:ea typeface="Calibri" pitchFamily="34" charset="-122"/>
                 <a:cs typeface="Calibri" pitchFamily="34" charset="-120"/>
               </a:rPr>
-              <a:t>Not being helpful or kind to someone who needs you.</a:t>
+              <a:t>Without any help, proof, or something holding it up.</a:t>
             </a:r>
             <a:endParaRPr lang="en-US" sz="1200" dirty="0"/>
           </a:p>
@@ -42370,7 +41857,7 @@
                 <a:ea typeface="Calibri" pitchFamily="34" charset="-122"/>
                 <a:cs typeface="Calibri" pitchFamily="34" charset="-120"/>
               </a:rPr>
-              <a:t>Being kind and helpful to someone who needs you.</a:t>
+              <a:t>Being kind and helpful to someone who needs encouragement.</a:t>
             </a:r>
             <a:endParaRPr lang="en-US" sz="1200" dirty="0"/>
           </a:p>
@@ -42509,7 +41996,7 @@
                 <a:ea typeface="Calibri" pitchFamily="34" charset="-122"/>
                 <a:cs typeface="Calibri" pitchFamily="34" charset="-120"/>
               </a:rPr>
-              <a:t>A person who helps, cheers for, or backs someone else.</a:t>
+              <a:t>A person who helps or cheers for someone, like a sports fan.</a:t>
             </a:r>
             <a:endParaRPr lang="en-US" sz="1200" dirty="0"/>
           </a:p>
@@ -42648,7 +42135,7 @@
                 <a:ea typeface="Calibri" pitchFamily="34" charset="-122"/>
                 <a:cs typeface="Calibri" pitchFamily="34" charset="-120"/>
               </a:rPr>
-              <a:t>Something that can be backed up with reasons or evidence.</a:t>
+              <a:t>Able to be backed up with reasons or evidence.</a:t>
             </a:r>
             <a:endParaRPr lang="en-US" sz="1200" dirty="0"/>
           </a:p>
@@ -42999,7 +42486,7 @@
                 <a:ea typeface="Trebuchet MS" pitchFamily="34" charset="-122"/>
                 <a:cs typeface="Trebuchet MS" pitchFamily="34" charset="-120"/>
               </a:rPr>
-              <a:t>unsupportive</a:t>
+              <a:t>unsupported</a:t>
             </a:r>
             <a:endParaRPr lang="en-US" sz="1200" dirty="0"/>
           </a:p>
@@ -43357,7 +42844,7 @@
                 <a:ea typeface="Calibri" pitchFamily="34" charset="-122"/>
                 <a:cs typeface="Calibri" pitchFamily="34" charset="-120"/>
               </a:rPr>
-              <a:t>Word Labs  •  wordlabs.app  •  Root: 'support' = hold up, carry from below</a:t>
+              <a:t>Word Labs  •  wordlabs.app  •  Root: 'support' = hold up, bear, carry</a:t>
             </a:r>
             <a:endParaRPr lang="en-US" sz="800" dirty="0"/>
           </a:p>
@@ -43560,7 +43047,7 @@
                 <a:ea typeface="Calibri" pitchFamily="34" charset="-122"/>
                 <a:cs typeface="Calibri" pitchFamily="34" charset="-120"/>
               </a:rPr>
-              <a:t>The sturdy bridge was designed to support the weight of hundreds of cars every day.</a:t>
+              <a:t>The bridge was designed to support the weight of hundreds of cars crossing it every day.</a:t>
             </a:r>
             <a:endParaRPr lang="en-US" sz="1500" dirty="0"/>
           </a:p>
@@ -43724,7 +43211,7 @@
                 <a:ea typeface="Calibri" pitchFamily="34" charset="-122"/>
                 <a:cs typeface="Calibri" pitchFamily="34" charset="-120"/>
               </a:rPr>
-              <a:t>She felt very lucky to have such a supportive family cheering her on at the swimming carnival.</a:t>
+              <a:t>Our class decided to show we were supportive of the new student by including her in our games at lunch.</a:t>
             </a:r>
             <a:endParaRPr lang="en-US" sz="1500" dirty="0"/>
           </a:p>
@@ -43888,7 +43375,7 @@
                 <a:ea typeface="Calibri" pitchFamily="34" charset="-122"/>
                 <a:cs typeface="Calibri" pitchFamily="34" charset="-120"/>
               </a:rPr>
-              <a:t>The team's loyal supporters wore matching colours and sang songs throughout the whole game.</a:t>
+              <a:t>The school counsellor is a great supporter of students who are feeling worried or upset.</a:t>
             </a:r>
             <a:endParaRPr lang="en-US" sz="1500" dirty="0"/>
           </a:p>
